--- a/2.Talleres/2.Taller/presentacion/Presentacion_Taller_2_MLP_Backpropagation.pptx
+++ b/2.Talleres/2.Taller/presentacion/Presentacion_Taller_2_MLP_Backpropagation.pptx
@@ -36492,7 +36492,7 @@
         </p:blipFill>
         <p:spPr>
           <a:xfrm>
-            <a:off x="777240" y="411480"/>
+            <a:off x="868680" y="411480"/>
             <a:ext cx="822960" cy="822960"/>
           </a:xfrm>
           <a:prstGeom prst="rect">
@@ -36517,7 +36517,7 @@
         <p:spPr>
           <a:xfrm>
             <a:off x="6812280" y="475488"/>
-            <a:ext cx="1554480" cy="658368"/>
+            <a:ext cx="1508760" cy="640080"/>
           </a:xfrm>
           <a:prstGeom prst="rect">
             <a:avLst/>
@@ -36532,8 +36532,8 @@
         </p:nvSpPr>
         <p:spPr>
           <a:xfrm>
-            <a:off x="777240" y="1325880"/>
-            <a:ext cx="7589520" cy="2011680"/>
+            <a:off x="868680" y="1325880"/>
+            <a:ext cx="7406640" cy="2011680"/>
           </a:xfrm>
           <a:prstGeom prst="rect">
             <a:avLst/>
@@ -36548,9 +36548,9 @@
           <a:p>
             <a:pPr>
               <a:spcAft>
-                <a:spcPts val="1000"/>
-              </a:spcAft>
-              <a:defRPr sz="1050" b="1">
+                <a:spcPts val="800"/>
+              </a:spcAft>
+              <a:defRPr sz="950" b="1">
                 <a:solidFill>
                   <a:srgbClr val="435D74"/>
                 </a:solidFill>
@@ -36558,19 +36558,15 @@
               </a:defRPr>
             </a:pPr>
             <a:r>
-              <a:t>UNIVERSIDAD DISTRITAL FRANCISCO JOSÉ DE CALDAS</a:t>
-            </a:r>
-            <a:br/>
-            <a:r>
-              <a:t>MAESTRÍA EN CIENCIAS DE LA INFORMACIÓN Y LAS COMUNICACIONES</a:t>
+              <a:t>UNIVERSIDAD DISTRITAL FRANCISCO JOSÉ DE CALDAS  •  MAESTRÍA EN CIENCIAS DE LA INFORMACIÓN</a:t>
             </a:r>
           </a:p>
           <a:p>
             <a:pPr>
               <a:spcAft>
-                <a:spcPts val="800"/>
-              </a:spcAft>
-              <a:defRPr sz="2800" b="1">
+                <a:spcPts val="600"/>
+              </a:spcAft>
+              <a:defRPr sz="2700" b="1">
                 <a:solidFill>
                   <a:srgbClr val="0E2A47"/>
                 </a:solidFill>
@@ -36587,7 +36583,7 @@
           </a:p>
           <a:p>
             <a:pPr>
-              <a:defRPr sz="1200">
+              <a:defRPr sz="1150">
                 <a:solidFill>
                   <a:srgbClr val="88664A"/>
                 </a:solidFill>
@@ -36608,18 +36604,18 @@
         </p:nvSpPr>
         <p:spPr>
           <a:xfrm>
-            <a:off x="777240" y="3520440"/>
-            <a:ext cx="7589520" cy="1234440"/>
+            <a:off x="868680" y="3520440"/>
+            <a:ext cx="7406640" cy="1188720"/>
           </a:xfrm>
           <a:prstGeom prst="roundRect">
             <a:avLst/>
           </a:prstGeom>
           <a:solidFill>
-            <a:srgbClr val="F8F9FA"/>
+            <a:srgbClr val="F9FAFB"/>
           </a:solidFill>
           <a:ln w="12700">
             <a:solidFill>
-              <a:srgbClr val="DADEE2"/>
+              <a:srgbClr val="DEE2E6"/>
             </a:solidFill>
           </a:ln>
         </p:spPr>
@@ -36653,8 +36649,8 @@
         </p:nvSpPr>
         <p:spPr>
           <a:xfrm>
-            <a:off x="960120" y="3584448"/>
-            <a:ext cx="7223760" cy="1097280"/>
+            <a:off x="1051560" y="3593592"/>
+            <a:ext cx="7040880" cy="1051560"/>
           </a:xfrm>
           <a:prstGeom prst="rect">
             <a:avLst/>
@@ -36673,7 +36669,7 @@
               </a:spcAft>
             </a:pPr>
             <a:r>
-              <a:rPr b="1" sz="1100">
+              <a:rPr b="1" sz="1050">
                 <a:solidFill>
                   <a:srgbClr val="0E2A47"/>
                 </a:solidFill>
@@ -36681,15 +36677,15 @@
               <a:t>Asignatura: </a:t>
             </a:r>
             <a:r>
-              <a:rPr sz="1100">
+              <a:rPr sz="1050">
                 <a:solidFill>
                   <a:srgbClr val="222222"/>
                 </a:solidFill>
               </a:rPr>
-              <a:t>Inteligencia Computacional Aplicada  |  </a:t>
+              <a:t>Inteligencia Computacional Aplicada   |   </a:t>
             </a:r>
             <a:r>
-              <a:rPr b="1" sz="1100">
+              <a:rPr b="1" sz="1050">
                 <a:solidFill>
                   <a:srgbClr val="0E2A47"/>
                 </a:solidFill>
@@ -36697,7 +36693,7 @@
               <a:t>Docente: </a:t>
             </a:r>
             <a:r>
-              <a:rPr sz="1100">
+              <a:rPr sz="1050">
                 <a:solidFill>
                   <a:srgbClr val="222222"/>
                 </a:solidFill>
@@ -36712,7 +36708,7 @@
               </a:spcAft>
             </a:pPr>
             <a:r>
-              <a:rPr b="1" sz="1100">
+              <a:rPr b="1" sz="1050">
                 <a:solidFill>
                   <a:srgbClr val="0E2A47"/>
                 </a:solidFill>
@@ -36720,15 +36716,15 @@
               <a:t>Estudiante: </a:t>
             </a:r>
             <a:r>
-              <a:rPr sz="1100">
+              <a:rPr sz="1050">
                 <a:solidFill>
                   <a:srgbClr val="222222"/>
                 </a:solidFill>
               </a:rPr>
-              <a:t>Juan Felipe Rodríguez Galindo  |  </a:t>
+              <a:t>Juan Felipe Rodríguez Galindo   |   </a:t>
             </a:r>
             <a:r>
-              <a:rPr b="1" sz="1100">
+              <a:rPr b="1" sz="1050">
                 <a:solidFill>
                   <a:srgbClr val="0E2A47"/>
                 </a:solidFill>
@@ -36736,7 +36732,7 @@
               <a:t>Código: </a:t>
             </a:r>
             <a:r>
-              <a:rPr sz="1100">
+              <a:rPr sz="1050">
                 <a:solidFill>
                   <a:srgbClr val="222222"/>
                 </a:solidFill>
@@ -36746,9 +36742,9 @@
           </a:p>
           <a:p>
             <a:r>
-              <a:rPr sz="1000">
+              <a:rPr sz="919">
                 <a:solidFill>
-                  <a:srgbClr val="595959"/>
+                  <a:srgbClr val="5F6973"/>
                 </a:solidFill>
               </a:rPr>
               <a:t>Entregable Oficial: Presentación Ejecutiva y Defensa Técnica  •  Bogotá D.C., Septiembre 2026</a:t>
@@ -36786,48 +36782,118 @@
         </p:nvSpPr>
         <p:spPr>
           <a:xfrm>
-            <a:off x="868680" y="347472"/>
-            <a:ext cx="7589520" cy="777240"/>
+            <a:off x="914400" y="502920"/>
+            <a:ext cx="4937760" cy="640080"/>
           </a:xfrm>
         </p:spPr>
         <p:txBody>
-          <a:bodyPr wrap="square" lIns="0" tIns="0" rIns="0" bIns="0"/>
+          <a:bodyPr wrap="square" lIns="0" rIns="0" tIns="0" bIns="0"/>
           <a:lstStyle/>
           <a:p>
             <a:pPr algn="l"/>
             <a:r>
-              <a:rPr sz="950" b="1">
-                <a:solidFill>
-                  <a:srgbClr val="88664A"/>
-                </a:solidFill>
-                <a:latin typeface="Karla"/>
-              </a:rPr>
-              <a:t>09. SÍNTESIS PARADIGMÁTICA
-</a:t>
-            </a:r>
-            <a:r>
-              <a:rPr sz="2100" b="1">
+              <a:rPr sz="1750" b="1">
                 <a:solidFill>
                   <a:srgbClr val="0E2A47"/>
                 </a:solidFill>
                 <a:latin typeface="DM Serif Display"/>
               </a:rPr>
-              <a:t>Comparativa Multidimensional y Directrices de Ingeniería</a:t>
+              <a:t>Evolución Paradigmática: Del Perceptrón Monocapa al MLP</a:t>
+            </a:r>
+          </a:p>
+        </p:txBody>
+      </p:sp>
+      <p:sp>
+        <p:nvSpPr>
+          <p:cNvPr id="3" name="Rounded Rectangle 2"/>
+          <p:cNvSpPr/>
+          <p:nvPr/>
+        </p:nvSpPr>
+        <p:spPr>
+          <a:xfrm>
+            <a:off x="5897880" y="420624"/>
+            <a:ext cx="2286000" cy="256032"/>
+          </a:xfrm>
+          <a:prstGeom prst="roundRect">
+            <a:avLst/>
+          </a:prstGeom>
+          <a:solidFill>
+            <a:srgbClr val="FCF8F2"/>
+          </a:solidFill>
+          <a:ln w="12700">
+            <a:solidFill>
+              <a:srgbClr val="EDDFCD"/>
+            </a:solidFill>
+          </a:ln>
+        </p:spPr>
+        <p:style>
+          <a:lnRef idx="1">
+            <a:schemeClr val="accent1"/>
+          </a:lnRef>
+          <a:fillRef idx="3">
+            <a:schemeClr val="accent1"/>
+          </a:fillRef>
+          <a:effectRef idx="2">
+            <a:schemeClr val="accent1"/>
+          </a:effectRef>
+          <a:fontRef idx="minor">
+            <a:schemeClr val="lt1"/>
+          </a:fontRef>
+        </p:style>
+        <p:txBody>
+          <a:bodyPr rtlCol="0" anchor="ctr"/>
+          <a:lstStyle/>
+          <a:p>
+            <a:pPr algn="ctr"/>
+          </a:p>
+        </p:txBody>
+      </p:sp>
+      <p:sp>
+        <p:nvSpPr>
+          <p:cNvPr id="4" name="TextBox 3"/>
+          <p:cNvSpPr txBox="1"/>
+          <p:nvPr/>
+        </p:nvSpPr>
+        <p:spPr>
+          <a:xfrm>
+            <a:off x="5897880" y="438912"/>
+            <a:ext cx="2286000" cy="219456"/>
+          </a:xfrm>
+          <a:prstGeom prst="rect">
+            <a:avLst/>
+          </a:prstGeom>
+          <a:noFill/>
+        </p:spPr>
+        <p:txBody>
+          <a:bodyPr wrap="square" lIns="0" rIns="0" tIns="0" bIns="0">
+            <a:spAutoFit/>
+          </a:bodyPr>
+          <a:lstStyle/>
+          <a:p>
+            <a:pPr algn="ctr"/>
+            <a:r>
+              <a:rPr sz="780" b="1">
+                <a:solidFill>
+                  <a:srgbClr val="7D542D"/>
+                </a:solidFill>
+                <a:latin typeface="Karla"/>
+              </a:rPr>
+              <a:t>09. SÍNTESIS PARADIGMÁTICA</a:t>
             </a:r>
           </a:p>
         </p:txBody>
       </p:sp>
       <p:graphicFrame>
         <p:nvGraphicFramePr>
-          <p:cNvPr id="3" name="Table 2"/>
+          <p:cNvPr id="5" name="Table 4"/>
           <p:cNvGraphicFramePr>
             <a:graphicFrameLocks noGrp="1"/>
           </p:cNvGraphicFramePr>
           <p:nvPr/>
         </p:nvGraphicFramePr>
         <p:xfrm>
-          <a:off x="777240" y="1188720"/>
-          <a:ext cx="7589520" cy="2011680"/>
+          <a:off x="914400" y="1234440"/>
+          <a:ext cx="7315200" cy="2011680"/>
         </p:xfrm>
         <a:graphic>
           <a:graphicData uri="http://schemas.openxmlformats.org/drawingml/2006/table">
@@ -36836,10 +36902,10 @@
                 <a:tableStyleId>{5C22544A-7EE6-4342-B048-85BDC9FD1C3A}</a:tableStyleId>
               </a:tblPr>
               <a:tblGrid>
-                <a:gridCol w="1691640"/>
-                <a:gridCol w="1920240"/>
-                <a:gridCol w="1920240"/>
-                <a:gridCol w="2057400"/>
+                <a:gridCol w="1645920"/>
+                <a:gridCol w="1828800"/>
+                <a:gridCol w="1828800"/>
+                <a:gridCol w="2011680"/>
               </a:tblGrid>
               <a:tr h="402336">
                 <a:tc>
@@ -36848,7 +36914,7 @@
                     <a:lstStyle/>
                     <a:p>
                       <a:pPr algn="ctr">
-                        <a:defRPr sz="1000" b="1">
+                        <a:defRPr sz="950" b="1">
                           <a:solidFill>
                             <a:srgbClr val="FFFFFF"/>
                           </a:solidFill>
@@ -36872,7 +36938,7 @@
                     <a:lstStyle/>
                     <a:p>
                       <a:pPr algn="ctr">
-                        <a:defRPr sz="1000" b="1">
+                        <a:defRPr sz="950" b="1">
                           <a:solidFill>
                             <a:srgbClr val="FFFFFF"/>
                           </a:solidFill>
@@ -36896,7 +36962,7 @@
                     <a:lstStyle/>
                     <a:p>
                       <a:pPr algn="ctr">
-                        <a:defRPr sz="1000" b="1">
+                        <a:defRPr sz="950" b="1">
                           <a:solidFill>
                             <a:srgbClr val="FFFFFF"/>
                           </a:solidFill>
@@ -36920,7 +36986,7 @@
                     <a:lstStyle/>
                     <a:p>
                       <a:pPr algn="ctr">
-                        <a:defRPr sz="1000" b="1">
+                        <a:defRPr sz="950" b="1">
                           <a:solidFill>
                             <a:srgbClr val="FFFFFF"/>
                           </a:solidFill>
@@ -36946,7 +37012,7 @@
                     <a:lstStyle/>
                     <a:p>
                       <a:pPr algn="ctr">
-                        <a:defRPr sz="950" b="1">
+                        <a:defRPr sz="880" b="1">
                           <a:solidFill>
                             <a:srgbClr val="222222"/>
                           </a:solidFill>
@@ -36960,7 +37026,7 @@
                   </a:txBody>
                   <a:tcPr>
                     <a:solidFill>
-                      <a:srgbClr val="F8F9FA"/>
+                      <a:srgbClr val="F9FAFB"/>
                     </a:solidFill>
                   </a:tcPr>
                 </a:tc>
@@ -36970,7 +37036,7 @@
                     <a:lstStyle/>
                     <a:p>
                       <a:pPr algn="l">
-                        <a:defRPr sz="950">
+                        <a:defRPr sz="880">
                           <a:solidFill>
                             <a:srgbClr val="222222"/>
                           </a:solidFill>
@@ -36984,7 +37050,7 @@
                   </a:txBody>
                   <a:tcPr>
                     <a:solidFill>
-                      <a:srgbClr val="F8F9FA"/>
+                      <a:srgbClr val="F9FAFB"/>
                     </a:solidFill>
                   </a:tcPr>
                 </a:tc>
@@ -36994,7 +37060,7 @@
                     <a:lstStyle/>
                     <a:p>
                       <a:pPr algn="l">
-                        <a:defRPr sz="950">
+                        <a:defRPr sz="880">
                           <a:solidFill>
                             <a:srgbClr val="222222"/>
                           </a:solidFill>
@@ -37008,7 +37074,7 @@
                   </a:txBody>
                   <a:tcPr>
                     <a:solidFill>
-                      <a:srgbClr val="F8F9FA"/>
+                      <a:srgbClr val="F9FAFB"/>
                     </a:solidFill>
                   </a:tcPr>
                 </a:tc>
@@ -37018,7 +37084,7 @@
                     <a:lstStyle/>
                     <a:p>
                       <a:pPr algn="l">
-                        <a:defRPr sz="950" b="1">
+                        <a:defRPr sz="880" b="1">
                           <a:solidFill>
                             <a:srgbClr val="0E2A47"/>
                           </a:solidFill>
@@ -37032,7 +37098,7 @@
                   </a:txBody>
                   <a:tcPr>
                     <a:solidFill>
-                      <a:srgbClr val="F8F9FA"/>
+                      <a:srgbClr val="F9FAFB"/>
                     </a:solidFill>
                   </a:tcPr>
                 </a:tc>
@@ -37044,7 +37110,7 @@
                     <a:lstStyle/>
                     <a:p>
                       <a:pPr algn="ctr">
-                        <a:defRPr sz="950" b="1">
+                        <a:defRPr sz="880" b="1">
                           <a:solidFill>
                             <a:srgbClr val="222222"/>
                           </a:solidFill>
@@ -37058,7 +37124,7 @@
                   </a:txBody>
                   <a:tcPr>
                     <a:solidFill>
-                      <a:srgbClr val="F5F3EF"/>
+                      <a:srgbClr val="F4F6F8"/>
                     </a:solidFill>
                   </a:tcPr>
                 </a:tc>
@@ -37068,7 +37134,7 @@
                     <a:lstStyle/>
                     <a:p>
                       <a:pPr algn="l">
-                        <a:defRPr sz="950">
+                        <a:defRPr sz="880">
                           <a:solidFill>
                             <a:srgbClr val="222222"/>
                           </a:solidFill>
@@ -37082,7 +37148,7 @@
                   </a:txBody>
                   <a:tcPr>
                     <a:solidFill>
-                      <a:srgbClr val="F5F3EF"/>
+                      <a:srgbClr val="F4F6F8"/>
                     </a:solidFill>
                   </a:tcPr>
                 </a:tc>
@@ -37092,7 +37158,7 @@
                     <a:lstStyle/>
                     <a:p>
                       <a:pPr algn="l">
-                        <a:defRPr sz="950">
+                        <a:defRPr sz="880">
                           <a:solidFill>
                             <a:srgbClr val="222222"/>
                           </a:solidFill>
@@ -37106,7 +37172,7 @@
                   </a:txBody>
                   <a:tcPr>
                     <a:solidFill>
-                      <a:srgbClr val="F5F3EF"/>
+                      <a:srgbClr val="F4F6F8"/>
                     </a:solidFill>
                   </a:tcPr>
                 </a:tc>
@@ -37116,7 +37182,7 @@
                     <a:lstStyle/>
                     <a:p>
                       <a:pPr algn="l">
-                        <a:defRPr sz="950" b="1">
+                        <a:defRPr sz="880" b="1">
                           <a:solidFill>
                             <a:srgbClr val="0E2A47"/>
                           </a:solidFill>
@@ -37124,13 +37190,13 @@
                         </a:defRPr>
                       </a:pPr>
                       <a:r>
-                        <a:t>Sigmoide / Tanh (diferenciable)</a:t>
+                        <a:t>Sigmoide / Tanh suave (diferenciable)</a:t>
                       </a:r>
                     </a:p>
                   </a:txBody>
                   <a:tcPr>
                     <a:solidFill>
-                      <a:srgbClr val="F5F3EF"/>
+                      <a:srgbClr val="F4F6F8"/>
                     </a:solidFill>
                   </a:tcPr>
                 </a:tc>
@@ -37142,7 +37208,7 @@
                     <a:lstStyle/>
                     <a:p>
                       <a:pPr algn="ctr">
-                        <a:defRPr sz="950" b="1">
+                        <a:defRPr sz="880" b="1">
                           <a:solidFill>
                             <a:srgbClr val="222222"/>
                           </a:solidFill>
@@ -37156,7 +37222,7 @@
                   </a:txBody>
                   <a:tcPr>
                     <a:solidFill>
-                      <a:srgbClr val="F8F9FA"/>
+                      <a:srgbClr val="F9FAFB"/>
                     </a:solidFill>
                   </a:tcPr>
                 </a:tc>
@@ -37166,7 +37232,7 @@
                     <a:lstStyle/>
                     <a:p>
                       <a:pPr algn="l">
-                        <a:defRPr sz="950">
+                        <a:defRPr sz="880">
                           <a:solidFill>
                             <a:srgbClr val="222222"/>
                           </a:solidFill>
@@ -37180,7 +37246,7 @@
                   </a:txBody>
                   <a:tcPr>
                     <a:solidFill>
-                      <a:srgbClr val="F8F9FA"/>
+                      <a:srgbClr val="F9FAFB"/>
                     </a:solidFill>
                   </a:tcPr>
                 </a:tc>
@@ -37190,7 +37256,7 @@
                     <a:lstStyle/>
                     <a:p>
                       <a:pPr algn="l">
-                        <a:defRPr sz="950">
+                        <a:defRPr sz="880">
                           <a:solidFill>
                             <a:srgbClr val="222222"/>
                           </a:solidFill>
@@ -37204,7 +37270,7 @@
                   </a:txBody>
                   <a:tcPr>
                     <a:solidFill>
-                      <a:srgbClr val="F8F9FA"/>
+                      <a:srgbClr val="F9FAFB"/>
                     </a:solidFill>
                   </a:tcPr>
                 </a:tc>
@@ -37214,7 +37280,7 @@
                     <a:lstStyle/>
                     <a:p>
                       <a:pPr algn="l">
-                        <a:defRPr sz="950" b="1">
+                        <a:defRPr sz="880" b="1">
                           <a:solidFill>
                             <a:srgbClr val="0E2A47"/>
                           </a:solidFill>
@@ -37222,13 +37288,13 @@
                         </a:defRPr>
                       </a:pPr>
                       <a:r>
-                        <a:t>Delta Generalizada + Inercia β</a:t>
+                        <a:t>Delta Generalizada + Momento β</a:t>
                       </a:r>
                     </a:p>
                   </a:txBody>
                   <a:tcPr>
                     <a:solidFill>
-                      <a:srgbClr val="F8F9FA"/>
+                      <a:srgbClr val="F9FAFB"/>
                     </a:solidFill>
                   </a:tcPr>
                 </a:tc>
@@ -37240,7 +37306,7 @@
                     <a:lstStyle/>
                     <a:p>
                       <a:pPr algn="ctr">
-                        <a:defRPr sz="950" b="1">
+                        <a:defRPr sz="880" b="1">
                           <a:solidFill>
                             <a:srgbClr val="222222"/>
                           </a:solidFill>
@@ -37248,13 +37314,13 @@
                         </a:defRPr>
                       </a:pPr>
                       <a:r>
-                        <a:t>Convergencia XOR</a:t>
+                        <a:t>Desempeño XOR</a:t>
                       </a:r>
                     </a:p>
                   </a:txBody>
                   <a:tcPr>
                     <a:solidFill>
-                      <a:srgbClr val="F5F3EF"/>
+                      <a:srgbClr val="F4F6F8"/>
                     </a:solidFill>
                   </a:tcPr>
                 </a:tc>
@@ -37264,7 +37330,7 @@
                     <a:lstStyle/>
                     <a:p>
                       <a:pPr algn="l">
-                        <a:defRPr sz="950">
+                        <a:defRPr sz="880">
                           <a:solidFill>
                             <a:srgbClr val="222222"/>
                           </a:solidFill>
@@ -37278,7 +37344,7 @@
                   </a:txBody>
                   <a:tcPr>
                     <a:solidFill>
-                      <a:srgbClr val="F5F3EF"/>
+                      <a:srgbClr val="F4F6F8"/>
                     </a:solidFill>
                   </a:tcPr>
                 </a:tc>
@@ -37288,7 +37354,7 @@
                     <a:lstStyle/>
                     <a:p>
                       <a:pPr algn="l">
-                        <a:defRPr sz="950">
+                        <a:defRPr sz="880">
                           <a:solidFill>
                             <a:srgbClr val="222222"/>
                           </a:solidFill>
@@ -37302,7 +37368,7 @@
                   </a:txBody>
                   <a:tcPr>
                     <a:solidFill>
-                      <a:srgbClr val="F5F3EF"/>
+                      <a:srgbClr val="F4F6F8"/>
                     </a:solidFill>
                   </a:tcPr>
                 </a:tc>
@@ -37312,7 +37378,7 @@
                     <a:lstStyle/>
                     <a:p>
                       <a:pPr algn="l">
-                        <a:defRPr sz="950" b="1">
+                        <a:defRPr sz="880" b="1">
                           <a:solidFill>
                             <a:srgbClr val="0E2A47"/>
                           </a:solidFill>
@@ -37326,7 +37392,7 @@
                   </a:txBody>
                   <a:tcPr>
                     <a:solidFill>
-                      <a:srgbClr val="F5F3EF"/>
+                      <a:srgbClr val="F4F6F8"/>
                     </a:solidFill>
                   </a:tcPr>
                 </a:tc>
@@ -37337,24 +37403,24 @@
       </p:graphicFrame>
       <p:sp>
         <p:nvSpPr>
-          <p:cNvPr id="4" name="Rounded Rectangle 3"/>
+          <p:cNvPr id="6" name="Rounded Rectangle 5"/>
           <p:cNvSpPr/>
           <p:nvPr/>
         </p:nvSpPr>
         <p:spPr>
           <a:xfrm>
-            <a:off x="777240" y="3337560"/>
-            <a:ext cx="7589520" cy="1463040"/>
+            <a:off x="914400" y="3429000"/>
+            <a:ext cx="1737360" cy="1234440"/>
           </a:xfrm>
           <a:prstGeom prst="roundRect">
             <a:avLst/>
           </a:prstGeom>
           <a:solidFill>
-            <a:srgbClr val="FFFFFF"/>
+            <a:srgbClr val="F9FAFB"/>
           </a:solidFill>
           <a:ln w="12700">
             <a:solidFill>
-              <a:srgbClr val="DADEE2"/>
+              <a:srgbClr val="DEE2E6"/>
             </a:solidFill>
           </a:ln>
         </p:spPr>
@@ -37382,14 +37448,14 @@
       </p:sp>
       <p:sp>
         <p:nvSpPr>
-          <p:cNvPr id="5" name="TextBox 4"/>
+          <p:cNvPr id="7" name="TextBox 6"/>
           <p:cNvSpPr txBox="1"/>
           <p:nvPr/>
         </p:nvSpPr>
         <p:spPr>
           <a:xfrm>
-            <a:off x="914400" y="3401568"/>
-            <a:ext cx="7315200" cy="1325880"/>
+            <a:off x="987552" y="3520440"/>
+            <a:ext cx="1591056" cy="1051560"/>
           </a:xfrm>
           <a:prstGeom prst="rect">
             <a:avLst/>
@@ -37406,151 +37472,319 @@
               <a:spcAft>
                 <a:spcPts val="400"/>
               </a:spcAft>
-              <a:defRPr sz="1200" b="1">
-                <a:solidFill>
-                  <a:srgbClr val="88664A"/>
-                </a:solidFill>
-                <a:latin typeface="DM Serif Display"/>
-              </a:defRPr>
-            </a:pPr>
-            <a:r>
-              <a:t>Directrices Prácticas de Ingeniería Neuronal</a:t>
-            </a:r>
-          </a:p>
-          <a:p>
-            <a:pPr algn="l">
-              <a:spcAft>
-                <a:spcPts val="300"/>
-              </a:spcAft>
-            </a:pPr>
-            <a:r>
-              <a:rPr sz="850" b="1">
-                <a:solidFill>
-                  <a:srgbClr val="88664A"/>
-                </a:solidFill>
-                <a:latin typeface="Karla"/>
-              </a:rPr>
-              <a:t>▪ </a:t>
-            </a:r>
-            <a:r>
-              <a:rPr sz="950" b="1">
+              <a:defRPr sz="850" b="1">
                 <a:solidFill>
                   <a:srgbClr val="0E2A47"/>
                 </a:solidFill>
                 <a:latin typeface="Karla"/>
-              </a:rPr>
-              <a:t>1. Normalización Rigurosa: </a:t>
+              </a:defRPr>
+            </a:pPr>
+            <a:r>
+              <a:t>1. Estandarización</a:t>
             </a:r>
-            <a:r>
-              <a:rPr sz="950">
+          </a:p>
+          <a:p>
+            <a:pPr>
+              <a:defRPr sz="780">
                 <a:solidFill>
                   <a:srgbClr val="222222"/>
                 </a:solidFill>
                 <a:latin typeface="Karla"/>
-              </a:rPr>
-              <a:t>Estandarizar siempre z-score derivado exclusivamente del train set para evitar fugas de información.</a:t>
+              </a:defRPr>
+            </a:pPr>
+            <a:r>
+              <a:t>Normalización z-score estricta ajustada solo en train.</a:t>
             </a:r>
           </a:p>
+        </p:txBody>
+      </p:sp>
+      <p:sp>
+        <p:nvSpPr>
+          <p:cNvPr id="8" name="Rounded Rectangle 7"/>
+          <p:cNvSpPr/>
+          <p:nvPr/>
+        </p:nvSpPr>
+        <p:spPr>
+          <a:xfrm>
+            <a:off x="2770632" y="3429000"/>
+            <a:ext cx="1737360" cy="1234440"/>
+          </a:xfrm>
+          <a:prstGeom prst="roundRect">
+            <a:avLst/>
+          </a:prstGeom>
+          <a:solidFill>
+            <a:srgbClr val="F9FAFB"/>
+          </a:solidFill>
+          <a:ln w="12700">
+            <a:solidFill>
+              <a:srgbClr val="DEE2E6"/>
+            </a:solidFill>
+          </a:ln>
+        </p:spPr>
+        <p:style>
+          <a:lnRef idx="1">
+            <a:schemeClr val="accent1"/>
+          </a:lnRef>
+          <a:fillRef idx="3">
+            <a:schemeClr val="accent1"/>
+          </a:fillRef>
+          <a:effectRef idx="2">
+            <a:schemeClr val="accent1"/>
+          </a:effectRef>
+          <a:fontRef idx="minor">
+            <a:schemeClr val="lt1"/>
+          </a:fontRef>
+        </p:style>
+        <p:txBody>
+          <a:bodyPr rtlCol="0" anchor="ctr"/>
+          <a:lstStyle/>
           <a:p>
-            <a:pPr algn="l">
-              <a:spcAft>
-                <a:spcPts val="300"/>
-              </a:spcAft>
-            </a:pPr>
-            <a:r>
-              <a:rPr sz="850" b="1">
-                <a:solidFill>
-                  <a:srgbClr val="88664A"/>
-                </a:solidFill>
-                <a:latin typeface="Karla"/>
-              </a:rPr>
-              <a:t>▪ </a:t>
-            </a:r>
-            <a:r>
-              <a:rPr sz="950" b="1">
+            <a:pPr algn="ctr"/>
+          </a:p>
+        </p:txBody>
+      </p:sp>
+      <p:sp>
+        <p:nvSpPr>
+          <p:cNvPr id="9" name="TextBox 8"/>
+          <p:cNvSpPr txBox="1"/>
+          <p:nvPr/>
+        </p:nvSpPr>
+        <p:spPr>
+          <a:xfrm>
+            <a:off x="2843784" y="3520440"/>
+            <a:ext cx="1591056" cy="1051560"/>
+          </a:xfrm>
+          <a:prstGeom prst="rect">
+            <a:avLst/>
+          </a:prstGeom>
+          <a:noFill/>
+        </p:spPr>
+        <p:txBody>
+          <a:bodyPr wrap="square" lIns="0" rIns="0" tIns="0" bIns="0">
+            <a:spAutoFit/>
+          </a:bodyPr>
+          <a:lstStyle/>
+          <a:p>
+            <a:pPr>
+              <a:spcAft>
+                <a:spcPts val="400"/>
+              </a:spcAft>
+              <a:defRPr sz="850" b="1">
                 <a:solidFill>
                   <a:srgbClr val="0E2A47"/>
                 </a:solidFill>
                 <a:latin typeface="Karla"/>
-              </a:rPr>
-              <a:t>2. Inicialización Simétrica: </a:t>
+              </a:defRPr>
+            </a:pPr>
+            <a:r>
+              <a:t>2. Inicialización</a:t>
             </a:r>
-            <a:r>
-              <a:rPr sz="950">
+          </a:p>
+          <a:p>
+            <a:pPr>
+              <a:defRPr sz="780">
                 <a:solidFill>
                   <a:srgbClr val="222222"/>
                 </a:solidFill>
                 <a:latin typeface="Karla"/>
-              </a:rPr>
-              <a:t>Pesos pequeños aleatorios w ~ U(-r, r) o Xavier/Glorot para eludir saturación prematura de gradiente.</a:t>
+              </a:defRPr>
+            </a:pPr>
+            <a:r>
+              <a:t>Pesos pequeños aleatorios o Xavier/Glorot.</a:t>
             </a:r>
           </a:p>
+        </p:txBody>
+      </p:sp>
+      <p:sp>
+        <p:nvSpPr>
+          <p:cNvPr id="10" name="Rounded Rectangle 9"/>
+          <p:cNvSpPr/>
+          <p:nvPr/>
+        </p:nvSpPr>
+        <p:spPr>
+          <a:xfrm>
+            <a:off x="4626864" y="3429000"/>
+            <a:ext cx="1737360" cy="1234440"/>
+          </a:xfrm>
+          <a:prstGeom prst="roundRect">
+            <a:avLst/>
+          </a:prstGeom>
+          <a:solidFill>
+            <a:srgbClr val="FCF8F2"/>
+          </a:solidFill>
+          <a:ln w="12700">
+            <a:solidFill>
+              <a:srgbClr val="DEE2E6"/>
+            </a:solidFill>
+          </a:ln>
+        </p:spPr>
+        <p:style>
+          <a:lnRef idx="1">
+            <a:schemeClr val="accent1"/>
+          </a:lnRef>
+          <a:fillRef idx="3">
+            <a:schemeClr val="accent1"/>
+          </a:fillRef>
+          <a:effectRef idx="2">
+            <a:schemeClr val="accent1"/>
+          </a:effectRef>
+          <a:fontRef idx="minor">
+            <a:schemeClr val="lt1"/>
+          </a:fontRef>
+        </p:style>
+        <p:txBody>
+          <a:bodyPr rtlCol="0" anchor="ctr"/>
+          <a:lstStyle/>
           <a:p>
-            <a:pPr algn="l">
-              <a:spcAft>
-                <a:spcPts val="300"/>
-              </a:spcAft>
-            </a:pPr>
-            <a:r>
-              <a:rPr sz="850" b="1">
-                <a:solidFill>
-                  <a:srgbClr val="88664A"/>
-                </a:solidFill>
-                <a:latin typeface="Karla"/>
-              </a:rPr>
-              <a:t>▪ </a:t>
-            </a:r>
-            <a:r>
-              <a:rPr sz="950" b="1">
+            <a:pPr algn="ctr"/>
+          </a:p>
+        </p:txBody>
+      </p:sp>
+      <p:sp>
+        <p:nvSpPr>
+          <p:cNvPr id="11" name="TextBox 10"/>
+          <p:cNvSpPr txBox="1"/>
+          <p:nvPr/>
+        </p:nvSpPr>
+        <p:spPr>
+          <a:xfrm>
+            <a:off x="4700016" y="3520440"/>
+            <a:ext cx="1591056" cy="1051560"/>
+          </a:xfrm>
+          <a:prstGeom prst="rect">
+            <a:avLst/>
+          </a:prstGeom>
+          <a:noFill/>
+        </p:spPr>
+        <p:txBody>
+          <a:bodyPr wrap="square" lIns="0" rIns="0" tIns="0" bIns="0">
+            <a:spAutoFit/>
+          </a:bodyPr>
+          <a:lstStyle/>
+          <a:p>
+            <a:pPr>
+              <a:spcAft>
+                <a:spcPts val="400"/>
+              </a:spcAft>
+              <a:defRPr sz="850" b="1">
                 <a:solidFill>
                   <a:srgbClr val="0E2A47"/>
                 </a:solidFill>
                 <a:latin typeface="Karla"/>
-              </a:rPr>
-              <a:t>3. Momento Inercial β ∈ [0.7, 0.9]: </a:t>
+              </a:defRPr>
+            </a:pPr>
+            <a:r>
+              <a:t>3. Momento Inercial</a:t>
             </a:r>
-            <a:r>
-              <a:rPr sz="950">
+          </a:p>
+          <a:p>
+            <a:pPr>
+              <a:defRPr sz="780">
                 <a:solidFill>
                   <a:srgbClr val="222222"/>
                 </a:solidFill>
                 <a:latin typeface="Karla"/>
-              </a:rPr>
-              <a:t>Imprescindible para acelerar convergencia y atravesar cañones escarpados sin oscilación.</a:t>
+              </a:defRPr>
+            </a:pPr>
+            <a:r>
+              <a:t>β en [0.7, 0.9] para cruzar cañones sin oscilar.</a:t>
             </a:r>
           </a:p>
+        </p:txBody>
+      </p:sp>
+      <p:sp>
+        <p:nvSpPr>
+          <p:cNvPr id="12" name="Rounded Rectangle 11"/>
+          <p:cNvSpPr/>
+          <p:nvPr/>
+        </p:nvSpPr>
+        <p:spPr>
+          <a:xfrm>
+            <a:off x="6483096" y="3429000"/>
+            <a:ext cx="1737360" cy="1234440"/>
+          </a:xfrm>
+          <a:prstGeom prst="roundRect">
+            <a:avLst/>
+          </a:prstGeom>
+          <a:solidFill>
+            <a:srgbClr val="EEF7F2"/>
+          </a:solidFill>
+          <a:ln w="12700">
+            <a:solidFill>
+              <a:srgbClr val="DEE2E6"/>
+            </a:solidFill>
+          </a:ln>
+        </p:spPr>
+        <p:style>
+          <a:lnRef idx="1">
+            <a:schemeClr val="accent1"/>
+          </a:lnRef>
+          <a:fillRef idx="3">
+            <a:schemeClr val="accent1"/>
+          </a:fillRef>
+          <a:effectRef idx="2">
+            <a:schemeClr val="accent1"/>
+          </a:effectRef>
+          <a:fontRef idx="minor">
+            <a:schemeClr val="lt1"/>
+          </a:fontRef>
+        </p:style>
+        <p:txBody>
+          <a:bodyPr rtlCol="0" anchor="ctr"/>
+          <a:lstStyle/>
           <a:p>
-            <a:pPr algn="l">
-              <a:spcAft>
-                <a:spcPts val="200"/>
-              </a:spcAft>
-            </a:pPr>
-            <a:r>
-              <a:rPr sz="850" b="1">
-                <a:solidFill>
-                  <a:srgbClr val="88664A"/>
-                </a:solidFill>
-                <a:latin typeface="Karla"/>
-              </a:rPr>
-              <a:t>▪ </a:t>
-            </a:r>
-            <a:r>
-              <a:rPr sz="950" b="1">
+            <a:pPr algn="ctr"/>
+          </a:p>
+        </p:txBody>
+      </p:sp>
+      <p:sp>
+        <p:nvSpPr>
+          <p:cNvPr id="13" name="TextBox 12"/>
+          <p:cNvSpPr txBox="1"/>
+          <p:nvPr/>
+        </p:nvSpPr>
+        <p:spPr>
+          <a:xfrm>
+            <a:off x="6556248" y="3520440"/>
+            <a:ext cx="1591056" cy="1051560"/>
+          </a:xfrm>
+          <a:prstGeom prst="rect">
+            <a:avLst/>
+          </a:prstGeom>
+          <a:noFill/>
+        </p:spPr>
+        <p:txBody>
+          <a:bodyPr wrap="square" lIns="0" rIns="0" tIns="0" bIns="0">
+            <a:spAutoFit/>
+          </a:bodyPr>
+          <a:lstStyle/>
+          <a:p>
+            <a:pPr>
+              <a:spcAft>
+                <a:spcPts val="400"/>
+              </a:spcAft>
+              <a:defRPr sz="850" b="1">
                 <a:solidFill>
                   <a:srgbClr val="0E2A47"/>
                 </a:solidFill>
                 <a:latin typeface="Karla"/>
-              </a:rPr>
-              <a:t>4. Parada Temprana (Paciencia): </a:t>
+              </a:defRPr>
+            </a:pPr>
+            <a:r>
+              <a:t>4. Early Stopping</a:t>
             </a:r>
-            <a:r>
-              <a:rPr sz="950">
+          </a:p>
+          <a:p>
+            <a:pPr>
+              <a:defRPr sz="780">
                 <a:solidFill>
                   <a:srgbClr val="222222"/>
                 </a:solidFill>
                 <a:latin typeface="Karla"/>
-              </a:rPr>
-              <a:t>Monitorear E_val para restaurar checkpoint óptimo y evitar sobrecosto de sobreajuste.</a:t>
+              </a:defRPr>
+            </a:pPr>
+            <a:r>
+              <a:t>Paciencia P=40 para congelar en el óptimo.</a:t>
             </a:r>
           </a:p>
         </p:txBody>
@@ -37585,33 +37819,23 @@
         </p:nvSpPr>
         <p:spPr>
           <a:xfrm>
-            <a:off x="868680" y="347472"/>
-            <a:ext cx="7589520" cy="777240"/>
+            <a:off x="914400" y="502920"/>
+            <a:ext cx="4937760" cy="640080"/>
           </a:xfrm>
         </p:spPr>
         <p:txBody>
-          <a:bodyPr wrap="square" lIns="0" tIns="0" rIns="0" bIns="0"/>
+          <a:bodyPr wrap="square" lIns="0" rIns="0" tIns="0" bIns="0"/>
           <a:lstStyle/>
           <a:p>
             <a:pPr algn="l"/>
             <a:r>
-              <a:rPr sz="950" b="1">
-                <a:solidFill>
-                  <a:srgbClr val="88664A"/>
-                </a:solidFill>
-                <a:latin typeface="Karla"/>
-              </a:rPr>
-              <a:t>10. CONCLUSIONES EJECUTIVAS
-</a:t>
-            </a:r>
-            <a:r>
-              <a:rPr sz="2100" b="1">
+              <a:rPr sz="1750" b="1">
                 <a:solidFill>
                   <a:srgbClr val="0E2A47"/>
                 </a:solidFill>
                 <a:latin typeface="DM Serif Display"/>
               </a:rPr>
-              <a:t>Conclusiones y Aportes del Taller 2</a:t>
+              <a:t>Conclusiones: Principios Rectores del Perceptrón Multicapa</a:t>
             </a:r>
           </a:p>
         </p:txBody>
@@ -37624,18 +37848,18 @@
         </p:nvSpPr>
         <p:spPr>
           <a:xfrm>
-            <a:off x="777240" y="1188720"/>
-            <a:ext cx="3657600" cy="1691640"/>
+            <a:off x="5897880" y="420624"/>
+            <a:ext cx="2286000" cy="256032"/>
           </a:xfrm>
           <a:prstGeom prst="roundRect">
             <a:avLst/>
           </a:prstGeom>
           <a:solidFill>
-            <a:srgbClr val="F8F9FA"/>
+            <a:srgbClr val="FCF8F2"/>
           </a:solidFill>
           <a:ln w="12700">
             <a:solidFill>
-              <a:srgbClr val="DADEE2"/>
+              <a:srgbClr val="EDDFCD"/>
             </a:solidFill>
           </a:ln>
         </p:spPr>
@@ -37669,8 +37893,8 @@
         </p:nvSpPr>
         <p:spPr>
           <a:xfrm>
-            <a:off x="914400" y="1261872"/>
-            <a:ext cx="3383280" cy="1545336"/>
+            <a:off x="5897880" y="438912"/>
+            <a:ext cx="2286000" cy="219456"/>
           </a:xfrm>
           <a:prstGeom prst="rect">
             <a:avLst/>
@@ -37683,87 +37907,15 @@
           </a:bodyPr>
           <a:lstStyle/>
           <a:p>
-            <a:pPr>
-              <a:spcAft>
-                <a:spcPts val="400"/>
-              </a:spcAft>
-              <a:defRPr sz="1200" b="1">
+            <a:pPr algn="ctr"/>
+            <a:r>
+              <a:rPr sz="780" b="1">
                 <a:solidFill>
-                  <a:srgbClr val="0E2A47"/>
-                </a:solidFill>
-                <a:latin typeface="DM Serif Display"/>
-              </a:defRPr>
-            </a:pPr>
-            <a:r>
-              <a:t>1. Superación de la Barrera Lineal</a:t>
-            </a:r>
-          </a:p>
-          <a:p>
-            <a:pPr algn="l">
-              <a:spcAft>
-                <a:spcPts val="300"/>
-              </a:spcAft>
-            </a:pPr>
-            <a:r>
-              <a:rPr sz="830" b="1">
-                <a:solidFill>
-                  <a:srgbClr val="88664A"/>
+                  <a:srgbClr val="7D542D"/>
                 </a:solidFill>
                 <a:latin typeface="Karla"/>
               </a:rPr>
-              <a:t>▪ </a:t>
-            </a:r>
-            <a:r>
-              <a:rPr sz="930" b="1">
-                <a:solidFill>
-                  <a:srgbClr val="0E2A47"/>
-                </a:solidFill>
-                <a:latin typeface="Karla"/>
-              </a:rPr>
-              <a:t>Desenredo Geométrico: </a:t>
-            </a:r>
-            <a:r>
-              <a:rPr sz="930">
-                <a:solidFill>
-                  <a:srgbClr val="222222"/>
-                </a:solidFill>
-                <a:latin typeface="Karla"/>
-              </a:rPr>
-              <a:t>Las capas ocultas desdoblan variedades no separables, logrando 100% en XOR frente al 50% monocapa.</a:t>
-            </a:r>
-          </a:p>
-          <a:p>
-            <a:pPr algn="l">
-              <a:spcAft>
-                <a:spcPts val="200"/>
-              </a:spcAft>
-            </a:pPr>
-            <a:r>
-              <a:rPr sz="830" b="1">
-                <a:solidFill>
-                  <a:srgbClr val="88664A"/>
-                </a:solidFill>
-                <a:latin typeface="Karla"/>
-              </a:rPr>
-              <a:t>▪ </a:t>
-            </a:r>
-            <a:r>
-              <a:rPr sz="930" b="1">
-                <a:solidFill>
-                  <a:srgbClr val="0E2A47"/>
-                </a:solidFill>
-                <a:latin typeface="Karla"/>
-              </a:rPr>
-              <a:t>Aproximación Universal: </a:t>
-            </a:r>
-            <a:r>
-              <a:rPr sz="930">
-                <a:solidFill>
-                  <a:srgbClr val="222222"/>
-                </a:solidFill>
-                <a:latin typeface="Karla"/>
-              </a:rPr>
-              <a:t>Se valida que neuronas sigmoideas intermedias aproximan cualquier frontera continua arbitraria.</a:t>
+              <a:t>10. CONCLUSIONES EJECUTIVAS</a:t>
             </a:r>
           </a:p>
         </p:txBody>
@@ -37776,18 +37928,18 @@
         </p:nvSpPr>
         <p:spPr>
           <a:xfrm>
-            <a:off x="4709160" y="1188720"/>
-            <a:ext cx="3657600" cy="1691640"/>
+            <a:off x="914400" y="1234440"/>
+            <a:ext cx="3566160" cy="1645920"/>
           </a:xfrm>
           <a:prstGeom prst="roundRect">
             <a:avLst/>
           </a:prstGeom>
           <a:solidFill>
-            <a:srgbClr val="F8F9FA"/>
+            <a:srgbClr val="F9FAFB"/>
           </a:solidFill>
           <a:ln w="12700">
             <a:solidFill>
-              <a:srgbClr val="DADEE2"/>
+              <a:srgbClr val="DEE2E6"/>
             </a:solidFill>
           </a:ln>
         </p:spPr>
@@ -37815,132 +37967,23 @@
       </p:sp>
       <p:sp>
         <p:nvSpPr>
-          <p:cNvPr id="6" name="TextBox 5"/>
-          <p:cNvSpPr txBox="1"/>
-          <p:nvPr/>
-        </p:nvSpPr>
-        <p:spPr>
-          <a:xfrm>
-            <a:off x="4846320" y="1261872"/>
-            <a:ext cx="3383280" cy="1545336"/>
-          </a:xfrm>
-          <a:prstGeom prst="rect">
-            <a:avLst/>
-          </a:prstGeom>
-          <a:noFill/>
-        </p:spPr>
-        <p:txBody>
-          <a:bodyPr wrap="square" lIns="0" rIns="0" tIns="0" bIns="0">
-            <a:spAutoFit/>
-          </a:bodyPr>
-          <a:lstStyle/>
-          <a:p>
-            <a:pPr>
-              <a:spcAft>
-                <a:spcPts val="400"/>
-              </a:spcAft>
-              <a:defRPr sz="1200" b="1">
-                <a:solidFill>
-                  <a:srgbClr val="88664A"/>
-                </a:solidFill>
-                <a:latin typeface="DM Serif Display"/>
-              </a:defRPr>
-            </a:pPr>
-            <a:r>
-              <a:t>2. Aceleración Inercial β</a:t>
-            </a:r>
-          </a:p>
-          <a:p>
-            <a:pPr algn="l">
-              <a:spcAft>
-                <a:spcPts val="300"/>
-              </a:spcAft>
-            </a:pPr>
-            <a:r>
-              <a:rPr sz="830" b="1">
-                <a:solidFill>
-                  <a:srgbClr val="88664A"/>
-                </a:solidFill>
-                <a:latin typeface="Karla"/>
-              </a:rPr>
-              <a:t>▪ </a:t>
-            </a:r>
-            <a:r>
-              <a:rPr sz="930" b="1">
-                <a:solidFill>
-                  <a:srgbClr val="88664A"/>
-                </a:solidFill>
-                <a:latin typeface="Karla"/>
-              </a:rPr>
-              <a:t>87.4% Más Rápido: </a:t>
-            </a:r>
-            <a:r>
-              <a:rPr sz="930">
-                <a:solidFill>
-                  <a:srgbClr val="222222"/>
-                </a:solidFill>
-                <a:latin typeface="Karla"/>
-              </a:rPr>
-              <a:t>β = 0.9 reduce las épocas de 621 a 78 y suprime oscilaciones transversales en cañones estrechos.</a:t>
-            </a:r>
-          </a:p>
-          <a:p>
-            <a:pPr algn="l">
-              <a:spcAft>
-                <a:spcPts val="200"/>
-              </a:spcAft>
-            </a:pPr>
-            <a:r>
-              <a:rPr sz="830" b="1">
-                <a:solidFill>
-                  <a:srgbClr val="88664A"/>
-                </a:solidFill>
-                <a:latin typeface="Karla"/>
-              </a:rPr>
-              <a:t>▪ </a:t>
-            </a:r>
-            <a:r>
-              <a:rPr sz="930" b="1">
-                <a:solidFill>
-                  <a:srgbClr val="88664A"/>
-                </a:solidFill>
-                <a:latin typeface="Karla"/>
-              </a:rPr>
-              <a:t>Inercia Dinámica: </a:t>
-            </a:r>
-            <a:r>
-              <a:rPr sz="930">
-                <a:solidFill>
-                  <a:srgbClr val="222222"/>
-                </a:solidFill>
-                <a:latin typeface="Karla"/>
-              </a:rPr>
-              <a:t>Actúa como filtro pasa-bajos que acumula velocidad en la dirección del gradiente persistente.</a:t>
-            </a:r>
-          </a:p>
-        </p:txBody>
-      </p:sp>
-      <p:sp>
-        <p:nvSpPr>
-          <p:cNvPr id="7" name="Rounded Rectangle 6"/>
+          <p:cNvPr id="6" name="Rounded Rectangle 5"/>
           <p:cNvSpPr/>
           <p:nvPr/>
         </p:nvSpPr>
         <p:spPr>
           <a:xfrm>
-            <a:off x="777240" y="3017520"/>
-            <a:ext cx="3657600" cy="1691640"/>
+            <a:off x="3108960" y="1344168"/>
+            <a:ext cx="1261872" cy="292608"/>
           </a:xfrm>
           <a:prstGeom prst="roundRect">
             <a:avLst/>
           </a:prstGeom>
           <a:solidFill>
-            <a:srgbClr val="F8F9FA"/>
+            <a:srgbClr val="F0F5FA"/>
           </a:solidFill>
-          <a:ln w="12700">
-            <a:solidFill>
-              <a:srgbClr val="DADEE2"/>
-            </a:solidFill>
+          <a:ln>
+            <a:noFill/>
           </a:ln>
         </p:spPr>
         <p:style>
@@ -37967,14 +38010,50 @@
       </p:sp>
       <p:sp>
         <p:nvSpPr>
+          <p:cNvPr id="7" name="TextBox 6"/>
+          <p:cNvSpPr txBox="1"/>
+          <p:nvPr/>
+        </p:nvSpPr>
+        <p:spPr>
+          <a:xfrm>
+            <a:off x="3108960" y="1362456"/>
+            <a:ext cx="1261872" cy="256032"/>
+          </a:xfrm>
+          <a:prstGeom prst="rect">
+            <a:avLst/>
+          </a:prstGeom>
+          <a:noFill/>
+        </p:spPr>
+        <p:txBody>
+          <a:bodyPr wrap="square" lIns="0" rIns="0" tIns="0" bIns="0">
+            <a:spAutoFit/>
+          </a:bodyPr>
+          <a:lstStyle/>
+          <a:p>
+            <a:pPr algn="ctr">
+              <a:defRPr sz="800" b="1">
+                <a:solidFill>
+                  <a:srgbClr val="144169"/>
+                </a:solidFill>
+                <a:latin typeface="Karla"/>
+              </a:defRPr>
+            </a:pPr>
+            <a:r>
+              <a:t>100% XOR</a:t>
+            </a:r>
+          </a:p>
+        </p:txBody>
+      </p:sp>
+      <p:sp>
+        <p:nvSpPr>
           <p:cNvPr id="8" name="TextBox 7"/>
           <p:cNvSpPr txBox="1"/>
           <p:nvPr/>
         </p:nvSpPr>
         <p:spPr>
           <a:xfrm>
-            <a:off x="914400" y="3090672"/>
-            <a:ext cx="3383280" cy="1545336"/>
+            <a:off x="1051560" y="1344168"/>
+            <a:ext cx="2011680" cy="365760"/>
           </a:xfrm>
           <a:prstGeom prst="rect">
             <a:avLst/>
@@ -37988,110 +38067,75 @@
           <a:lstStyle/>
           <a:p>
             <a:pPr>
-              <a:spcAft>
-                <a:spcPts val="400"/>
-              </a:spcAft>
-              <a:defRPr sz="1200" b="1">
+              <a:defRPr sz="1100" b="1">
                 <a:solidFill>
-                  <a:srgbClr val="435D74"/>
+                  <a:srgbClr val="0E2A47"/>
                 </a:solidFill>
                 <a:latin typeface="DM Serif Display"/>
               </a:defRPr>
             </a:pPr>
             <a:r>
-              <a:t>3. Resiliencia en Problemas Reales</a:t>
-            </a:r>
-          </a:p>
-          <a:p>
-            <a:pPr algn="l">
-              <a:spcAft>
-                <a:spcPts val="300"/>
-              </a:spcAft>
-            </a:pPr>
-            <a:r>
-              <a:rPr sz="830" b="1">
-                <a:solidFill>
-                  <a:srgbClr val="88664A"/>
-                </a:solidFill>
-                <a:latin typeface="Karla"/>
-              </a:rPr>
-              <a:t>▪ </a:t>
-            </a:r>
-            <a:r>
-              <a:rPr sz="930" b="1">
-                <a:solidFill>
-                  <a:srgbClr val="435D74"/>
-                </a:solidFill>
-                <a:latin typeface="Karla"/>
-              </a:rPr>
-              <a:t>Benchmarks Reales: </a:t>
-            </a:r>
-            <a:r>
-              <a:rPr sz="930">
-                <a:solidFill>
-                  <a:srgbClr val="222222"/>
-                </a:solidFill>
-                <a:latin typeface="Karla"/>
-              </a:rPr>
-              <a:t>100% en Banknote y Wine, 98.25% en Breast Cancer y 93.33% en Iris con estabilidad ante 4 particiones.</a:t>
-            </a:r>
-          </a:p>
-          <a:p>
-            <a:pPr algn="l">
-              <a:spcAft>
-                <a:spcPts val="200"/>
-              </a:spcAft>
-            </a:pPr>
-            <a:r>
-              <a:rPr sz="830" b="1">
-                <a:solidFill>
-                  <a:srgbClr val="88664A"/>
-                </a:solidFill>
-                <a:latin typeface="Karla"/>
-              </a:rPr>
-              <a:t>▪ </a:t>
-            </a:r>
-            <a:r>
-              <a:rPr sz="930" b="1">
-                <a:solidFill>
-                  <a:srgbClr val="435D74"/>
-                </a:solidFill>
-                <a:latin typeface="Karla"/>
-              </a:rPr>
-              <a:t>Generalización: </a:t>
-            </a:r>
-            <a:r>
-              <a:rPr sz="930">
-                <a:solidFill>
-                  <a:srgbClr val="222222"/>
-                </a:solidFill>
-                <a:latin typeface="Karla"/>
-              </a:rPr>
-              <a:t>Previene data leakage mediante normalización z-score estricta dentro de cada partición de treino.</a:t>
+              <a:t>1. Superación de la Barrera Lineal</a:t>
             </a:r>
           </a:p>
         </p:txBody>
       </p:sp>
       <p:sp>
         <p:nvSpPr>
-          <p:cNvPr id="9" name="Rounded Rectangle 8"/>
+          <p:cNvPr id="9" name="TextBox 8"/>
+          <p:cNvSpPr txBox="1"/>
+          <p:nvPr/>
+        </p:nvSpPr>
+        <p:spPr>
+          <a:xfrm>
+            <a:off x="1051560" y="1746504"/>
+            <a:ext cx="3291840" cy="1024128"/>
+          </a:xfrm>
+          <a:prstGeom prst="rect">
+            <a:avLst/>
+          </a:prstGeom>
+          <a:noFill/>
+        </p:spPr>
+        <p:txBody>
+          <a:bodyPr wrap="square" lIns="0" rIns="0" tIns="0" bIns="0">
+            <a:spAutoFit/>
+          </a:bodyPr>
+          <a:lstStyle/>
+          <a:p>
+            <a:pPr>
+              <a:defRPr sz="900">
+                <a:solidFill>
+                  <a:srgbClr val="222222"/>
+                </a:solidFill>
+                <a:latin typeface="Karla"/>
+              </a:defRPr>
+            </a:pPr>
+            <a:r>
+              <a:t>Las capas ocultas actúan como proyectores no lineales que deforman variedades complejas, resolviendo la conjetura de Minsky &amp; Papert.</a:t>
+            </a:r>
+          </a:p>
+        </p:txBody>
+      </p:sp>
+      <p:sp>
+        <p:nvSpPr>
+          <p:cNvPr id="10" name="Rounded Rectangle 9"/>
           <p:cNvSpPr/>
           <p:nvPr/>
         </p:nvSpPr>
         <p:spPr>
           <a:xfrm>
-            <a:off x="4709160" y="3017520"/>
-            <a:ext cx="3657600" cy="1691640"/>
+            <a:off x="4663440" y="1234440"/>
+            <a:ext cx="3566160" cy="1645920"/>
           </a:xfrm>
           <a:prstGeom prst="roundRect">
             <a:avLst/>
           </a:prstGeom>
           <a:solidFill>
-            <a:srgbClr val="F8F9FA"/>
+            <a:srgbClr val="F9FAFB"/>
           </a:solidFill>
           <a:ln w="12700">
             <a:solidFill>
-              <a:srgbClr val="DADEE2"/>
+              <a:srgbClr val="DEE2E6"/>
             </a:solidFill>
           </a:ln>
         </p:spPr>
@@ -38119,14 +38163,93 @@
       </p:sp>
       <p:sp>
         <p:nvSpPr>
-          <p:cNvPr id="10" name="TextBox 9"/>
+          <p:cNvPr id="11" name="Rounded Rectangle 10"/>
+          <p:cNvSpPr/>
+          <p:nvPr/>
+        </p:nvSpPr>
+        <p:spPr>
+          <a:xfrm>
+            <a:off x="6858000" y="1344168"/>
+            <a:ext cx="1261872" cy="292608"/>
+          </a:xfrm>
+          <a:prstGeom prst="roundRect">
+            <a:avLst/>
+          </a:prstGeom>
+          <a:solidFill>
+            <a:srgbClr val="FCF8F2"/>
+          </a:solidFill>
+          <a:ln>
+            <a:noFill/>
+          </a:ln>
+        </p:spPr>
+        <p:style>
+          <a:lnRef idx="1">
+            <a:schemeClr val="accent1"/>
+          </a:lnRef>
+          <a:fillRef idx="3">
+            <a:schemeClr val="accent1"/>
+          </a:fillRef>
+          <a:effectRef idx="2">
+            <a:schemeClr val="accent1"/>
+          </a:effectRef>
+          <a:fontRef idx="minor">
+            <a:schemeClr val="lt1"/>
+          </a:fontRef>
+        </p:style>
+        <p:txBody>
+          <a:bodyPr rtlCol="0" anchor="ctr"/>
+          <a:lstStyle/>
+          <a:p>
+            <a:pPr algn="ctr"/>
+          </a:p>
+        </p:txBody>
+      </p:sp>
+      <p:sp>
+        <p:nvSpPr>
+          <p:cNvPr id="12" name="TextBox 11"/>
           <p:cNvSpPr txBox="1"/>
           <p:nvPr/>
         </p:nvSpPr>
         <p:spPr>
           <a:xfrm>
-            <a:off x="4846320" y="3090672"/>
-            <a:ext cx="3383280" cy="1545336"/>
+            <a:off x="6858000" y="1362456"/>
+            <a:ext cx="1261872" cy="256032"/>
+          </a:xfrm>
+          <a:prstGeom prst="rect">
+            <a:avLst/>
+          </a:prstGeom>
+          <a:noFill/>
+        </p:spPr>
+        <p:txBody>
+          <a:bodyPr wrap="square" lIns="0" rIns="0" tIns="0" bIns="0">
+            <a:spAutoFit/>
+          </a:bodyPr>
+          <a:lstStyle/>
+          <a:p>
+            <a:pPr algn="ctr">
+              <a:defRPr sz="800" b="1">
+                <a:solidFill>
+                  <a:srgbClr val="7D542D"/>
+                </a:solidFill>
+                <a:latin typeface="Karla"/>
+              </a:defRPr>
+            </a:pPr>
+            <a:r>
+              <a:t>87.4% MÁS VELOZ</a:t>
+            </a:r>
+          </a:p>
+        </p:txBody>
+      </p:sp>
+      <p:sp>
+        <p:nvSpPr>
+          <p:cNvPr id="13" name="TextBox 12"/>
+          <p:cNvSpPr txBox="1"/>
+          <p:nvPr/>
+        </p:nvSpPr>
+        <p:spPr>
+          <a:xfrm>
+            <a:off x="4800600" y="1344168"/>
+            <a:ext cx="2011680" cy="365760"/>
           </a:xfrm>
           <a:prstGeom prst="rect">
             <a:avLst/>
@@ -38140,86 +38263,443 @@
           <a:lstStyle/>
           <a:p>
             <a:pPr>
-              <a:spcAft>
-                <a:spcPts val="400"/>
-              </a:spcAft>
-              <a:defRPr sz="1200" b="1">
+              <a:defRPr sz="1100" b="1">
                 <a:solidFill>
-                  <a:srgbClr val="1E6937"/>
+                  <a:srgbClr val="88664A"/>
                 </a:solidFill>
                 <a:latin typeface="DM Serif Display"/>
               </a:defRPr>
             </a:pPr>
             <a:r>
-              <a:t>4. Regularización por Early Stopping</a:t>
+              <a:t>2. Aceleración Inercial con Momento</a:t>
             </a:r>
           </a:p>
+        </p:txBody>
+      </p:sp>
+      <p:sp>
+        <p:nvSpPr>
+          <p:cNvPr id="14" name="TextBox 13"/>
+          <p:cNvSpPr txBox="1"/>
+          <p:nvPr/>
+        </p:nvSpPr>
+        <p:spPr>
+          <a:xfrm>
+            <a:off x="4800600" y="1746504"/>
+            <a:ext cx="3291840" cy="1024128"/>
+          </a:xfrm>
+          <a:prstGeom prst="rect">
+            <a:avLst/>
+          </a:prstGeom>
+          <a:noFill/>
+        </p:spPr>
+        <p:txBody>
+          <a:bodyPr wrap="square" lIns="0" rIns="0" tIns="0" bIns="0">
+            <a:spAutoFit/>
+          </a:bodyPr>
+          <a:lstStyle/>
           <a:p>
-            <a:pPr algn="l">
-              <a:spcAft>
-                <a:spcPts val="300"/>
-              </a:spcAft>
-            </a:pPr>
-            <a:r>
-              <a:rPr sz="830" b="1">
-                <a:solidFill>
-                  <a:srgbClr val="88664A"/>
-                </a:solidFill>
-                <a:latin typeface="Karla"/>
-              </a:rPr>
-              <a:t>▪ </a:t>
-            </a:r>
-            <a:r>
-              <a:rPr sz="930" b="1">
-                <a:solidFill>
-                  <a:srgbClr val="1E6937"/>
-                </a:solidFill>
-                <a:latin typeface="Karla"/>
-              </a:rPr>
-              <a:t>Control Espectral: </a:t>
-            </a:r>
-            <a:r>
-              <a:rPr sz="930">
+            <a:pPr>
+              <a:defRPr sz="900">
                 <a:solidFill>
                   <a:srgbClr val="222222"/>
                 </a:solidFill>
                 <a:latin typeface="Karla"/>
-              </a:rPr>
-              <a:t>-16.65% en E_test, -37.23% en brecha de generalización y 95.73% de ahorro en épocas.</a:t>
+              </a:defRPr>
+            </a:pPr>
+            <a:r>
+              <a:t>El factor β = 0.9 amortigua vibraciones transversales en cañones estrechos, reduciendo de 621 a 78 épocas y evitando mesetas planas.</a:t>
             </a:r>
           </a:p>
+        </p:txBody>
+      </p:sp>
+      <p:sp>
+        <p:nvSpPr>
+          <p:cNvPr id="15" name="Rounded Rectangle 14"/>
+          <p:cNvSpPr/>
+          <p:nvPr/>
+        </p:nvSpPr>
+        <p:spPr>
+          <a:xfrm>
+            <a:off x="914400" y="3017520"/>
+            <a:ext cx="3566160" cy="1645920"/>
+          </a:xfrm>
+          <a:prstGeom prst="roundRect">
+            <a:avLst/>
+          </a:prstGeom>
+          <a:solidFill>
+            <a:srgbClr val="F9FAFB"/>
+          </a:solidFill>
+          <a:ln w="12700">
+            <a:solidFill>
+              <a:srgbClr val="DEE2E6"/>
+            </a:solidFill>
+          </a:ln>
+        </p:spPr>
+        <p:style>
+          <a:lnRef idx="1">
+            <a:schemeClr val="accent1"/>
+          </a:lnRef>
+          <a:fillRef idx="3">
+            <a:schemeClr val="accent1"/>
+          </a:fillRef>
+          <a:effectRef idx="2">
+            <a:schemeClr val="accent1"/>
+          </a:effectRef>
+          <a:fontRef idx="minor">
+            <a:schemeClr val="lt1"/>
+          </a:fontRef>
+        </p:style>
+        <p:txBody>
+          <a:bodyPr rtlCol="0" anchor="ctr"/>
+          <a:lstStyle/>
           <a:p>
-            <a:pPr algn="l">
-              <a:spcAft>
-                <a:spcPts val="200"/>
-              </a:spcAft>
+            <a:pPr algn="ctr"/>
+          </a:p>
+        </p:txBody>
+      </p:sp>
+      <p:sp>
+        <p:nvSpPr>
+          <p:cNvPr id="16" name="Rounded Rectangle 15"/>
+          <p:cNvSpPr/>
+          <p:nvPr/>
+        </p:nvSpPr>
+        <p:spPr>
+          <a:xfrm>
+            <a:off x="3108960" y="3127248"/>
+            <a:ext cx="1261872" cy="292608"/>
+          </a:xfrm>
+          <a:prstGeom prst="roundRect">
+            <a:avLst/>
+          </a:prstGeom>
+          <a:solidFill>
+            <a:srgbClr val="F4F6F8"/>
+          </a:solidFill>
+          <a:ln>
+            <a:noFill/>
+          </a:ln>
+        </p:spPr>
+        <p:style>
+          <a:lnRef idx="1">
+            <a:schemeClr val="accent1"/>
+          </a:lnRef>
+          <a:fillRef idx="3">
+            <a:schemeClr val="accent1"/>
+          </a:fillRef>
+          <a:effectRef idx="2">
+            <a:schemeClr val="accent1"/>
+          </a:effectRef>
+          <a:fontRef idx="minor">
+            <a:schemeClr val="lt1"/>
+          </a:fontRef>
+        </p:style>
+        <p:txBody>
+          <a:bodyPr rtlCol="0" anchor="ctr"/>
+          <a:lstStyle/>
+          <a:p>
+            <a:pPr algn="ctr"/>
+          </a:p>
+        </p:txBody>
+      </p:sp>
+      <p:sp>
+        <p:nvSpPr>
+          <p:cNvPr id="17" name="TextBox 16"/>
+          <p:cNvSpPr txBox="1"/>
+          <p:nvPr/>
+        </p:nvSpPr>
+        <p:spPr>
+          <a:xfrm>
+            <a:off x="3108960" y="3145536"/>
+            <a:ext cx="1261872" cy="256032"/>
+          </a:xfrm>
+          <a:prstGeom prst="rect">
+            <a:avLst/>
+          </a:prstGeom>
+          <a:noFill/>
+        </p:spPr>
+        <p:txBody>
+          <a:bodyPr wrap="square" lIns="0" rIns="0" tIns="0" bIns="0">
+            <a:spAutoFit/>
+          </a:bodyPr>
+          <a:lstStyle/>
+          <a:p>
+            <a:pPr algn="ctr">
+              <a:defRPr sz="800" b="1">
+                <a:solidFill>
+                  <a:srgbClr val="0E2A47"/>
+                </a:solidFill>
+                <a:latin typeface="Karla"/>
+              </a:defRPr>
             </a:pPr>
             <a:r>
-              <a:rPr sz="830" b="1">
+              <a:t>100% SPLITS</a:t>
+            </a:r>
+          </a:p>
+        </p:txBody>
+      </p:sp>
+      <p:sp>
+        <p:nvSpPr>
+          <p:cNvPr id="18" name="TextBox 17"/>
+          <p:cNvSpPr txBox="1"/>
+          <p:nvPr/>
+        </p:nvSpPr>
+        <p:spPr>
+          <a:xfrm>
+            <a:off x="1051560" y="3127248"/>
+            <a:ext cx="2011680" cy="365760"/>
+          </a:xfrm>
+          <a:prstGeom prst="rect">
+            <a:avLst/>
+          </a:prstGeom>
+          <a:noFill/>
+        </p:spPr>
+        <p:txBody>
+          <a:bodyPr wrap="square" lIns="0" rIns="0" tIns="0" bIns="0">
+            <a:spAutoFit/>
+          </a:bodyPr>
+          <a:lstStyle/>
+          <a:p>
+            <a:pPr>
+              <a:defRPr sz="1100" b="1">
                 <a:solidFill>
-                  <a:srgbClr val="88664A"/>
+                  <a:srgbClr val="435D74"/>
                 </a:solidFill>
-                <a:latin typeface="Karla"/>
-              </a:rPr>
-              <a:t>▪ </a:t>
+                <a:latin typeface="DM Serif Display"/>
+              </a:defRPr>
+            </a:pPr>
+            <a:r>
+              <a:t>3. Robustez en Benchmarks Reales</a:t>
             </a:r>
-            <a:r>
-              <a:rPr sz="930" b="1">
-                <a:solidFill>
-                  <a:srgbClr val="1E6937"/>
-                </a:solidFill>
-                <a:latin typeface="Karla"/>
-              </a:rPr>
-              <a:t>Equivalencia L₂: </a:t>
-            </a:r>
-            <a:r>
-              <a:rPr sz="930">
+          </a:p>
+        </p:txBody>
+      </p:sp>
+      <p:sp>
+        <p:nvSpPr>
+          <p:cNvPr id="19" name="TextBox 18"/>
+          <p:cNvSpPr txBox="1"/>
+          <p:nvPr/>
+        </p:nvSpPr>
+        <p:spPr>
+          <a:xfrm>
+            <a:off x="1051560" y="3529584"/>
+            <a:ext cx="3291840" cy="1024128"/>
+          </a:xfrm>
+          <a:prstGeom prst="rect">
+            <a:avLst/>
+          </a:prstGeom>
+          <a:noFill/>
+        </p:spPr>
+        <p:txBody>
+          <a:bodyPr wrap="square" lIns="0" rIns="0" tIns="0" bIns="0">
+            <a:spAutoFit/>
+          </a:bodyPr>
+          <a:lstStyle/>
+          <a:p>
+            <a:pPr>
+              <a:defRPr sz="900">
                 <a:solidFill>
                   <a:srgbClr val="222222"/>
                 </a:solidFill>
                 <a:latin typeface="Karla"/>
-              </a:rPr>
-              <a:t>Funciona como penalización implícita de pesos, restringiendo el radio espectral sin hiperparámetros extra.</a:t>
+              </a:defRPr>
+            </a:pPr>
+            <a:r>
+              <a:t>Exactitud perfecta en Banknote y Wine, y 98.25% en Breast Cancer con estabilidad invariable ante 4 particiones estratificadas.</a:t>
+            </a:r>
+          </a:p>
+        </p:txBody>
+      </p:sp>
+      <p:sp>
+        <p:nvSpPr>
+          <p:cNvPr id="20" name="Rounded Rectangle 19"/>
+          <p:cNvSpPr/>
+          <p:nvPr/>
+        </p:nvSpPr>
+        <p:spPr>
+          <a:xfrm>
+            <a:off x="4663440" y="3017520"/>
+            <a:ext cx="3566160" cy="1645920"/>
+          </a:xfrm>
+          <a:prstGeom prst="roundRect">
+            <a:avLst/>
+          </a:prstGeom>
+          <a:solidFill>
+            <a:srgbClr val="F9FAFB"/>
+          </a:solidFill>
+          <a:ln w="12700">
+            <a:solidFill>
+              <a:srgbClr val="DEE2E6"/>
+            </a:solidFill>
+          </a:ln>
+        </p:spPr>
+        <p:style>
+          <a:lnRef idx="1">
+            <a:schemeClr val="accent1"/>
+          </a:lnRef>
+          <a:fillRef idx="3">
+            <a:schemeClr val="accent1"/>
+          </a:fillRef>
+          <a:effectRef idx="2">
+            <a:schemeClr val="accent1"/>
+          </a:effectRef>
+          <a:fontRef idx="minor">
+            <a:schemeClr val="lt1"/>
+          </a:fontRef>
+        </p:style>
+        <p:txBody>
+          <a:bodyPr rtlCol="0" anchor="ctr"/>
+          <a:lstStyle/>
+          <a:p>
+            <a:pPr algn="ctr"/>
+          </a:p>
+        </p:txBody>
+      </p:sp>
+      <p:sp>
+        <p:nvSpPr>
+          <p:cNvPr id="21" name="Rounded Rectangle 20"/>
+          <p:cNvSpPr/>
+          <p:nvPr/>
+        </p:nvSpPr>
+        <p:spPr>
+          <a:xfrm>
+            <a:off x="6858000" y="3127248"/>
+            <a:ext cx="1261872" cy="292608"/>
+          </a:xfrm>
+          <a:prstGeom prst="roundRect">
+            <a:avLst/>
+          </a:prstGeom>
+          <a:solidFill>
+            <a:srgbClr val="EEF7F2"/>
+          </a:solidFill>
+          <a:ln>
+            <a:noFill/>
+          </a:ln>
+        </p:spPr>
+        <p:style>
+          <a:lnRef idx="1">
+            <a:schemeClr val="accent1"/>
+          </a:lnRef>
+          <a:fillRef idx="3">
+            <a:schemeClr val="accent1"/>
+          </a:fillRef>
+          <a:effectRef idx="2">
+            <a:schemeClr val="accent1"/>
+          </a:effectRef>
+          <a:fontRef idx="minor">
+            <a:schemeClr val="lt1"/>
+          </a:fontRef>
+        </p:style>
+        <p:txBody>
+          <a:bodyPr rtlCol="0" anchor="ctr"/>
+          <a:lstStyle/>
+          <a:p>
+            <a:pPr algn="ctr"/>
+          </a:p>
+        </p:txBody>
+      </p:sp>
+      <p:sp>
+        <p:nvSpPr>
+          <p:cNvPr id="22" name="TextBox 21"/>
+          <p:cNvSpPr txBox="1"/>
+          <p:nvPr/>
+        </p:nvSpPr>
+        <p:spPr>
+          <a:xfrm>
+            <a:off x="6858000" y="3145536"/>
+            <a:ext cx="1261872" cy="256032"/>
+          </a:xfrm>
+          <a:prstGeom prst="rect">
+            <a:avLst/>
+          </a:prstGeom>
+          <a:noFill/>
+        </p:spPr>
+        <p:txBody>
+          <a:bodyPr wrap="square" lIns="0" rIns="0" tIns="0" bIns="0">
+            <a:spAutoFit/>
+          </a:bodyPr>
+          <a:lstStyle/>
+          <a:p>
+            <a:pPr algn="ctr">
+              <a:defRPr sz="800" b="1">
+                <a:solidFill>
+                  <a:srgbClr val="186638"/>
+                </a:solidFill>
+                <a:latin typeface="Karla"/>
+              </a:defRPr>
+            </a:pPr>
+            <a:r>
+              <a:t>-16.7% TEST</a:t>
+            </a:r>
+          </a:p>
+        </p:txBody>
+      </p:sp>
+      <p:sp>
+        <p:nvSpPr>
+          <p:cNvPr id="23" name="TextBox 22"/>
+          <p:cNvSpPr txBox="1"/>
+          <p:nvPr/>
+        </p:nvSpPr>
+        <p:spPr>
+          <a:xfrm>
+            <a:off x="4800600" y="3127248"/>
+            <a:ext cx="2011680" cy="365760"/>
+          </a:xfrm>
+          <a:prstGeom prst="rect">
+            <a:avLst/>
+          </a:prstGeom>
+          <a:noFill/>
+        </p:spPr>
+        <p:txBody>
+          <a:bodyPr wrap="square" lIns="0" rIns="0" tIns="0" bIns="0">
+            <a:spAutoFit/>
+          </a:bodyPr>
+          <a:lstStyle/>
+          <a:p>
+            <a:pPr>
+              <a:defRPr sz="1100" b="1">
+                <a:solidFill>
+                  <a:srgbClr val="186638"/>
+                </a:solidFill>
+                <a:latin typeface="DM Serif Display"/>
+              </a:defRPr>
+            </a:pPr>
+            <a:r>
+              <a:t>4. Control Espectral por Early Stopping</a:t>
+            </a:r>
+          </a:p>
+        </p:txBody>
+      </p:sp>
+      <p:sp>
+        <p:nvSpPr>
+          <p:cNvPr id="24" name="TextBox 23"/>
+          <p:cNvSpPr txBox="1"/>
+          <p:nvPr/>
+        </p:nvSpPr>
+        <p:spPr>
+          <a:xfrm>
+            <a:off x="4800600" y="3529584"/>
+            <a:ext cx="3291840" cy="1024128"/>
+          </a:xfrm>
+          <a:prstGeom prst="rect">
+            <a:avLst/>
+          </a:prstGeom>
+          <a:noFill/>
+        </p:spPr>
+        <p:txBody>
+          <a:bodyPr wrap="square" lIns="0" rIns="0" tIns="0" bIns="0">
+            <a:spAutoFit/>
+          </a:bodyPr>
+          <a:lstStyle/>
+          <a:p>
+            <a:pPr>
+              <a:defRPr sz="900">
+                <a:solidFill>
+                  <a:srgbClr val="222222"/>
+                </a:solidFill>
+                <a:latin typeface="Karla"/>
+              </a:defRPr>
+            </a:pPr>
+            <a:r>
+              <a:t>La parada temprana restaura el punto óptimo de sesgo-varianza, recortando un 37.2% la brecha de generalización y ahorrando 95.7% de cómputo.</a:t>
             </a:r>
           </a:p>
         </p:txBody>
@@ -38254,33 +38734,23 @@
         </p:nvSpPr>
         <p:spPr>
           <a:xfrm>
-            <a:off x="868680" y="347472"/>
-            <a:ext cx="7589520" cy="777240"/>
+            <a:off x="914400" y="502920"/>
+            <a:ext cx="4937760" cy="640080"/>
           </a:xfrm>
         </p:spPr>
         <p:txBody>
-          <a:bodyPr wrap="square" lIns="0" tIns="0" rIns="0" bIns="0"/>
+          <a:bodyPr wrap="square" lIns="0" rIns="0" tIns="0" bIns="0"/>
           <a:lstStyle/>
           <a:p>
             <a:pPr algn="l"/>
             <a:r>
-              <a:rPr sz="950" b="1">
-                <a:solidFill>
-                  <a:srgbClr val="88664A"/>
-                </a:solidFill>
-                <a:latin typeface="Karla"/>
-              </a:rPr>
-              <a:t>01. FUNDAMENTO HISTÓRICO
-</a:t>
-            </a:r>
-            <a:r>
-              <a:rPr sz="2100" b="1">
+              <a:rPr sz="1750" b="1">
                 <a:solidFill>
                   <a:srgbClr val="0E2A47"/>
                 </a:solidFill>
                 <a:latin typeface="DM Serif Display"/>
               </a:rPr>
-              <a:t>Ruptura de la Barrera de Minsky-Papert y No-Linealidad</a:t>
+              <a:t>Ruptura de Minsky-Papert: Separabilidad con Capa Oculta</a:t>
             </a:r>
           </a:p>
         </p:txBody>
@@ -38293,18 +38763,18 @@
         </p:nvSpPr>
         <p:spPr>
           <a:xfrm>
-            <a:off x="777240" y="1188720"/>
-            <a:ext cx="3657600" cy="3566160"/>
+            <a:off x="5897880" y="420624"/>
+            <a:ext cx="2286000" cy="256032"/>
           </a:xfrm>
           <a:prstGeom prst="roundRect">
             <a:avLst/>
           </a:prstGeom>
           <a:solidFill>
-            <a:srgbClr val="F8F9FA"/>
+            <a:srgbClr val="FCF8F2"/>
           </a:solidFill>
           <a:ln w="12700">
             <a:solidFill>
-              <a:srgbClr val="DADEE2"/>
+              <a:srgbClr val="EDDFCD"/>
             </a:solidFill>
           </a:ln>
         </p:spPr>
@@ -38338,8 +38808,8 @@
         </p:nvSpPr>
         <p:spPr>
           <a:xfrm>
-            <a:off x="914400" y="1280160"/>
-            <a:ext cx="3383280" cy="3383280"/>
+            <a:off x="5897880" y="438912"/>
+            <a:ext cx="2286000" cy="219456"/>
           </a:xfrm>
           <a:prstGeom prst="rect">
             <a:avLst/>
@@ -38352,155 +38822,15 @@
           </a:bodyPr>
           <a:lstStyle/>
           <a:p>
-            <a:pPr>
-              <a:spcAft>
-                <a:spcPts val="800"/>
-              </a:spcAft>
-              <a:defRPr sz="1400" b="1">
+            <a:pPr algn="ctr"/>
+            <a:r>
+              <a:rPr sz="780" b="1">
                 <a:solidFill>
-                  <a:srgbClr val="0E2A47"/>
-                </a:solidFill>
-                <a:latin typeface="DM Serif Display"/>
-              </a:defRPr>
-            </a:pPr>
-            <a:r>
-              <a:t>La Limitación Monocapa en XOR</a:t>
-            </a:r>
-          </a:p>
-          <a:p>
-            <a:pPr algn="l">
-              <a:spcAft>
-                <a:spcPts val="600"/>
-              </a:spcAft>
-            </a:pPr>
-            <a:r>
-              <a:rPr sz="950" b="1">
-                <a:solidFill>
-                  <a:srgbClr val="88664A"/>
+                  <a:srgbClr val="7D542D"/>
                 </a:solidFill>
                 <a:latin typeface="Karla"/>
               </a:rPr>
-              <a:t>▪ </a:t>
-            </a:r>
-            <a:r>
-              <a:rPr sz="1050" b="1">
-                <a:solidFill>
-                  <a:srgbClr val="0E2A47"/>
-                </a:solidFill>
-                <a:latin typeface="Karla"/>
-              </a:rPr>
-              <a:t>Geometría Hiperplana: </a:t>
-            </a:r>
-            <a:r>
-              <a:rPr sz="1050">
-                <a:solidFill>
-                  <a:srgbClr val="222222"/>
-                </a:solidFill>
-                <a:latin typeface="Karla"/>
-              </a:rPr>
-              <a:t>Tanto el Perceptrón Simple como Adaline generan exclusivamente fronteras lineales: w₁x₁ + w₂x₂ + b = 0 en ℝ².</a:t>
-            </a:r>
-          </a:p>
-          <a:p>
-            <a:pPr algn="l">
-              <a:spcAft>
-                <a:spcPts val="600"/>
-              </a:spcAft>
-            </a:pPr>
-            <a:r>
-              <a:rPr sz="950" b="1">
-                <a:solidFill>
-                  <a:srgbClr val="88664A"/>
-                </a:solidFill>
-                <a:latin typeface="Karla"/>
-              </a:rPr>
-              <a:t>▪ </a:t>
-            </a:r>
-            <a:r>
-              <a:rPr sz="1050" b="1">
-                <a:solidFill>
-                  <a:srgbClr val="0E2A47"/>
-                </a:solidFill>
-                <a:latin typeface="Karla"/>
-              </a:rPr>
-              <a:t>El Problema XOR: </a:t>
-            </a:r>
-            <a:r>
-              <a:rPr sz="1050">
-                <a:solidFill>
-                  <a:srgbClr val="222222"/>
-                </a:solidFill>
-                <a:latin typeface="Karla"/>
-              </a:rPr>
-              <a:t>Las clases {(0,1), (1,0)} y {(0,0), (1,1)} poseen correlación lineal nula (ρ = 0). Imposible de escindir con un solo hiperplano.</a:t>
-            </a:r>
-          </a:p>
-          <a:p>
-            <a:pPr algn="l">
-              <a:spcAft>
-                <a:spcPts val="600"/>
-              </a:spcAft>
-            </a:pPr>
-            <a:r>
-              <a:rPr sz="950" b="1">
-                <a:solidFill>
-                  <a:srgbClr val="88664A"/>
-                </a:solidFill>
-                <a:latin typeface="Karla"/>
-              </a:rPr>
-              <a:t>▪ </a:t>
-            </a:r>
-            <a:r>
-              <a:rPr sz="1050" b="1">
-                <a:solidFill>
-                  <a:srgbClr val="0E2A47"/>
-                </a:solidFill>
-                <a:latin typeface="Karla"/>
-              </a:rPr>
-              <a:t>Colapso Cuantitativo: </a:t>
-            </a:r>
-            <a:r>
-              <a:rPr sz="1050">
-                <a:solidFill>
-                  <a:srgbClr val="222222"/>
-                </a:solidFill>
-                <a:latin typeface="Karla"/>
-              </a:rPr>
-              <a:t>El Perceptrón monocapa oscila indefinidamente sin converger, estancándose en exactitud ≤ 50.0% (equivalente al azar).</a:t>
-            </a:r>
-          </a:p>
-          <a:p>
-            <a:pPr algn="l">
-              <a:spcAft>
-                <a:spcPts val="400"/>
-              </a:spcAft>
-            </a:pPr>
-            <a:r>
-              <a:rPr sz="950" b="1">
-                <a:solidFill>
-                  <a:srgbClr val="88664A"/>
-                </a:solidFill>
-                <a:latin typeface="Karla"/>
-              </a:rPr>
-              <a:t>▪ </a:t>
-            </a:r>
-            <a:r>
-              <a:rPr sz="1050" b="1">
-                <a:solidFill>
-                  <a:srgbClr val="0E2A47"/>
-                </a:solidFill>
-                <a:latin typeface="Karla"/>
-              </a:rPr>
-              <a:t>El Invierno de la IA: </a:t>
-            </a:r>
-            <a:r>
-              <a:rPr sz="1050">
-                <a:solidFill>
-                  <a:srgbClr val="222222"/>
-                </a:solidFill>
-                <a:latin typeface="Karla"/>
-              </a:rPr>
-              <a:t>Minsky y Papert (1969) conjeturaron falsamente que extender redes a multicapas sería computacionalmente inviable o estéril.</a:t>
+              <a:t>01. FUNDAMENTO HISTÓRICO</a:t>
             </a:r>
           </a:p>
         </p:txBody>
@@ -38513,18 +38843,18 @@
         </p:nvSpPr>
         <p:spPr>
           <a:xfrm>
-            <a:off x="4709160" y="1188720"/>
-            <a:ext cx="3657600" cy="3566160"/>
+            <a:off x="914400" y="1188720"/>
+            <a:ext cx="3566160" cy="2514600"/>
           </a:xfrm>
           <a:prstGeom prst="roundRect">
             <a:avLst/>
           </a:prstGeom>
           <a:solidFill>
-            <a:srgbClr val="F8F9FA"/>
+            <a:srgbClr val="FDF4F4"/>
           </a:solidFill>
           <a:ln w="12700">
             <a:solidFill>
-              <a:srgbClr val="DADEE2"/>
+              <a:srgbClr val="F4CCCC"/>
             </a:solidFill>
           </a:ln>
         </p:spPr>
@@ -38558,8 +38888,8 @@
         </p:nvSpPr>
         <p:spPr>
           <a:xfrm>
-            <a:off x="4846320" y="1280160"/>
-            <a:ext cx="3383280" cy="3383280"/>
+            <a:off x="1051560" y="1280160"/>
+            <a:ext cx="3291840" cy="2331720"/>
           </a:xfrm>
           <a:prstGeom prst="rect">
             <a:avLst/>
@@ -38573,28 +38903,41 @@
           <a:lstStyle/>
           <a:p>
             <a:pPr>
-              <a:spcAft>
-                <a:spcPts val="800"/>
-              </a:spcAft>
-              <a:defRPr sz="1400" b="1">
+              <a:defRPr sz="2200" b="1">
                 <a:solidFill>
-                  <a:srgbClr val="88664A"/>
+                  <a:srgbClr val="9B2222"/>
                 </a:solidFill>
                 <a:latin typeface="DM Serif Display"/>
               </a:defRPr>
             </a:pPr>
             <a:r>
-              <a:t>Representación Latente y No-Linealidad</a:t>
+              <a:t>50.0% Exactitud</a:t>
+            </a:r>
+          </a:p>
+          <a:p>
+            <a:pPr>
+              <a:spcAft>
+                <a:spcPts val="800"/>
+              </a:spcAft>
+              <a:defRPr sz="850" b="1">
+                <a:solidFill>
+                  <a:srgbClr val="9B2222"/>
+                </a:solidFill>
+                <a:latin typeface="Karla"/>
+              </a:defRPr>
+            </a:pPr>
+            <a:r>
+              <a:t>COLAPSO MONOCAPA (1958–1969)</a:t>
             </a:r>
           </a:p>
           <a:p>
             <a:pPr algn="l">
               <a:spcAft>
-                <a:spcPts val="600"/>
+                <a:spcPts val="500"/>
               </a:spcAft>
             </a:pPr>
             <a:r>
-              <a:rPr sz="950" b="1">
+              <a:rPr sz="800" b="1">
                 <a:solidFill>
                   <a:srgbClr val="88664A"/>
                 </a:solidFill>
@@ -38603,32 +38946,32 @@
               <a:t>▪ </a:t>
             </a:r>
             <a:r>
-              <a:rPr sz="1050" b="1">
+              <a:rPr sz="900" b="1">
                 <a:solidFill>
-                  <a:srgbClr val="88664A"/>
+                  <a:srgbClr val="9B2222"/>
                 </a:solidFill>
                 <a:latin typeface="Karla"/>
               </a:rPr>
-              <a:t>Mapeo a Espacio Latente: </a:t>
+              <a:t>Barrera Lineal: </a:t>
             </a:r>
             <a:r>
-              <a:rPr sz="1050">
+              <a:rPr sz="900">
                 <a:solidFill>
                   <a:srgbClr val="222222"/>
                 </a:solidFill>
                 <a:latin typeface="Karla"/>
               </a:rPr>
-              <a:t>Las capas ocultas actúan como proyectores no lineales Phi: ℝⁿ -&gt; [0, 1]ᵐ. Deforman el espacio tornando las clases linealmente separables.</a:t>
+              <a:t>Perceptrón y Adaline solo generan hiperplanos w₁x₁ + w₂x₂ + b = 0. Incapaces de separar XOR (ρ = 0).</a:t>
             </a:r>
           </a:p>
           <a:p>
             <a:pPr algn="l">
               <a:spcAft>
-                <a:spcPts val="600"/>
+                <a:spcPts val="500"/>
               </a:spcAft>
             </a:pPr>
             <a:r>
-              <a:rPr sz="950" b="1">
+              <a:rPr sz="800" b="1">
                 <a:solidFill>
                   <a:srgbClr val="88664A"/>
                 </a:solidFill>
@@ -38637,32 +38980,32 @@
               <a:t>▪ </a:t>
             </a:r>
             <a:r>
-              <a:rPr sz="1050" b="1">
+              <a:rPr sz="900" b="1">
                 <a:solidFill>
-                  <a:srgbClr val="88664A"/>
+                  <a:srgbClr val="9B2222"/>
                 </a:solidFill>
                 <a:latin typeface="Karla"/>
               </a:rPr>
-              <a:t>Aproximación Universal: </a:t>
+              <a:t>Oscilación Permanente: </a:t>
             </a:r>
             <a:r>
-              <a:rPr sz="1050">
+              <a:rPr sz="900">
                 <a:solidFill>
                   <a:srgbClr val="222222"/>
                 </a:solidFill>
                 <a:latin typeface="Karla"/>
               </a:rPr>
-              <a:t>Teorema de Cybenko (1989) y Hornik (1991): una capa oculta no lineal continua aproxima cualquier función boreliana acotada.</a:t>
+              <a:t>Sin convergencia; el algoritmo conmuta indefinidamente sin converger (azar puro).</a:t>
             </a:r>
           </a:p>
           <a:p>
             <a:pPr algn="l">
               <a:spcAft>
-                <a:spcPts val="600"/>
+                <a:spcPts val="300"/>
               </a:spcAft>
             </a:pPr>
             <a:r>
-              <a:rPr sz="950" b="1">
+              <a:rPr sz="800" b="1">
                 <a:solidFill>
                   <a:srgbClr val="88664A"/>
                 </a:solidFill>
@@ -38671,32 +39014,129 @@
               <a:t>▪ </a:t>
             </a:r>
             <a:r>
-              <a:rPr sz="1050" b="1">
+              <a:rPr sz="900" b="1">
                 <a:solidFill>
-                  <a:srgbClr val="88664A"/>
+                  <a:srgbClr val="9B2222"/>
                 </a:solidFill>
                 <a:latin typeface="Karla"/>
               </a:rPr>
-              <a:t>Activaciones Sigmoideas: </a:t>
+              <a:t>Invierno de la IA: </a:t>
             </a:r>
             <a:r>
-              <a:rPr sz="1050">
+              <a:rPr sz="900">
                 <a:solidFill>
                   <a:srgbClr val="222222"/>
                 </a:solidFill>
                 <a:latin typeface="Karla"/>
               </a:rPr>
-              <a:t>El uso de funciones suaves continuas y diferenciables (σ, tanh) permite el cálculo exacto de gradientes analíticos.</a:t>
+              <a:t>Minsky &amp; Papert (1969) conjeturaron falsamente la inviabilidad de redes multicapa.</a:t>
+            </a:r>
+          </a:p>
+        </p:txBody>
+      </p:sp>
+      <p:sp>
+        <p:nvSpPr>
+          <p:cNvPr id="7" name="Rounded Rectangle 6"/>
+          <p:cNvSpPr/>
+          <p:nvPr/>
+        </p:nvSpPr>
+        <p:spPr>
+          <a:xfrm>
+            <a:off x="4663440" y="1188720"/>
+            <a:ext cx="3566160" cy="2514600"/>
+          </a:xfrm>
+          <a:prstGeom prst="roundRect">
+            <a:avLst/>
+          </a:prstGeom>
+          <a:solidFill>
+            <a:srgbClr val="EEF7F2"/>
+          </a:solidFill>
+          <a:ln w="12700">
+            <a:solidFill>
+              <a:srgbClr val="C6E6D2"/>
+            </a:solidFill>
+          </a:ln>
+        </p:spPr>
+        <p:style>
+          <a:lnRef idx="1">
+            <a:schemeClr val="accent1"/>
+          </a:lnRef>
+          <a:fillRef idx="3">
+            <a:schemeClr val="accent1"/>
+          </a:fillRef>
+          <a:effectRef idx="2">
+            <a:schemeClr val="accent1"/>
+          </a:effectRef>
+          <a:fontRef idx="minor">
+            <a:schemeClr val="lt1"/>
+          </a:fontRef>
+        </p:style>
+        <p:txBody>
+          <a:bodyPr rtlCol="0" anchor="ctr"/>
+          <a:lstStyle/>
+          <a:p>
+            <a:pPr algn="ctr"/>
+          </a:p>
+        </p:txBody>
+      </p:sp>
+      <p:sp>
+        <p:nvSpPr>
+          <p:cNvPr id="8" name="TextBox 7"/>
+          <p:cNvSpPr txBox="1"/>
+          <p:nvPr/>
+        </p:nvSpPr>
+        <p:spPr>
+          <a:xfrm>
+            <a:off x="4800600" y="1280160"/>
+            <a:ext cx="3291840" cy="2331720"/>
+          </a:xfrm>
+          <a:prstGeom prst="rect">
+            <a:avLst/>
+          </a:prstGeom>
+          <a:noFill/>
+        </p:spPr>
+        <p:txBody>
+          <a:bodyPr wrap="square" lIns="0" rIns="0" tIns="0" bIns="0">
+            <a:spAutoFit/>
+          </a:bodyPr>
+          <a:lstStyle/>
+          <a:p>
+            <a:pPr>
+              <a:defRPr sz="2200" b="1">
+                <a:solidFill>
+                  <a:srgbClr val="186638"/>
+                </a:solidFill>
+                <a:latin typeface="DM Serif Display"/>
+              </a:defRPr>
+            </a:pPr>
+            <a:r>
+              <a:t>100.0% Exactitud</a:t>
+            </a:r>
+          </a:p>
+          <a:p>
+            <a:pPr>
+              <a:spcAft>
+                <a:spcPts val="800"/>
+              </a:spcAft>
+              <a:defRPr sz="850" b="1">
+                <a:solidFill>
+                  <a:srgbClr val="186638"/>
+                </a:solidFill>
+                <a:latin typeface="Karla"/>
+              </a:defRPr>
+            </a:pPr>
+            <a:r>
+              <a:t>SOLUCIÓN MULTICAPA (1986–PRESENTE)</a:t>
             </a:r>
           </a:p>
           <a:p>
             <a:pPr algn="l">
               <a:spcAft>
-                <a:spcPts val="400"/>
+                <a:spcPts val="500"/>
               </a:spcAft>
             </a:pPr>
             <a:r>
-              <a:rPr sz="950" b="1">
+              <a:rPr sz="800" b="1">
                 <a:solidFill>
                   <a:srgbClr val="88664A"/>
                 </a:solidFill>
@@ -38705,22 +39145,187 @@
               <a:t>▪ </a:t>
             </a:r>
             <a:r>
-              <a:rPr sz="1050" b="1">
+              <a:rPr sz="900" b="1">
+                <a:solidFill>
+                  <a:srgbClr val="186638"/>
+                </a:solidFill>
+                <a:latin typeface="Karla"/>
+              </a:rPr>
+              <a:t>Espacio Latente Φ: </a:t>
+            </a:r>
+            <a:r>
+              <a:rPr sz="900">
+                <a:solidFill>
+                  <a:srgbClr val="222222"/>
+                </a:solidFill>
+                <a:latin typeface="Karla"/>
+              </a:rPr>
+              <a:t>Las neuronas ocultas proyectan ℝ² a un espacio intermedio donde las clases se tornan linealmente separables.</a:t>
+            </a:r>
+          </a:p>
+          <a:p>
+            <a:pPr algn="l">
+              <a:spcAft>
+                <a:spcPts val="500"/>
+              </a:spcAft>
+            </a:pPr>
+            <a:r>
+              <a:rPr sz="800" b="1">
                 <a:solidFill>
                   <a:srgbClr val="88664A"/>
                 </a:solidFill>
                 <a:latin typeface="Karla"/>
               </a:rPr>
-              <a:t>Retropropagación (1986): </a:t>
+              <a:t>▪ </a:t>
             </a:r>
             <a:r>
-              <a:rPr sz="1050">
+              <a:rPr sz="900" b="1">
+                <a:solidFill>
+                  <a:srgbClr val="186638"/>
+                </a:solidFill>
+                <a:latin typeface="Karla"/>
+              </a:rPr>
+              <a:t>Aproximación Universal: </a:t>
+            </a:r>
+            <a:r>
+              <a:rPr sz="900">
                 <a:solidFill>
                   <a:srgbClr val="222222"/>
                 </a:solidFill>
                 <a:latin typeface="Karla"/>
               </a:rPr>
-              <a:t>Rumelhart, Hinton y Williams formalizan el flujo inverso del gradiente mediante regla de la cadena, destrabando la IA moderna.</a:t>
+              <a:t>Cybenko (1989) demostró que 1 capa oculta no lineal continua aproxima cualquier función boreliana.</a:t>
+            </a:r>
+          </a:p>
+          <a:p>
+            <a:pPr algn="l">
+              <a:spcAft>
+                <a:spcPts val="300"/>
+              </a:spcAft>
+            </a:pPr>
+            <a:r>
+              <a:rPr sz="800" b="1">
+                <a:solidFill>
+                  <a:srgbClr val="88664A"/>
+                </a:solidFill>
+                <a:latin typeface="Karla"/>
+              </a:rPr>
+              <a:t>▪ </a:t>
+            </a:r>
+            <a:r>
+              <a:rPr sz="900" b="1">
+                <a:solidFill>
+                  <a:srgbClr val="186638"/>
+                </a:solidFill>
+                <a:latin typeface="Karla"/>
+              </a:rPr>
+              <a:t>Backpropagation (1986): </a:t>
+            </a:r>
+            <a:r>
+              <a:rPr sz="900">
+                <a:solidFill>
+                  <a:srgbClr val="222222"/>
+                </a:solidFill>
+                <a:latin typeface="Karla"/>
+              </a:rPr>
+              <a:t>Rumelhart, Hinton y Williams formalizan el flujo del gradiente analítico exacto vía regla de la cadena.</a:t>
+            </a:r>
+          </a:p>
+        </p:txBody>
+      </p:sp>
+      <p:sp>
+        <p:nvSpPr>
+          <p:cNvPr id="9" name="Rounded Rectangle 8"/>
+          <p:cNvSpPr/>
+          <p:nvPr/>
+        </p:nvSpPr>
+        <p:spPr>
+          <a:xfrm>
+            <a:off x="914400" y="3840480"/>
+            <a:ext cx="7315200" cy="868680"/>
+          </a:xfrm>
+          <a:prstGeom prst="roundRect">
+            <a:avLst/>
+          </a:prstGeom>
+          <a:solidFill>
+            <a:srgbClr val="FCF8F2"/>
+          </a:solidFill>
+          <a:ln w="12700">
+            <a:solidFill>
+              <a:srgbClr val="EDDFCD"/>
+            </a:solidFill>
+          </a:ln>
+        </p:spPr>
+        <p:style>
+          <a:lnRef idx="1">
+            <a:schemeClr val="accent1"/>
+          </a:lnRef>
+          <a:fillRef idx="3">
+            <a:schemeClr val="accent1"/>
+          </a:fillRef>
+          <a:effectRef idx="2">
+            <a:schemeClr val="accent1"/>
+          </a:effectRef>
+          <a:fontRef idx="minor">
+            <a:schemeClr val="lt1"/>
+          </a:fontRef>
+        </p:style>
+        <p:txBody>
+          <a:bodyPr rtlCol="0" anchor="ctr"/>
+          <a:lstStyle/>
+          <a:p>
+            <a:pPr algn="ctr"/>
+          </a:p>
+        </p:txBody>
+      </p:sp>
+      <p:sp>
+        <p:nvSpPr>
+          <p:cNvPr id="10" name="TextBox 9"/>
+          <p:cNvSpPr txBox="1"/>
+          <p:nvPr/>
+        </p:nvSpPr>
+        <p:spPr>
+          <a:xfrm>
+            <a:off x="1097280" y="3913632"/>
+            <a:ext cx="6949440" cy="731520"/>
+          </a:xfrm>
+          <a:prstGeom prst="rect">
+            <a:avLst/>
+          </a:prstGeom>
+          <a:noFill/>
+        </p:spPr>
+        <p:txBody>
+          <a:bodyPr wrap="square" lIns="0" rIns="0" tIns="0" bIns="0">
+            <a:spAutoFit/>
+          </a:bodyPr>
+          <a:lstStyle/>
+          <a:p>
+            <a:pPr>
+              <a:spcAft>
+                <a:spcPts val="200"/>
+              </a:spcAft>
+              <a:defRPr sz="900" b="1">
+                <a:solidFill>
+                  <a:srgbClr val="7D542D"/>
+                </a:solidFill>
+                <a:latin typeface="Karla"/>
+              </a:defRPr>
+            </a:pPr>
+            <a:r>
+              <a:t>★ PRINCIPIO REVOLUCIONARIO DEL ESPACIO LATENTE</a:t>
+            </a:r>
+          </a:p>
+          <a:p>
+            <a:pPr>
+              <a:defRPr sz="930">
+                <a:solidFill>
+                  <a:srgbClr val="222222"/>
+                </a:solidFill>
+                <a:latin typeface="Karla"/>
+              </a:defRPr>
+            </a:pPr>
+            <a:r>
+              <a:t>La capa intermedia NO toma la decisión de negocio; su función es deformar topológicamente la variedad de entrada para que la capa de salida resuelva el problema con un hiperplano trivial.</a:t>
             </a:r>
           </a:p>
         </p:txBody>
@@ -38755,33 +39360,23 @@
         </p:nvSpPr>
         <p:spPr>
           <a:xfrm>
-            <a:off x="868680" y="347472"/>
-            <a:ext cx="7589520" cy="777240"/>
+            <a:off x="914400" y="502920"/>
+            <a:ext cx="4937760" cy="640080"/>
           </a:xfrm>
         </p:spPr>
         <p:txBody>
-          <a:bodyPr wrap="square" lIns="0" tIns="0" rIns="0" bIns="0"/>
+          <a:bodyPr wrap="square" lIns="0" rIns="0" tIns="0" bIns="0"/>
           <a:lstStyle/>
           <a:p>
             <a:pPr algn="l"/>
             <a:r>
-              <a:rPr sz="950" b="1">
-                <a:solidFill>
-                  <a:srgbClr val="88664A"/>
-                </a:solidFill>
-                <a:latin typeface="Karla"/>
-              </a:rPr>
-              <a:t>02. FORMULACIÓN MATEMÁTICA
-</a:t>
-            </a:r>
-            <a:r>
-              <a:rPr sz="2100" b="1">
+              <a:rPr sz="1750" b="1">
                 <a:solidFill>
                   <a:srgbClr val="0E2A47"/>
                 </a:solidFill>
                 <a:latin typeface="DM Serif Display"/>
               </a:rPr>
-              <a:t>Arquitectura del MLP y Retropropagación con Momento</a:t>
+              <a:t>Formulación MLP: Regla de la Cadena y Aceleración Inercial β</a:t>
             </a:r>
           </a:p>
         </p:txBody>
@@ -38794,18 +39389,18 @@
         </p:nvSpPr>
         <p:spPr>
           <a:xfrm>
-            <a:off x="777240" y="1188720"/>
-            <a:ext cx="2395728" cy="3566160"/>
+            <a:off x="5897880" y="420624"/>
+            <a:ext cx="2286000" cy="256032"/>
           </a:xfrm>
           <a:prstGeom prst="roundRect">
             <a:avLst/>
           </a:prstGeom>
           <a:solidFill>
-            <a:srgbClr val="F8F9FA"/>
+            <a:srgbClr val="FCF8F2"/>
           </a:solidFill>
           <a:ln w="12700">
             <a:solidFill>
-              <a:srgbClr val="DADEE2"/>
+              <a:srgbClr val="EDDFCD"/>
             </a:solidFill>
           </a:ln>
         </p:spPr>
@@ -38839,8 +39434,8 @@
         </p:nvSpPr>
         <p:spPr>
           <a:xfrm>
-            <a:off x="886968" y="1280160"/>
-            <a:ext cx="2176272" cy="3383280"/>
+            <a:off x="5897880" y="438912"/>
+            <a:ext cx="2286000" cy="219456"/>
           </a:xfrm>
           <a:prstGeom prst="rect">
             <a:avLst/>
@@ -38853,159 +39448,15 @@
           </a:bodyPr>
           <a:lstStyle/>
           <a:p>
-            <a:pPr>
-              <a:spcAft>
-                <a:spcPts val="600"/>
-              </a:spcAft>
-              <a:defRPr sz="1300" b="1">
+            <a:pPr algn="ctr"/>
+            <a:r>
+              <a:rPr sz="780" b="1">
                 <a:solidFill>
-                  <a:srgbClr val="0E2A47"/>
-                </a:solidFill>
-                <a:latin typeface="DM Serif Display"/>
-              </a:defRPr>
-            </a:pPr>
-            <a:r>
-              <a:t>1. Forward Pass</a:t>
-            </a:r>
-          </a:p>
-          <a:p>
-            <a:pPr algn="l">
-              <a:spcAft>
-                <a:spcPts val="600"/>
-              </a:spcAft>
-            </a:pPr>
-            <a:r>
-              <a:rPr sz="900" b="1">
-                <a:solidFill>
-                  <a:srgbClr val="88664A"/>
+                  <a:srgbClr val="7D542D"/>
                 </a:solidFill>
                 <a:latin typeface="Karla"/>
               </a:rPr>
-              <a:t>▪ </a:t>
-            </a:r>
-            <a:r>
-              <a:rPr sz="1000" b="1">
-                <a:solidFill>
-                  <a:srgbClr val="0E2A47"/>
-                </a:solidFill>
-                <a:latin typeface="Karla"/>
-              </a:rPr>
-              <a:t>Activación Afín: </a:t>
-            </a:r>
-            <a:r>
-              <a:rPr sz="1000">
-                <a:solidFill>
-                  <a:srgbClr val="222222"/>
-                </a:solidFill>
-                <a:latin typeface="Karla"/>
-              </a:rPr>
-              <a:t>Combinación lineal de entradas y sesgo:
-z_j = Σ w_ji a_i + b_j</a:t>
-            </a:r>
-          </a:p>
-          <a:p>
-            <a:pPr algn="l">
-              <a:spcAft>
-                <a:spcPts val="600"/>
-              </a:spcAft>
-            </a:pPr>
-            <a:r>
-              <a:rPr sz="900" b="1">
-                <a:solidFill>
-                  <a:srgbClr val="88664A"/>
-                </a:solidFill>
-                <a:latin typeface="Karla"/>
-              </a:rPr>
-              <a:t>▪ </a:t>
-            </a:r>
-            <a:r>
-              <a:rPr sz="1000" b="1">
-                <a:solidFill>
-                  <a:srgbClr val="0E2A47"/>
-                </a:solidFill>
-                <a:latin typeface="Karla"/>
-              </a:rPr>
-              <a:t>Sigmoide Logística: </a:t>
-            </a:r>
-            <a:r>
-              <a:rPr sz="1000">
-                <a:solidFill>
-                  <a:srgbClr val="222222"/>
-                </a:solidFill>
-                <a:latin typeface="Karla"/>
-              </a:rPr>
-              <a:t>Mapeo probabilístico no lineal:
-a_j = σ(z_j) = 1 / (1 + e^(-z_j))</a:t>
-            </a:r>
-          </a:p>
-          <a:p>
-            <a:pPr algn="l">
-              <a:spcAft>
-                <a:spcPts val="600"/>
-              </a:spcAft>
-            </a:pPr>
-            <a:r>
-              <a:rPr sz="900" b="1">
-                <a:solidFill>
-                  <a:srgbClr val="88664A"/>
-                </a:solidFill>
-                <a:latin typeface="Karla"/>
-              </a:rPr>
-              <a:t>▪ </a:t>
-            </a:r>
-            <a:r>
-              <a:rPr sz="1000" b="1">
-                <a:solidFill>
-                  <a:srgbClr val="0E2A47"/>
-                </a:solidFill>
-                <a:latin typeface="Karla"/>
-              </a:rPr>
-              <a:t>Derivada Elegante: </a:t>
-            </a:r>
-            <a:r>
-              <a:rPr sz="1000">
-                <a:solidFill>
-                  <a:srgbClr val="222222"/>
-                </a:solidFill>
-                <a:latin typeface="Karla"/>
-              </a:rPr>
-              <a:t>Cálculo computacional ultra eficiente:
-σ'(z_j) = a_j (1 - a_j)</a:t>
-            </a:r>
-          </a:p>
-          <a:p>
-            <a:pPr algn="l">
-              <a:spcAft>
-                <a:spcPts val="400"/>
-              </a:spcAft>
-            </a:pPr>
-            <a:r>
-              <a:rPr sz="900" b="1">
-                <a:solidFill>
-                  <a:srgbClr val="88664A"/>
-                </a:solidFill>
-                <a:latin typeface="Karla"/>
-              </a:rPr>
-              <a:t>▪ </a:t>
-            </a:r>
-            <a:r>
-              <a:rPr sz="1000" b="1">
-                <a:solidFill>
-                  <a:srgbClr val="0E2A47"/>
-                </a:solidFill>
-                <a:latin typeface="Karla"/>
-              </a:rPr>
-              <a:t>Costo Global (MSE): </a:t>
-            </a:r>
-            <a:r>
-              <a:rPr sz="1000">
-                <a:solidFill>
-                  <a:srgbClr val="222222"/>
-                </a:solidFill>
-                <a:latin typeface="Karla"/>
-              </a:rPr>
-              <a:t>Superficie de pérdida diferenciable:
-E = ½ Σ_k (y_k - t_k)²</a:t>
+              <a:t>02. FORMULACIÓN MATEMÁTICA</a:t>
             </a:r>
           </a:p>
         </p:txBody>
@@ -39018,18 +39469,18 @@
         </p:nvSpPr>
         <p:spPr>
           <a:xfrm>
-            <a:off x="3374136" y="1188720"/>
-            <a:ext cx="2395728" cy="3566160"/>
+            <a:off x="914400" y="1188720"/>
+            <a:ext cx="2331720" cy="3520440"/>
           </a:xfrm>
           <a:prstGeom prst="roundRect">
             <a:avLst/>
           </a:prstGeom>
           <a:solidFill>
-            <a:srgbClr val="F8F9FA"/>
+            <a:srgbClr val="F9FAFB"/>
           </a:solidFill>
           <a:ln w="12700">
             <a:solidFill>
-              <a:srgbClr val="DADEE2"/>
+              <a:srgbClr val="DEE2E6"/>
             </a:solidFill>
           </a:ln>
         </p:spPr>
@@ -39057,202 +39508,24 @@
       </p:sp>
       <p:sp>
         <p:nvSpPr>
-          <p:cNvPr id="6" name="TextBox 5"/>
-          <p:cNvSpPr txBox="1"/>
-          <p:nvPr/>
-        </p:nvSpPr>
-        <p:spPr>
-          <a:xfrm>
-            <a:off x="3483864" y="1280160"/>
-            <a:ext cx="2176272" cy="3383280"/>
-          </a:xfrm>
-          <a:prstGeom prst="rect">
-            <a:avLst/>
-          </a:prstGeom>
-          <a:noFill/>
-        </p:spPr>
-        <p:txBody>
-          <a:bodyPr wrap="square" lIns="0" rIns="0" tIns="0" bIns="0">
-            <a:spAutoFit/>
-          </a:bodyPr>
-          <a:lstStyle/>
-          <a:p>
-            <a:pPr>
-              <a:spcAft>
-                <a:spcPts val="600"/>
-              </a:spcAft>
-              <a:defRPr sz="1300" b="1">
-                <a:solidFill>
-                  <a:srgbClr val="435D74"/>
-                </a:solidFill>
-                <a:latin typeface="DM Serif Display"/>
-              </a:defRPr>
-            </a:pPr>
-            <a:r>
-              <a:t>2. Retropropagación</a:t>
-            </a:r>
-          </a:p>
-          <a:p>
-            <a:pPr algn="l">
-              <a:spcAft>
-                <a:spcPts val="600"/>
-              </a:spcAft>
-            </a:pPr>
-            <a:r>
-              <a:rPr sz="900" b="1">
-                <a:solidFill>
-                  <a:srgbClr val="88664A"/>
-                </a:solidFill>
-                <a:latin typeface="Karla"/>
-              </a:rPr>
-              <a:t>▪ </a:t>
-            </a:r>
-            <a:r>
-              <a:rPr sz="1000" b="1">
-                <a:solidFill>
-                  <a:srgbClr val="435D74"/>
-                </a:solidFill>
-                <a:latin typeface="Karla"/>
-              </a:rPr>
-              <a:t>Regla de la Cadena: </a:t>
-            </a:r>
-            <a:r>
-              <a:rPr sz="1000">
-                <a:solidFill>
-                  <a:srgbClr val="222222"/>
-                </a:solidFill>
-                <a:latin typeface="Karla"/>
-              </a:rPr>
-              <a:t>Descomposición analítica exacta:
-∂E/∂w_kj = δ_k · a_j</a:t>
-            </a:r>
-          </a:p>
-          <a:p>
-            <a:pPr algn="l">
-              <a:spcAft>
-                <a:spcPts val="600"/>
-              </a:spcAft>
-            </a:pPr>
-            <a:r>
-              <a:rPr sz="900" b="1">
-                <a:solidFill>
-                  <a:srgbClr val="88664A"/>
-                </a:solidFill>
-                <a:latin typeface="Karla"/>
-              </a:rPr>
-              <a:t>▪ </a:t>
-            </a:r>
-            <a:r>
-              <a:rPr sz="1000" b="1">
-                <a:solidFill>
-                  <a:srgbClr val="435D74"/>
-                </a:solidFill>
-                <a:latin typeface="Karla"/>
-              </a:rPr>
-              <a:t>Gradiente en Salida: </a:t>
-            </a:r>
-            <a:r>
-              <a:rPr sz="1000">
-                <a:solidFill>
-                  <a:srgbClr val="222222"/>
-                </a:solidFill>
-                <a:latin typeface="Karla"/>
-              </a:rPr>
-              <a:t>Sensibilidad del nodo de salida:
-δ_k = (y_k - t_k) · y_k (1 - y_k)</a:t>
-            </a:r>
-          </a:p>
-          <a:p>
-            <a:pPr algn="l">
-              <a:spcAft>
-                <a:spcPts val="600"/>
-              </a:spcAft>
-            </a:pPr>
-            <a:r>
-              <a:rPr sz="900" b="1">
-                <a:solidFill>
-                  <a:srgbClr val="88664A"/>
-                </a:solidFill>
-                <a:latin typeface="Karla"/>
-              </a:rPr>
-              <a:t>▪ </a:t>
-            </a:r>
-            <a:r>
-              <a:rPr sz="1000" b="1">
-                <a:solidFill>
-                  <a:srgbClr val="435D74"/>
-                </a:solidFill>
-                <a:latin typeface="Karla"/>
-              </a:rPr>
-              <a:t>Retroceso a Ocultas: </a:t>
-            </a:r>
-            <a:r>
-              <a:rPr sz="1000">
-                <a:solidFill>
-                  <a:srgbClr val="222222"/>
-                </a:solidFill>
-                <a:latin typeface="Karla"/>
-              </a:rPr>
-              <a:t>Propagación hacia atrás del error:
-δ_j = [Σ_k w_kj δ_k] · a_j (1 - a_j)</a:t>
-            </a:r>
-          </a:p>
-          <a:p>
-            <a:pPr algn="l">
-              <a:spcAft>
-                <a:spcPts val="400"/>
-              </a:spcAft>
-            </a:pPr>
-            <a:r>
-              <a:rPr sz="900" b="1">
-                <a:solidFill>
-                  <a:srgbClr val="88664A"/>
-                </a:solidFill>
-                <a:latin typeface="Karla"/>
-              </a:rPr>
-              <a:t>▪ </a:t>
-            </a:r>
-            <a:r>
-              <a:rPr sz="1000" b="1">
-                <a:solidFill>
-                  <a:srgbClr val="435D74"/>
-                </a:solidFill>
-                <a:latin typeface="Karla"/>
-              </a:rPr>
-              <a:t>Complejidad O(N): </a:t>
-            </a:r>
-            <a:r>
-              <a:rPr sz="1000">
-                <a:solidFill>
-                  <a:srgbClr val="222222"/>
-                </a:solidFill>
-                <a:latin typeface="Karla"/>
-              </a:rPr>
-              <a:t>Cálculo en tiempo lineal respecto al número de sinapsis de la red.</a:t>
-            </a:r>
-          </a:p>
-        </p:txBody>
-      </p:sp>
-      <p:sp>
-        <p:nvSpPr>
-          <p:cNvPr id="7" name="Rounded Rectangle 6"/>
+          <p:cNvPr id="6" name="Rounded Rectangle 5"/>
           <p:cNvSpPr/>
           <p:nvPr/>
         </p:nvSpPr>
         <p:spPr>
           <a:xfrm>
-            <a:off x="5971032" y="1188720"/>
-            <a:ext cx="2395728" cy="3566160"/>
+            <a:off x="1024128" y="1298448"/>
+            <a:ext cx="2112264" cy="731520"/>
           </a:xfrm>
           <a:prstGeom prst="roundRect">
             <a:avLst/>
           </a:prstGeom>
           <a:solidFill>
-            <a:srgbClr val="F8F9FA"/>
+            <a:srgbClr val="F0F5FA"/>
           </a:solidFill>
           <a:ln w="12700">
             <a:solidFill>
-              <a:srgbClr val="DADEE2"/>
+              <a:srgbClr val="CDDCEB"/>
             </a:solidFill>
           </a:ln>
         </p:spPr>
@@ -39280,14 +39553,14 @@
       </p:sp>
       <p:sp>
         <p:nvSpPr>
-          <p:cNvPr id="8" name="TextBox 7"/>
+          <p:cNvPr id="7" name="TextBox 6"/>
           <p:cNvSpPr txBox="1"/>
           <p:nvPr/>
         </p:nvSpPr>
         <p:spPr>
           <a:xfrm>
-            <a:off x="6080760" y="1280160"/>
-            <a:ext cx="2176272" cy="3383280"/>
+            <a:off x="1097280" y="1353312"/>
+            <a:ext cx="1965960" cy="621792"/>
           </a:xfrm>
           <a:prstGeom prst="rect">
             <a:avLst/>
@@ -39300,29 +39573,73 @@
           </a:bodyPr>
           <a:lstStyle/>
           <a:p>
-            <a:pPr>
-              <a:spcAft>
-                <a:spcPts val="600"/>
-              </a:spcAft>
-              <a:defRPr sz="1300" b="1">
+            <a:pPr algn="ctr"/>
+            <a:r>
+              <a:rPr sz="2100" b="1">
                 <a:solidFill>
-                  <a:srgbClr val="88664A"/>
+                  <a:srgbClr val="144169"/>
                 </a:solidFill>
                 <a:latin typeface="DM Serif Display"/>
-              </a:defRPr>
-            </a:pPr>
-            <a:r>
-              <a:t>3. Momento Inercial β</a:t>
+              </a:rPr>
+              <a:t>σ(z) ∈ [0, 1]</a:t>
             </a:r>
           </a:p>
           <a:p>
+            <a:pPr algn="ctr"/>
+            <a:r>
+              <a:rPr sz="830" b="1">
+                <a:solidFill>
+                  <a:srgbClr val="435D74"/>
+                </a:solidFill>
+                <a:latin typeface="Karla"/>
+              </a:rPr>
+              <a:t>PROPAGACIÓN HACIA ADELANTE</a:t>
+            </a:r>
+          </a:p>
+          <a:p>
+            <a:pPr algn="ctr"/>
+            <a:r>
+              <a:rPr sz="730">
+                <a:solidFill>
+                  <a:srgbClr val="5F6973"/>
+                </a:solidFill>
+                <a:latin typeface="Karla"/>
+              </a:rPr>
+              <a:t>Forward Pass Diferenciable</a:t>
+            </a:r>
+          </a:p>
+        </p:txBody>
+      </p:sp>
+      <p:sp>
+        <p:nvSpPr>
+          <p:cNvPr id="8" name="TextBox 7"/>
+          <p:cNvSpPr txBox="1"/>
+          <p:nvPr/>
+        </p:nvSpPr>
+        <p:spPr>
+          <a:xfrm>
+            <a:off x="1051560" y="2148840"/>
+            <a:ext cx="2057400" cy="2423160"/>
+          </a:xfrm>
+          <a:prstGeom prst="rect">
+            <a:avLst/>
+          </a:prstGeom>
+          <a:noFill/>
+        </p:spPr>
+        <p:txBody>
+          <a:bodyPr wrap="square" lIns="0" rIns="0" tIns="0" bIns="0">
+            <a:spAutoFit/>
+          </a:bodyPr>
+          <a:lstStyle/>
+          <a:p/>
+          <a:p>
             <a:pPr algn="l">
               <a:spcAft>
                 <a:spcPts val="600"/>
               </a:spcAft>
             </a:pPr>
             <a:r>
-              <a:rPr sz="900" b="1">
+              <a:rPr sz="780" b="1">
                 <a:solidFill>
                   <a:srgbClr val="88664A"/>
                 </a:solidFill>
@@ -39331,22 +39648,22 @@
               <a:t>▪ </a:t>
             </a:r>
             <a:r>
-              <a:rPr sz="1000" b="1">
+              <a:rPr sz="880" b="1">
                 <a:solidFill>
-                  <a:srgbClr val="88664A"/>
+                  <a:srgbClr val="0E2A47"/>
                 </a:solidFill>
                 <a:latin typeface="Karla"/>
               </a:rPr>
-              <a:t>Regla Delta Generalizada: </a:t>
+              <a:t>Combinación Afín: </a:t>
             </a:r>
             <a:r>
-              <a:rPr sz="1000">
+              <a:rPr sz="880">
                 <a:solidFill>
                   <a:srgbClr val="222222"/>
                 </a:solidFill>
                 <a:latin typeface="Karla"/>
               </a:rPr>
-              <a:t>ΔW^(t) = -η ∇E + β ΔW^(t-1), incorporando memoria histórica inercial.</a:t>
+              <a:t>z_j = Σ w_ji a_i + b_j proyecta las activaciones precedentes de forma matricial.</a:t>
             </a:r>
           </a:p>
           <a:p>
@@ -39356,7 +39673,7 @@
               </a:spcAft>
             </a:pPr>
             <a:r>
-              <a:rPr sz="900" b="1">
+              <a:rPr sz="780" b="1">
                 <a:solidFill>
                   <a:srgbClr val="88664A"/>
                 </a:solidFill>
@@ -39365,32 +39682,32 @@
               <a:t>▪ </a:t>
             </a:r>
             <a:r>
-              <a:rPr sz="1000" b="1">
+              <a:rPr sz="880" b="1">
                 <a:solidFill>
-                  <a:srgbClr val="88664A"/>
+                  <a:srgbClr val="0E2A47"/>
                 </a:solidFill>
                 <a:latin typeface="Karla"/>
               </a:rPr>
-              <a:t>Dinámica Hamiltoniana: </a:t>
+              <a:t>Sigmoide Logística: </a:t>
             </a:r>
             <a:r>
-              <a:rPr sz="1000">
+              <a:rPr sz="880">
                 <a:solidFill>
                   <a:srgbClr val="222222"/>
                 </a:solidFill>
                 <a:latin typeface="Karla"/>
               </a:rPr>
-              <a:t>Análogo a partícula clásica con masa en potencial gravitatorio con fricción viscosa.</a:t>
+              <a:t>a_j = 1 / (1 + e^(-z_j)) aporta no-linealidad suave con derivada σ'(z) = a(1 - a).</a:t>
             </a:r>
           </a:p>
           <a:p>
             <a:pPr algn="l">
               <a:spcAft>
-                <a:spcPts val="600"/>
+                <a:spcPts val="400"/>
               </a:spcAft>
             </a:pPr>
             <a:r>
-              <a:rPr sz="900" b="1">
+              <a:rPr sz="780" b="1">
                 <a:solidFill>
                   <a:srgbClr val="88664A"/>
                 </a:solidFill>
@@ -39399,32 +39716,205 @@
               <a:t>▪ </a:t>
             </a:r>
             <a:r>
-              <a:rPr sz="1000" b="1">
+              <a:rPr sz="880" b="1">
                 <a:solidFill>
-                  <a:srgbClr val="88664A"/>
+                  <a:srgbClr val="0E2A47"/>
                 </a:solidFill>
                 <a:latin typeface="Karla"/>
               </a:rPr>
-              <a:t>Filtro Pasa-Bajos: </a:t>
+              <a:t>Costo Cuadrático (MSE): </a:t>
             </a:r>
             <a:r>
-              <a:rPr sz="1000">
+              <a:rPr sz="880">
                 <a:solidFill>
                   <a:srgbClr val="222222"/>
                 </a:solidFill>
                 <a:latin typeface="Karla"/>
               </a:rPr>
-              <a:t>Amortigua oscilaciones ortogonales de alta frecuencia en valles escarpados.</a:t>
+              <a:t>E = ½ Σ_k (y_k - t_k)² define una superficie de error continua y diferenciable.</a:t>
+            </a:r>
+          </a:p>
+        </p:txBody>
+      </p:sp>
+      <p:sp>
+        <p:nvSpPr>
+          <p:cNvPr id="9" name="Rounded Rectangle 8"/>
+          <p:cNvSpPr/>
+          <p:nvPr/>
+        </p:nvSpPr>
+        <p:spPr>
+          <a:xfrm>
+            <a:off x="3401568" y="1188720"/>
+            <a:ext cx="2331720" cy="3520440"/>
+          </a:xfrm>
+          <a:prstGeom prst="roundRect">
+            <a:avLst/>
+          </a:prstGeom>
+          <a:solidFill>
+            <a:srgbClr val="F9FAFB"/>
+          </a:solidFill>
+          <a:ln w="12700">
+            <a:solidFill>
+              <a:srgbClr val="DEE2E6"/>
+            </a:solidFill>
+          </a:ln>
+        </p:spPr>
+        <p:style>
+          <a:lnRef idx="1">
+            <a:schemeClr val="accent1"/>
+          </a:lnRef>
+          <a:fillRef idx="3">
+            <a:schemeClr val="accent1"/>
+          </a:fillRef>
+          <a:effectRef idx="2">
+            <a:schemeClr val="accent1"/>
+          </a:effectRef>
+          <a:fontRef idx="minor">
+            <a:schemeClr val="lt1"/>
+          </a:fontRef>
+        </p:style>
+        <p:txBody>
+          <a:bodyPr rtlCol="0" anchor="ctr"/>
+          <a:lstStyle/>
+          <a:p>
+            <a:pPr algn="ctr"/>
+          </a:p>
+        </p:txBody>
+      </p:sp>
+      <p:sp>
+        <p:nvSpPr>
+          <p:cNvPr id="10" name="Rounded Rectangle 9"/>
+          <p:cNvSpPr/>
+          <p:nvPr/>
+        </p:nvSpPr>
+        <p:spPr>
+          <a:xfrm>
+            <a:off x="3511296" y="1298448"/>
+            <a:ext cx="2112264" cy="731520"/>
+          </a:xfrm>
+          <a:prstGeom prst="roundRect">
+            <a:avLst/>
+          </a:prstGeom>
+          <a:solidFill>
+            <a:srgbClr val="FCF8F2"/>
+          </a:solidFill>
+          <a:ln w="12700">
+            <a:solidFill>
+              <a:srgbClr val="EDDFCD"/>
+            </a:solidFill>
+          </a:ln>
+        </p:spPr>
+        <p:style>
+          <a:lnRef idx="1">
+            <a:schemeClr val="accent1"/>
+          </a:lnRef>
+          <a:fillRef idx="3">
+            <a:schemeClr val="accent1"/>
+          </a:fillRef>
+          <a:effectRef idx="2">
+            <a:schemeClr val="accent1"/>
+          </a:effectRef>
+          <a:fontRef idx="minor">
+            <a:schemeClr val="lt1"/>
+          </a:fontRef>
+        </p:style>
+        <p:txBody>
+          <a:bodyPr rtlCol="0" anchor="ctr"/>
+          <a:lstStyle/>
+          <a:p>
+            <a:pPr algn="ctr"/>
+          </a:p>
+        </p:txBody>
+      </p:sp>
+      <p:sp>
+        <p:nvSpPr>
+          <p:cNvPr id="11" name="TextBox 10"/>
+          <p:cNvSpPr txBox="1"/>
+          <p:nvPr/>
+        </p:nvSpPr>
+        <p:spPr>
+          <a:xfrm>
+            <a:off x="3584448" y="1353312"/>
+            <a:ext cx="1965960" cy="621792"/>
+          </a:xfrm>
+          <a:prstGeom prst="rect">
+            <a:avLst/>
+          </a:prstGeom>
+          <a:noFill/>
+        </p:spPr>
+        <p:txBody>
+          <a:bodyPr wrap="square" lIns="0" rIns="0" tIns="0" bIns="0">
+            <a:spAutoFit/>
+          </a:bodyPr>
+          <a:lstStyle/>
+          <a:p>
+            <a:pPr algn="ctr"/>
+            <a:r>
+              <a:rPr sz="2100" b="1">
+                <a:solidFill>
+                  <a:srgbClr val="7D542D"/>
+                </a:solidFill>
+                <a:latin typeface="DM Serif Display"/>
+              </a:rPr>
+              <a:t>O(N) Lineal</a:t>
             </a:r>
           </a:p>
           <a:p>
+            <a:pPr algn="ctr"/>
+            <a:r>
+              <a:rPr sz="830" b="1">
+                <a:solidFill>
+                  <a:srgbClr val="435D74"/>
+                </a:solidFill>
+                <a:latin typeface="Karla"/>
+              </a:rPr>
+              <a:t>RETROPROPAGACIÓN DEL ERROR</a:t>
+            </a:r>
+          </a:p>
+          <a:p>
+            <a:pPr algn="ctr"/>
+            <a:r>
+              <a:rPr sz="730">
+                <a:solidFill>
+                  <a:srgbClr val="5F6973"/>
+                </a:solidFill>
+                <a:latin typeface="Karla"/>
+              </a:rPr>
+              <a:t>Backward Pass Exacto</a:t>
+            </a:r>
+          </a:p>
+        </p:txBody>
+      </p:sp>
+      <p:sp>
+        <p:nvSpPr>
+          <p:cNvPr id="12" name="TextBox 11"/>
+          <p:cNvSpPr txBox="1"/>
+          <p:nvPr/>
+        </p:nvSpPr>
+        <p:spPr>
+          <a:xfrm>
+            <a:off x="3538728" y="2148840"/>
+            <a:ext cx="2057400" cy="2423160"/>
+          </a:xfrm>
+          <a:prstGeom prst="rect">
+            <a:avLst/>
+          </a:prstGeom>
+          <a:noFill/>
+        </p:spPr>
+        <p:txBody>
+          <a:bodyPr wrap="square" lIns="0" rIns="0" tIns="0" bIns="0">
+            <a:spAutoFit/>
+          </a:bodyPr>
+          <a:lstStyle/>
+          <a:p/>
+          <a:p>
             <a:pPr algn="l">
               <a:spcAft>
-                <a:spcPts val="400"/>
+                <a:spcPts val="600"/>
               </a:spcAft>
             </a:pPr>
             <a:r>
-              <a:rPr sz="900" b="1">
+              <a:rPr sz="780" b="1">
                 <a:solidFill>
                   <a:srgbClr val="88664A"/>
                 </a:solidFill>
@@ -39433,22 +39923,365 @@
               <a:t>▪ </a:t>
             </a:r>
             <a:r>
-              <a:rPr sz="1000" b="1">
+              <a:rPr sz="880" b="1">
+                <a:solidFill>
+                  <a:srgbClr val="435D74"/>
+                </a:solidFill>
+                <a:latin typeface="Karla"/>
+              </a:rPr>
+              <a:t>Gradiente en Salida: </a:t>
+            </a:r>
+            <a:r>
+              <a:rPr sz="880">
+                <a:solidFill>
+                  <a:srgbClr val="222222"/>
+                </a:solidFill>
+                <a:latin typeface="Karla"/>
+              </a:rPr>
+              <a:t>δ_k = (y_k - t_k) · y_k(1 - y_k) mide la discrepancia respecto al objetivo.</a:t>
+            </a:r>
+          </a:p>
+          <a:p>
+            <a:pPr algn="l">
+              <a:spcAft>
+                <a:spcPts val="600"/>
+              </a:spcAft>
+            </a:pPr>
+            <a:r>
+              <a:rPr sz="780" b="1">
                 <a:solidFill>
                   <a:srgbClr val="88664A"/>
                 </a:solidFill>
                 <a:latin typeface="Karla"/>
               </a:rPr>
-              <a:t>Evasión de Mesetas: </a:t>
+              <a:t>▪ </a:t>
             </a:r>
             <a:r>
-              <a:rPr sz="1000">
+              <a:rPr sz="880" b="1">
+                <a:solidFill>
+                  <a:srgbClr val="435D74"/>
+                </a:solidFill>
+                <a:latin typeface="Karla"/>
+              </a:rPr>
+              <a:t>Retroceso a Ocultas: </a:t>
+            </a:r>
+            <a:r>
+              <a:rPr sz="880">
                 <a:solidFill>
                   <a:srgbClr val="222222"/>
                 </a:solidFill>
                 <a:latin typeface="Karla"/>
               </a:rPr>
-              <a:t>Acelera a lo largo de crestas con gradiente tenue, evitando estancamiento en saturación.</a:t>
+              <a:t>δ_j = [Σ_k w_kj δ_k] · a_j(1 - a_j) transmite la responsabilidad a capas previas.</a:t>
+            </a:r>
+          </a:p>
+          <a:p>
+            <a:pPr algn="l">
+              <a:spcAft>
+                <a:spcPts val="400"/>
+              </a:spcAft>
+            </a:pPr>
+            <a:r>
+              <a:rPr sz="780" b="1">
+                <a:solidFill>
+                  <a:srgbClr val="88664A"/>
+                </a:solidFill>
+                <a:latin typeface="Karla"/>
+              </a:rPr>
+              <a:t>▪ </a:t>
+            </a:r>
+            <a:r>
+              <a:rPr sz="880" b="1">
+                <a:solidFill>
+                  <a:srgbClr val="435D74"/>
+                </a:solidFill>
+                <a:latin typeface="Karla"/>
+              </a:rPr>
+              <a:t>Regla de la Cadena: </a:t>
+            </a:r>
+            <a:r>
+              <a:rPr sz="880">
+                <a:solidFill>
+                  <a:srgbClr val="222222"/>
+                </a:solidFill>
+                <a:latin typeface="Karla"/>
+              </a:rPr>
+              <a:t>∂E/∂w_kj = δ_k · a_j permite calcular gradientes exactos en tiempo lineal O(sinapsis).</a:t>
+            </a:r>
+          </a:p>
+        </p:txBody>
+      </p:sp>
+      <p:sp>
+        <p:nvSpPr>
+          <p:cNvPr id="13" name="Rounded Rectangle 12"/>
+          <p:cNvSpPr/>
+          <p:nvPr/>
+        </p:nvSpPr>
+        <p:spPr>
+          <a:xfrm>
+            <a:off x="5888736" y="1188720"/>
+            <a:ext cx="2331720" cy="3520440"/>
+          </a:xfrm>
+          <a:prstGeom prst="roundRect">
+            <a:avLst/>
+          </a:prstGeom>
+          <a:solidFill>
+            <a:srgbClr val="F9FAFB"/>
+          </a:solidFill>
+          <a:ln w="12700">
+            <a:solidFill>
+              <a:srgbClr val="DEE2E6"/>
+            </a:solidFill>
+          </a:ln>
+        </p:spPr>
+        <p:style>
+          <a:lnRef idx="1">
+            <a:schemeClr val="accent1"/>
+          </a:lnRef>
+          <a:fillRef idx="3">
+            <a:schemeClr val="accent1"/>
+          </a:fillRef>
+          <a:effectRef idx="2">
+            <a:schemeClr val="accent1"/>
+          </a:effectRef>
+          <a:fontRef idx="minor">
+            <a:schemeClr val="lt1"/>
+          </a:fontRef>
+        </p:style>
+        <p:txBody>
+          <a:bodyPr rtlCol="0" anchor="ctr"/>
+          <a:lstStyle/>
+          <a:p>
+            <a:pPr algn="ctr"/>
+          </a:p>
+        </p:txBody>
+      </p:sp>
+      <p:sp>
+        <p:nvSpPr>
+          <p:cNvPr id="14" name="Rounded Rectangle 13"/>
+          <p:cNvSpPr/>
+          <p:nvPr/>
+        </p:nvSpPr>
+        <p:spPr>
+          <a:xfrm>
+            <a:off x="5998464" y="1298448"/>
+            <a:ext cx="2112264" cy="731520"/>
+          </a:xfrm>
+          <a:prstGeom prst="roundRect">
+            <a:avLst/>
+          </a:prstGeom>
+          <a:solidFill>
+            <a:srgbClr val="EEF7F2"/>
+          </a:solidFill>
+          <a:ln w="12700">
+            <a:solidFill>
+              <a:srgbClr val="C6E6D2"/>
+            </a:solidFill>
+          </a:ln>
+        </p:spPr>
+        <p:style>
+          <a:lnRef idx="1">
+            <a:schemeClr val="accent1"/>
+          </a:lnRef>
+          <a:fillRef idx="3">
+            <a:schemeClr val="accent1"/>
+          </a:fillRef>
+          <a:effectRef idx="2">
+            <a:schemeClr val="accent1"/>
+          </a:effectRef>
+          <a:fontRef idx="minor">
+            <a:schemeClr val="lt1"/>
+          </a:fontRef>
+        </p:style>
+        <p:txBody>
+          <a:bodyPr rtlCol="0" anchor="ctr"/>
+          <a:lstStyle/>
+          <a:p>
+            <a:pPr algn="ctr"/>
+          </a:p>
+        </p:txBody>
+      </p:sp>
+      <p:sp>
+        <p:nvSpPr>
+          <p:cNvPr id="15" name="TextBox 14"/>
+          <p:cNvSpPr txBox="1"/>
+          <p:nvPr/>
+        </p:nvSpPr>
+        <p:spPr>
+          <a:xfrm>
+            <a:off x="6071616" y="1353312"/>
+            <a:ext cx="1965960" cy="621792"/>
+          </a:xfrm>
+          <a:prstGeom prst="rect">
+            <a:avLst/>
+          </a:prstGeom>
+          <a:noFill/>
+        </p:spPr>
+        <p:txBody>
+          <a:bodyPr wrap="square" lIns="0" rIns="0" tIns="0" bIns="0">
+            <a:spAutoFit/>
+          </a:bodyPr>
+          <a:lstStyle/>
+          <a:p>
+            <a:pPr algn="ctr"/>
+            <a:r>
+              <a:rPr sz="2100" b="1">
+                <a:solidFill>
+                  <a:srgbClr val="186638"/>
+                </a:solidFill>
+                <a:latin typeface="DM Serif Display"/>
+              </a:rPr>
+              <a:t>+β ΔW(t-1)</a:t>
+            </a:r>
+          </a:p>
+          <a:p>
+            <a:pPr algn="ctr"/>
+            <a:r>
+              <a:rPr sz="830" b="1">
+                <a:solidFill>
+                  <a:srgbClr val="435D74"/>
+                </a:solidFill>
+                <a:latin typeface="Karla"/>
+              </a:rPr>
+              <a:t>ACELERACIÓN INERCIAL</a:t>
+            </a:r>
+          </a:p>
+          <a:p>
+            <a:pPr algn="ctr"/>
+            <a:r>
+              <a:rPr sz="730">
+                <a:solidFill>
+                  <a:srgbClr val="5F6973"/>
+                </a:solidFill>
+                <a:latin typeface="Karla"/>
+              </a:rPr>
+              <a:t>Filtro Pasa-Bajos Dinámico</a:t>
+            </a:r>
+          </a:p>
+        </p:txBody>
+      </p:sp>
+      <p:sp>
+        <p:nvSpPr>
+          <p:cNvPr id="16" name="TextBox 15"/>
+          <p:cNvSpPr txBox="1"/>
+          <p:nvPr/>
+        </p:nvSpPr>
+        <p:spPr>
+          <a:xfrm>
+            <a:off x="6025896" y="2148840"/>
+            <a:ext cx="2057400" cy="2423160"/>
+          </a:xfrm>
+          <a:prstGeom prst="rect">
+            <a:avLst/>
+          </a:prstGeom>
+          <a:noFill/>
+        </p:spPr>
+        <p:txBody>
+          <a:bodyPr wrap="square" lIns="0" rIns="0" tIns="0" bIns="0">
+            <a:spAutoFit/>
+          </a:bodyPr>
+          <a:lstStyle/>
+          <a:p/>
+          <a:p>
+            <a:pPr algn="l">
+              <a:spcAft>
+                <a:spcPts val="600"/>
+              </a:spcAft>
+            </a:pPr>
+            <a:r>
+              <a:rPr sz="780" b="1">
+                <a:solidFill>
+                  <a:srgbClr val="88664A"/>
+                </a:solidFill>
+                <a:latin typeface="Karla"/>
+              </a:rPr>
+              <a:t>▪ </a:t>
+            </a:r>
+            <a:r>
+              <a:rPr sz="880" b="1">
+                <a:solidFill>
+                  <a:srgbClr val="88664A"/>
+                </a:solidFill>
+                <a:latin typeface="Karla"/>
+              </a:rPr>
+              <a:t>Delta Generalizada: </a:t>
+            </a:r>
+            <a:r>
+              <a:rPr sz="880">
+                <a:solidFill>
+                  <a:srgbClr val="222222"/>
+                </a:solidFill>
+                <a:latin typeface="Karla"/>
+              </a:rPr>
+              <a:t>ΔW^(t) = -η ∇E + β ΔW^(t-1) incorpora memoria inercial del paso anterior.</a:t>
+            </a:r>
+          </a:p>
+          <a:p>
+            <a:pPr algn="l">
+              <a:spcAft>
+                <a:spcPts val="600"/>
+              </a:spcAft>
+            </a:pPr>
+            <a:r>
+              <a:rPr sz="780" b="1">
+                <a:solidFill>
+                  <a:srgbClr val="88664A"/>
+                </a:solidFill>
+                <a:latin typeface="Karla"/>
+              </a:rPr>
+              <a:t>▪ </a:t>
+            </a:r>
+            <a:r>
+              <a:rPr sz="880" b="1">
+                <a:solidFill>
+                  <a:srgbClr val="88664A"/>
+                </a:solidFill>
+                <a:latin typeface="Karla"/>
+              </a:rPr>
+              <a:t>Filtro de Ruido: </a:t>
+            </a:r>
+            <a:r>
+              <a:rPr sz="880">
+                <a:solidFill>
+                  <a:srgbClr val="222222"/>
+                </a:solidFill>
+                <a:latin typeface="Karla"/>
+              </a:rPr>
+              <a:t>Cancela oscilaciones ortogonales en cañones estrechos promediando gradientes.</a:t>
+            </a:r>
+          </a:p>
+          <a:p>
+            <a:pPr algn="l">
+              <a:spcAft>
+                <a:spcPts val="400"/>
+              </a:spcAft>
+            </a:pPr>
+            <a:r>
+              <a:rPr sz="780" b="1">
+                <a:solidFill>
+                  <a:srgbClr val="88664A"/>
+                </a:solidFill>
+                <a:latin typeface="Karla"/>
+              </a:rPr>
+              <a:t>▪ </a:t>
+            </a:r>
+            <a:r>
+              <a:rPr sz="880" b="1">
+                <a:solidFill>
+                  <a:srgbClr val="88664A"/>
+                </a:solidFill>
+                <a:latin typeface="Karla"/>
+              </a:rPr>
+              <a:t>Garantía de Estabilidad: </a:t>
+            </a:r>
+            <a:r>
+              <a:rPr sz="880">
+                <a:solidFill>
+                  <a:srgbClr val="222222"/>
+                </a:solidFill>
+                <a:latin typeface="Karla"/>
+              </a:rPr>
+              <a:t>El factor β en [0.7, 0.9] previene divergencias explosivas cuando η es elevado.</a:t>
             </a:r>
           </a:p>
         </p:txBody>
@@ -39483,33 +40316,23 @@
         </p:nvSpPr>
         <p:spPr>
           <a:xfrm>
-            <a:off x="868680" y="347472"/>
-            <a:ext cx="7589520" cy="777240"/>
+            <a:off x="914400" y="502920"/>
+            <a:ext cx="4937760" cy="640080"/>
           </a:xfrm>
         </p:spPr>
         <p:txBody>
-          <a:bodyPr wrap="square" lIns="0" tIns="0" rIns="0" bIns="0"/>
+          <a:bodyPr wrap="square" lIns="0" rIns="0" tIns="0" bIns="0"/>
           <a:lstStyle/>
           <a:p>
             <a:pPr algn="l"/>
             <a:r>
-              <a:rPr sz="950" b="1">
-                <a:solidFill>
-                  <a:srgbClr val="88664A"/>
-                </a:solidFill>
-                <a:latin typeface="Karla"/>
-              </a:rPr>
-              <a:t>03. EXPERIMENTACIÓN CANÓNICA
-</a:t>
-            </a:r>
-            <a:r>
-              <a:rPr sz="2100" b="1">
+              <a:rPr sz="1750" b="1">
                 <a:solidFill>
                   <a:srgbClr val="0E2A47"/>
                 </a:solidFill>
                 <a:latin typeface="DM Serif Display"/>
               </a:rPr>
-              <a:t>Validación Canónica XOR y Aceleración Inercial β</a:t>
+              <a:t>Validación XOR: 100% de Acierto y Aceleración del 87.4% con β</a:t>
             </a:r>
           </a:p>
         </p:txBody>
@@ -39522,18 +40345,98 @@
         </p:nvSpPr>
         <p:spPr>
           <a:xfrm>
-            <a:off x="777240" y="1188720"/>
-            <a:ext cx="3977639" cy="3611880"/>
+            <a:off x="5897880" y="420624"/>
+            <a:ext cx="2286000" cy="256032"/>
           </a:xfrm>
           <a:prstGeom prst="roundRect">
             <a:avLst/>
           </a:prstGeom>
           <a:solidFill>
-            <a:srgbClr val="F8F9FA"/>
+            <a:srgbClr val="FCF8F2"/>
           </a:solidFill>
           <a:ln w="12700">
             <a:solidFill>
-              <a:srgbClr val="DADEE2"/>
+              <a:srgbClr val="EDDFCD"/>
+            </a:solidFill>
+          </a:ln>
+        </p:spPr>
+        <p:style>
+          <a:lnRef idx="1">
+            <a:schemeClr val="accent1"/>
+          </a:lnRef>
+          <a:fillRef idx="3">
+            <a:schemeClr val="accent1"/>
+          </a:fillRef>
+          <a:effectRef idx="2">
+            <a:schemeClr val="accent1"/>
+          </a:effectRef>
+          <a:fontRef idx="minor">
+            <a:schemeClr val="lt1"/>
+          </a:fontRef>
+        </p:style>
+        <p:txBody>
+          <a:bodyPr rtlCol="0" anchor="ctr"/>
+          <a:lstStyle/>
+          <a:p>
+            <a:pPr algn="ctr"/>
+          </a:p>
+        </p:txBody>
+      </p:sp>
+      <p:sp>
+        <p:nvSpPr>
+          <p:cNvPr id="4" name="TextBox 3"/>
+          <p:cNvSpPr txBox="1"/>
+          <p:nvPr/>
+        </p:nvSpPr>
+        <p:spPr>
+          <a:xfrm>
+            <a:off x="5897880" y="438912"/>
+            <a:ext cx="2286000" cy="219456"/>
+          </a:xfrm>
+          <a:prstGeom prst="rect">
+            <a:avLst/>
+          </a:prstGeom>
+          <a:noFill/>
+        </p:spPr>
+        <p:txBody>
+          <a:bodyPr wrap="square" lIns="0" rIns="0" tIns="0" bIns="0">
+            <a:spAutoFit/>
+          </a:bodyPr>
+          <a:lstStyle/>
+          <a:p>
+            <a:pPr algn="ctr"/>
+            <a:r>
+              <a:rPr sz="780" b="1">
+                <a:solidFill>
+                  <a:srgbClr val="7D542D"/>
+                </a:solidFill>
+                <a:latin typeface="Karla"/>
+              </a:rPr>
+              <a:t>03. EXPERIMENTACIÓN CANÓNICA</a:t>
+            </a:r>
+          </a:p>
+        </p:txBody>
+      </p:sp>
+      <p:sp>
+        <p:nvSpPr>
+          <p:cNvPr id="5" name="Rounded Rectangle 4"/>
+          <p:cNvSpPr/>
+          <p:nvPr/>
+        </p:nvSpPr>
+        <p:spPr>
+          <a:xfrm>
+            <a:off x="914400" y="1188720"/>
+            <a:ext cx="4389120" cy="3520440"/>
+          </a:xfrm>
+          <a:prstGeom prst="roundRect">
+            <a:avLst/>
+          </a:prstGeom>
+          <a:solidFill>
+            <a:srgbClr val="F9FAFB"/>
+          </a:solidFill>
+          <a:ln w="12700">
+            <a:solidFill>
+              <a:srgbClr val="DEE2E6"/>
             </a:solidFill>
           </a:ln>
         </p:spPr>
@@ -39561,7 +40464,7 @@
       </p:sp>
       <p:pic>
         <p:nvPicPr>
-          <p:cNvPr id="4" name="Picture 3" descr="fig3_superficie_3d_eta_beta.png"/>
+          <p:cNvPr id="6" name="Picture 5" descr="fig3_superficie_3d_eta_beta.png"/>
           <p:cNvPicPr>
             <a:picLocks noChangeAspect="1"/>
           </p:cNvPicPr>
@@ -39575,8 +40478,8 @@
         </p:blipFill>
         <p:spPr>
           <a:xfrm>
-            <a:off x="868680" y="1261872"/>
-            <a:ext cx="3794760" cy="2880360"/>
+            <a:off x="1005840" y="1261872"/>
+            <a:ext cx="4206240" cy="2926080"/>
           </a:xfrm>
           <a:prstGeom prst="rect">
             <a:avLst/>
@@ -39585,14 +40488,14 @@
       </p:pic>
       <p:sp>
         <p:nvSpPr>
-          <p:cNvPr id="5" name="TextBox 4"/>
+          <p:cNvPr id="7" name="TextBox 6"/>
           <p:cNvSpPr txBox="1"/>
           <p:nvPr/>
         </p:nvSpPr>
         <p:spPr>
           <a:xfrm>
-            <a:off x="868680" y="4224528"/>
-            <a:ext cx="3794760" cy="502920"/>
+            <a:off x="1005840" y="4279392"/>
+            <a:ext cx="4206240" cy="365760"/>
           </a:xfrm>
           <a:prstGeom prst="rect">
             <a:avLst/>
@@ -39606,38 +40509,38 @@
           <a:lstStyle/>
           <a:p>
             <a:pPr algn="ctr">
-              <a:defRPr sz="850">
+              <a:defRPr sz="800">
                 <a:solidFill>
-                  <a:srgbClr val="595959"/>
+                  <a:srgbClr val="5F6973"/>
                 </a:solidFill>
               </a:defRPr>
             </a:pPr>
             <a:r>
-              <a:t>Figura: Superficie de épocas de convergencia en el plano (η, β) para XOR.</a:t>
+              <a:t>Figura: Superficie empírica de épocas de convergencia en función de tasa η y momento β.</a:t>
             </a:r>
           </a:p>
         </p:txBody>
       </p:sp>
       <p:sp>
         <p:nvSpPr>
-          <p:cNvPr id="6" name="Rounded Rectangle 5"/>
+          <p:cNvPr id="8" name="Rounded Rectangle 7"/>
           <p:cNvSpPr/>
           <p:nvPr/>
         </p:nvSpPr>
         <p:spPr>
           <a:xfrm>
-            <a:off x="4892040" y="1188720"/>
-            <a:ext cx="3474720" cy="3611880"/>
+            <a:off x="5440680" y="1188720"/>
+            <a:ext cx="2788920" cy="3520440"/>
           </a:xfrm>
           <a:prstGeom prst="roundRect">
             <a:avLst/>
           </a:prstGeom>
           <a:solidFill>
-            <a:srgbClr val="F8F9FA"/>
+            <a:srgbClr val="F9FAFB"/>
           </a:solidFill>
           <a:ln w="12700">
             <a:solidFill>
-              <a:srgbClr val="DADEE2"/>
+              <a:srgbClr val="DEE2E6"/>
             </a:solidFill>
           </a:ln>
         </p:spPr>
@@ -39665,198 +40568,25 @@
       </p:sp>
       <p:sp>
         <p:nvSpPr>
-          <p:cNvPr id="7" name="TextBox 6"/>
-          <p:cNvSpPr txBox="1"/>
-          <p:nvPr/>
-        </p:nvSpPr>
-        <p:spPr>
-          <a:xfrm>
-            <a:off x="5029200" y="1280160"/>
-            <a:ext cx="3200400" cy="3429000"/>
-          </a:xfrm>
-          <a:prstGeom prst="rect">
-            <a:avLst/>
-          </a:prstGeom>
-          <a:noFill/>
-        </p:spPr>
-        <p:txBody>
-          <a:bodyPr wrap="square" lIns="0" rIns="0" tIns="0" bIns="0">
-            <a:spAutoFit/>
-          </a:bodyPr>
-          <a:lstStyle/>
-          <a:p>
-            <a:pPr>
-              <a:spcAft>
-                <a:spcPts val="600"/>
-              </a:spcAft>
-              <a:defRPr sz="1300" b="1">
-                <a:solidFill>
-                  <a:srgbClr val="0E2A47"/>
-                </a:solidFill>
-                <a:latin typeface="DM Serif Display"/>
-              </a:defRPr>
-            </a:pPr>
-            <a:r>
-              <a:t>Resultados Cuantitativos en XOR</a:t>
-            </a:r>
-          </a:p>
-          <a:p>
-            <a:pPr algn="l">
-              <a:spcAft>
-                <a:spcPts val="500"/>
-              </a:spcAft>
-            </a:pPr>
-            <a:r>
-              <a:rPr sz="880" b="1">
-                <a:solidFill>
-                  <a:srgbClr val="88664A"/>
-                </a:solidFill>
-                <a:latin typeface="Karla"/>
-              </a:rPr>
-              <a:t>▪ </a:t>
-            </a:r>
-            <a:r>
-              <a:rPr sz="980" b="1">
-                <a:solidFill>
-                  <a:srgbClr val="0E2A47"/>
-                </a:solidFill>
-                <a:latin typeface="Karla"/>
-              </a:rPr>
-              <a:t>Convergencia Absoluta: </a:t>
-            </a:r>
-            <a:r>
-              <a:rPr sz="980">
-                <a:solidFill>
-                  <a:srgbClr val="222222"/>
-                </a:solidFill>
-                <a:latin typeface="Karla"/>
-              </a:rPr>
-              <a:t>100.0% de exactitud en XOR-2 y XOR-3 (paridad de 3 bits), frente al colapso del Perceptrón monocapa (50.0%).</a:t>
-            </a:r>
-          </a:p>
-          <a:p>
-            <a:pPr algn="l">
-              <a:spcAft>
-                <a:spcPts val="500"/>
-              </a:spcAft>
-            </a:pPr>
-            <a:r>
-              <a:rPr sz="880" b="1">
-                <a:solidFill>
-                  <a:srgbClr val="88664A"/>
-                </a:solidFill>
-                <a:latin typeface="Karla"/>
-              </a:rPr>
-              <a:t>▪ </a:t>
-            </a:r>
-            <a:r>
-              <a:rPr sz="980" b="1">
-                <a:solidFill>
-                  <a:srgbClr val="0E2A47"/>
-                </a:solidFill>
-                <a:latin typeface="Karla"/>
-              </a:rPr>
-              <a:t>Aceleración del 87.4%: </a:t>
-            </a:r>
-            <a:r>
-              <a:rPr sz="980">
-                <a:solidFill>
-                  <a:srgbClr val="222222"/>
-                </a:solidFill>
-                <a:latin typeface="Karla"/>
-              </a:rPr>
-              <a:t>Con β = 0.9 frente a β = 0.0, las épocas requeridas caen drásticamente de 621 a 78 épocas (reducción masiva).</a:t>
-            </a:r>
-          </a:p>
-          <a:p>
-            <a:pPr algn="l">
-              <a:spcAft>
-                <a:spcPts val="500"/>
-              </a:spcAft>
-            </a:pPr>
-            <a:r>
-              <a:rPr sz="880" b="1">
-                <a:solidFill>
-                  <a:srgbClr val="88664A"/>
-                </a:solidFill>
-                <a:latin typeface="Karla"/>
-              </a:rPr>
-              <a:t>▪ </a:t>
-            </a:r>
-            <a:r>
-              <a:rPr sz="980" b="1">
-                <a:solidFill>
-                  <a:srgbClr val="0E2A47"/>
-                </a:solidFill>
-                <a:latin typeface="Karla"/>
-              </a:rPr>
-              <a:t>Óptimo Global Localizado: </a:t>
-            </a:r>
-            <a:r>
-              <a:rPr sz="980">
-                <a:solidFill>
-                  <a:srgbClr val="222222"/>
-                </a:solidFill>
-                <a:latin typeface="Karla"/>
-              </a:rPr>
-              <a:t>Punto mínimo alcanzado en η = 0.50 y β = 0.90 con MSE final &lt; 10⁻⁴ en tan solo 78 épocas.</a:t>
-            </a:r>
-          </a:p>
-          <a:p>
-            <a:pPr algn="l">
-              <a:spcAft>
-                <a:spcPts val="500"/>
-              </a:spcAft>
-            </a:pPr>
-            <a:r>
-              <a:rPr sz="880" b="1">
-                <a:solidFill>
-                  <a:srgbClr val="88664A"/>
-                </a:solidFill>
-                <a:latin typeface="Karla"/>
-              </a:rPr>
-              <a:t>▪ </a:t>
-            </a:r>
-            <a:r>
-              <a:rPr sz="980" b="1">
-                <a:solidFill>
-                  <a:srgbClr val="0E2A47"/>
-                </a:solidFill>
-                <a:latin typeface="Karla"/>
-              </a:rPr>
-              <a:t>Estabilidad Numérica: </a:t>
-            </a:r>
-            <a:r>
-              <a:rPr sz="980">
-                <a:solidFill>
-                  <a:srgbClr val="222222"/>
-                </a:solidFill>
-                <a:latin typeface="Karla"/>
-              </a:rPr>
-              <a:t>Para η &gt; 1.2 sin momento se observa inestabilidad oscilatoria; β actúa como amortiguador inercial.</a:t>
-            </a:r>
-          </a:p>
-        </p:txBody>
-      </p:sp>
-      <p:sp>
-        <p:nvSpPr>
-          <p:cNvPr id="8" name="Rounded Rectangle 7"/>
+          <p:cNvPr id="9" name="Rounded Rectangle 8"/>
           <p:cNvSpPr/>
           <p:nvPr/>
         </p:nvSpPr>
         <p:spPr>
           <a:xfrm>
-            <a:off x="5029200" y="3977639"/>
-            <a:ext cx="3200400" cy="713232"/>
+            <a:off x="5577840" y="1298448"/>
+            <a:ext cx="2514600" cy="749808"/>
           </a:xfrm>
           <a:prstGeom prst="roundRect">
             <a:avLst/>
           </a:prstGeom>
           <a:solidFill>
-            <a:srgbClr val="EEF6F0"/>
+            <a:srgbClr val="EEF7F2"/>
           </a:solidFill>
-          <a:ln>
-            <a:noFill/>
+          <a:ln w="12700">
+            <a:solidFill>
+              <a:srgbClr val="C6E6D2"/>
+            </a:solidFill>
           </a:ln>
         </p:spPr>
         <p:style>
@@ -39883,14 +40613,314 @@
       </p:sp>
       <p:sp>
         <p:nvSpPr>
-          <p:cNvPr id="9" name="TextBox 8"/>
+          <p:cNvPr id="10" name="TextBox 9"/>
           <p:cNvSpPr txBox="1"/>
           <p:nvPr/>
         </p:nvSpPr>
         <p:spPr>
           <a:xfrm>
-            <a:off x="5120640" y="4023360"/>
-            <a:ext cx="3017520" cy="621792"/>
+            <a:off x="5650992" y="1353312"/>
+            <a:ext cx="2368296" cy="640080"/>
+          </a:xfrm>
+          <a:prstGeom prst="rect">
+            <a:avLst/>
+          </a:prstGeom>
+          <a:noFill/>
+        </p:spPr>
+        <p:txBody>
+          <a:bodyPr wrap="square" lIns="0" rIns="0" tIns="0" bIns="0">
+            <a:spAutoFit/>
+          </a:bodyPr>
+          <a:lstStyle/>
+          <a:p>
+            <a:pPr algn="ctr"/>
+            <a:r>
+              <a:rPr sz="2100" b="1">
+                <a:solidFill>
+                  <a:srgbClr val="186638"/>
+                </a:solidFill>
+                <a:latin typeface="DM Serif Display"/>
+              </a:rPr>
+              <a:t>87.4%</a:t>
+            </a:r>
+          </a:p>
+          <a:p>
+            <a:pPr algn="ctr"/>
+            <a:r>
+              <a:rPr sz="830" b="1">
+                <a:solidFill>
+                  <a:srgbClr val="435D74"/>
+                </a:solidFill>
+                <a:latin typeface="Karla"/>
+              </a:rPr>
+              <a:t>ACELERACIÓN CON MOMENTO</a:t>
+            </a:r>
+          </a:p>
+          <a:p>
+            <a:pPr algn="ctr"/>
+            <a:r>
+              <a:rPr sz="730">
+                <a:solidFill>
+                  <a:srgbClr val="5F6973"/>
+                </a:solidFill>
+                <a:latin typeface="Karla"/>
+              </a:rPr>
+              <a:t>De 621 (β=0.0) a 78 épocas (β=0.9)</a:t>
+            </a:r>
+          </a:p>
+        </p:txBody>
+      </p:sp>
+      <p:sp>
+        <p:nvSpPr>
+          <p:cNvPr id="11" name="Rounded Rectangle 10"/>
+          <p:cNvSpPr/>
+          <p:nvPr/>
+        </p:nvSpPr>
+        <p:spPr>
+          <a:xfrm>
+            <a:off x="5577840" y="2139696"/>
+            <a:ext cx="2514600" cy="749808"/>
+          </a:xfrm>
+          <a:prstGeom prst="roundRect">
+            <a:avLst/>
+          </a:prstGeom>
+          <a:solidFill>
+            <a:srgbClr val="F0F5FA"/>
+          </a:solidFill>
+          <a:ln w="12700">
+            <a:solidFill>
+              <a:srgbClr val="CDDCEB"/>
+            </a:solidFill>
+          </a:ln>
+        </p:spPr>
+        <p:style>
+          <a:lnRef idx="1">
+            <a:schemeClr val="accent1"/>
+          </a:lnRef>
+          <a:fillRef idx="3">
+            <a:schemeClr val="accent1"/>
+          </a:fillRef>
+          <a:effectRef idx="2">
+            <a:schemeClr val="accent1"/>
+          </a:effectRef>
+          <a:fontRef idx="minor">
+            <a:schemeClr val="lt1"/>
+          </a:fontRef>
+        </p:style>
+        <p:txBody>
+          <a:bodyPr rtlCol="0" anchor="ctr"/>
+          <a:lstStyle/>
+          <a:p>
+            <a:pPr algn="ctr"/>
+          </a:p>
+        </p:txBody>
+      </p:sp>
+      <p:sp>
+        <p:nvSpPr>
+          <p:cNvPr id="12" name="TextBox 11"/>
+          <p:cNvSpPr txBox="1"/>
+          <p:nvPr/>
+        </p:nvSpPr>
+        <p:spPr>
+          <a:xfrm>
+            <a:off x="5650992" y="2194560"/>
+            <a:ext cx="2368296" cy="640080"/>
+          </a:xfrm>
+          <a:prstGeom prst="rect">
+            <a:avLst/>
+          </a:prstGeom>
+          <a:noFill/>
+        </p:spPr>
+        <p:txBody>
+          <a:bodyPr wrap="square" lIns="0" rIns="0" tIns="0" bIns="0">
+            <a:spAutoFit/>
+          </a:bodyPr>
+          <a:lstStyle/>
+          <a:p>
+            <a:pPr algn="ctr"/>
+            <a:r>
+              <a:rPr sz="2100" b="1">
+                <a:solidFill>
+                  <a:srgbClr val="144169"/>
+                </a:solidFill>
+                <a:latin typeface="DM Serif Display"/>
+              </a:rPr>
+              <a:t>100.0%</a:t>
+            </a:r>
+          </a:p>
+          <a:p>
+            <a:pPr algn="ctr"/>
+            <a:r>
+              <a:rPr sz="830" b="1">
+                <a:solidFill>
+                  <a:srgbClr val="435D74"/>
+                </a:solidFill>
+                <a:latin typeface="Karla"/>
+              </a:rPr>
+              <a:t>EXACTITUD XOR-2 Y XOR-3</a:t>
+            </a:r>
+          </a:p>
+          <a:p>
+            <a:pPr algn="ctr"/>
+            <a:r>
+              <a:rPr sz="730">
+                <a:solidFill>
+                  <a:srgbClr val="5F6973"/>
+                </a:solidFill>
+                <a:latin typeface="Karla"/>
+              </a:rPr>
+              <a:t>Convergencia global sin estancamiento</a:t>
+            </a:r>
+          </a:p>
+        </p:txBody>
+      </p:sp>
+      <p:sp>
+        <p:nvSpPr>
+          <p:cNvPr id="13" name="TextBox 12"/>
+          <p:cNvSpPr txBox="1"/>
+          <p:nvPr/>
+        </p:nvSpPr>
+        <p:spPr>
+          <a:xfrm>
+            <a:off x="5577840" y="2980944"/>
+            <a:ext cx="2514600" cy="1051560"/>
+          </a:xfrm>
+          <a:prstGeom prst="rect">
+            <a:avLst/>
+          </a:prstGeom>
+          <a:noFill/>
+        </p:spPr>
+        <p:txBody>
+          <a:bodyPr wrap="square" lIns="0" rIns="0" tIns="0" bIns="0">
+            <a:spAutoFit/>
+          </a:bodyPr>
+          <a:lstStyle/>
+          <a:p/>
+          <a:p>
+            <a:pPr algn="l">
+              <a:spcAft>
+                <a:spcPts val="400"/>
+              </a:spcAft>
+            </a:pPr>
+            <a:r>
+              <a:rPr sz="750" b="1">
+                <a:solidFill>
+                  <a:srgbClr val="88664A"/>
+                </a:solidFill>
+                <a:latin typeface="Karla"/>
+              </a:rPr>
+              <a:t>▪ </a:t>
+            </a:r>
+            <a:r>
+              <a:rPr sz="850" b="1">
+                <a:solidFill>
+                  <a:srgbClr val="0E2A47"/>
+                </a:solidFill>
+                <a:latin typeface="Karla"/>
+              </a:rPr>
+              <a:t>Óptimo Global: </a:t>
+            </a:r>
+            <a:r>
+              <a:rPr sz="850">
+                <a:solidFill>
+                  <a:srgbClr val="222222"/>
+                </a:solidFill>
+                <a:latin typeface="Karla"/>
+              </a:rPr>
+              <a:t>η = 0.50 y β = 0.90 minimizan las épocas con MSE final &lt; 10⁻⁴.</a:t>
+            </a:r>
+          </a:p>
+          <a:p>
+            <a:pPr algn="l">
+              <a:spcAft>
+                <a:spcPts val="400"/>
+              </a:spcAft>
+            </a:pPr>
+            <a:r>
+              <a:rPr sz="750" b="1">
+                <a:solidFill>
+                  <a:srgbClr val="88664A"/>
+                </a:solidFill>
+                <a:latin typeface="Karla"/>
+              </a:rPr>
+              <a:t>▪ </a:t>
+            </a:r>
+            <a:r>
+              <a:rPr sz="850" b="1">
+                <a:solidFill>
+                  <a:srgbClr val="0E2A47"/>
+                </a:solidFill>
+                <a:latin typeface="Karla"/>
+              </a:rPr>
+              <a:t>Estabilidad Numérica: </a:t>
+            </a:r>
+            <a:r>
+              <a:rPr sz="850">
+                <a:solidFill>
+                  <a:srgbClr val="222222"/>
+                </a:solidFill>
+                <a:latin typeface="Karla"/>
+              </a:rPr>
+              <a:t>Para η &gt; 1.2 sin momento hay oscilaciones; β estabiliza la trayectoria.</a:t>
+            </a:r>
+          </a:p>
+        </p:txBody>
+      </p:sp>
+      <p:sp>
+        <p:nvSpPr>
+          <p:cNvPr id="14" name="Rounded Rectangle 13"/>
+          <p:cNvSpPr/>
+          <p:nvPr/>
+        </p:nvSpPr>
+        <p:spPr>
+          <a:xfrm>
+            <a:off x="5577840" y="4069080"/>
+            <a:ext cx="2514600" cy="548640"/>
+          </a:xfrm>
+          <a:prstGeom prst="roundRect">
+            <a:avLst/>
+          </a:prstGeom>
+          <a:solidFill>
+            <a:srgbClr val="FCF8F2"/>
+          </a:solidFill>
+          <a:ln w="12700">
+            <a:solidFill>
+              <a:srgbClr val="EDDFCD"/>
+            </a:solidFill>
+          </a:ln>
+        </p:spPr>
+        <p:style>
+          <a:lnRef idx="1">
+            <a:schemeClr val="accent1"/>
+          </a:lnRef>
+          <a:fillRef idx="3">
+            <a:schemeClr val="accent1"/>
+          </a:fillRef>
+          <a:effectRef idx="2">
+            <a:schemeClr val="accent1"/>
+          </a:effectRef>
+          <a:fontRef idx="minor">
+            <a:schemeClr val="lt1"/>
+          </a:fontRef>
+        </p:style>
+        <p:txBody>
+          <a:bodyPr rtlCol="0" anchor="ctr"/>
+          <a:lstStyle/>
+          <a:p>
+            <a:pPr algn="ctr"/>
+          </a:p>
+        </p:txBody>
+      </p:sp>
+      <p:sp>
+        <p:nvSpPr>
+          <p:cNvPr id="15" name="TextBox 14"/>
+          <p:cNvSpPr txBox="1"/>
+          <p:nvPr/>
+        </p:nvSpPr>
+        <p:spPr>
+          <a:xfrm>
+            <a:off x="5650992" y="4096512"/>
+            <a:ext cx="2377440" cy="475488"/>
           </a:xfrm>
           <a:prstGeom prst="rect">
             <a:avLst/>
@@ -39904,14 +40934,14 @@
           <a:lstStyle/>
           <a:p>
             <a:pPr>
-              <a:defRPr sz="880" b="1">
+              <a:defRPr sz="800" b="1">
                 <a:solidFill>
-                  <a:srgbClr val="1E6937"/>
+                  <a:srgbClr val="7D542D"/>
                 </a:solidFill>
               </a:defRPr>
             </a:pPr>
             <a:r>
-              <a:t>✓ SÍNTESIS XOR: El momento inercial β provee casi un orden de magnitud de aceleración computacional conservando la fidelidad analítica.</a:t>
+              <a:t>✓ El momento inercial β provee casi 1 orden de magnitud de ahorro computacional.</a:t>
             </a:r>
           </a:p>
         </p:txBody>
@@ -39946,33 +40976,23 @@
         </p:nvSpPr>
         <p:spPr>
           <a:xfrm>
-            <a:off x="868680" y="347472"/>
-            <a:ext cx="7589520" cy="777240"/>
+            <a:off x="914400" y="502920"/>
+            <a:ext cx="4937760" cy="640080"/>
           </a:xfrm>
         </p:spPr>
         <p:txBody>
-          <a:bodyPr wrap="square" lIns="0" tIns="0" rIns="0" bIns="0"/>
+          <a:bodyPr wrap="square" lIns="0" rIns="0" tIns="0" bIns="0"/>
           <a:lstStyle/>
           <a:p>
             <a:pPr algn="l"/>
             <a:r>
-              <a:rPr sz="950" b="1">
-                <a:solidFill>
-                  <a:srgbClr val="88664A"/>
-                </a:solidFill>
-                <a:latin typeface="Karla"/>
-              </a:rPr>
-              <a:t>04. INTERPRETACIÓN GEOMÉTRICA
-</a:t>
-            </a:r>
-            <a:r>
-              <a:rPr sz="2100" b="1">
+              <a:rPr sz="1750" b="1">
                 <a:solidFill>
                   <a:srgbClr val="0E2A47"/>
                 </a:solidFill>
                 <a:latin typeface="DM Serif Display"/>
               </a:rPr>
-              <a:t>Demostración Geométrica en el Espacio Latente</a:t>
+              <a:t>Espacio Latente: Desenredo Topológico de Variedades No Lineales</a:t>
             </a:r>
           </a:p>
         </p:txBody>
@@ -39985,18 +41005,98 @@
         </p:nvSpPr>
         <p:spPr>
           <a:xfrm>
-            <a:off x="777240" y="1188720"/>
-            <a:ext cx="4892040" cy="3611880"/>
+            <a:off x="5897880" y="420624"/>
+            <a:ext cx="2286000" cy="256032"/>
           </a:xfrm>
           <a:prstGeom prst="roundRect">
             <a:avLst/>
           </a:prstGeom>
           <a:solidFill>
-            <a:srgbClr val="F8F9FA"/>
+            <a:srgbClr val="FCF8F2"/>
           </a:solidFill>
           <a:ln w="12700">
             <a:solidFill>
-              <a:srgbClr val="DADEE2"/>
+              <a:srgbClr val="EDDFCD"/>
+            </a:solidFill>
+          </a:ln>
+        </p:spPr>
+        <p:style>
+          <a:lnRef idx="1">
+            <a:schemeClr val="accent1"/>
+          </a:lnRef>
+          <a:fillRef idx="3">
+            <a:schemeClr val="accent1"/>
+          </a:fillRef>
+          <a:effectRef idx="2">
+            <a:schemeClr val="accent1"/>
+          </a:effectRef>
+          <a:fontRef idx="minor">
+            <a:schemeClr val="lt1"/>
+          </a:fontRef>
+        </p:style>
+        <p:txBody>
+          <a:bodyPr rtlCol="0" anchor="ctr"/>
+          <a:lstStyle/>
+          <a:p>
+            <a:pPr algn="ctr"/>
+          </a:p>
+        </p:txBody>
+      </p:sp>
+      <p:sp>
+        <p:nvSpPr>
+          <p:cNvPr id="4" name="TextBox 3"/>
+          <p:cNvSpPr txBox="1"/>
+          <p:nvPr/>
+        </p:nvSpPr>
+        <p:spPr>
+          <a:xfrm>
+            <a:off x="5897880" y="438912"/>
+            <a:ext cx="2286000" cy="219456"/>
+          </a:xfrm>
+          <a:prstGeom prst="rect">
+            <a:avLst/>
+          </a:prstGeom>
+          <a:noFill/>
+        </p:spPr>
+        <p:txBody>
+          <a:bodyPr wrap="square" lIns="0" rIns="0" tIns="0" bIns="0">
+            <a:spAutoFit/>
+          </a:bodyPr>
+          <a:lstStyle/>
+          <a:p>
+            <a:pPr algn="ctr"/>
+            <a:r>
+              <a:rPr sz="780" b="1">
+                <a:solidFill>
+                  <a:srgbClr val="7D542D"/>
+                </a:solidFill>
+                <a:latin typeface="Karla"/>
+              </a:rPr>
+              <a:t>04. INTERPRETACIÓN GEOMÉTRICA</a:t>
+            </a:r>
+          </a:p>
+        </p:txBody>
+      </p:sp>
+      <p:sp>
+        <p:nvSpPr>
+          <p:cNvPr id="5" name="Rounded Rectangle 4"/>
+          <p:cNvSpPr/>
+          <p:nvPr/>
+        </p:nvSpPr>
+        <p:spPr>
+          <a:xfrm>
+            <a:off x="914400" y="1188720"/>
+            <a:ext cx="4663440" cy="3520440"/>
+          </a:xfrm>
+          <a:prstGeom prst="roundRect">
+            <a:avLst/>
+          </a:prstGeom>
+          <a:solidFill>
+            <a:srgbClr val="F9FAFB"/>
+          </a:solidFill>
+          <a:ln w="12700">
+            <a:solidFill>
+              <a:srgbClr val="DEE2E6"/>
             </a:solidFill>
           </a:ln>
         </p:spPr>
@@ -40024,7 +41124,7 @@
       </p:sp>
       <p:pic>
         <p:nvPicPr>
-          <p:cNvPr id="4" name="Picture 3" descr="fig6_fronteras_decision_espacio_entrada_y_latente.png"/>
+          <p:cNvPr id="6" name="Picture 5" descr="fig6_fronteras_decision_espacio_entrada_y_latente.png"/>
           <p:cNvPicPr>
             <a:picLocks noChangeAspect="1"/>
           </p:cNvPicPr>
@@ -40038,8 +41138,8 @@
         </p:blipFill>
         <p:spPr>
           <a:xfrm>
-            <a:off x="868680" y="1261872"/>
-            <a:ext cx="4709160" cy="2880360"/>
+            <a:off x="1005840" y="1261872"/>
+            <a:ext cx="4480560" cy="2926080"/>
           </a:xfrm>
           <a:prstGeom prst="rect">
             <a:avLst/>
@@ -40048,14 +41148,14 @@
       </p:pic>
       <p:sp>
         <p:nvSpPr>
-          <p:cNvPr id="5" name="TextBox 4"/>
+          <p:cNvPr id="7" name="TextBox 6"/>
           <p:cNvSpPr txBox="1"/>
           <p:nvPr/>
         </p:nvSpPr>
         <p:spPr>
           <a:xfrm>
-            <a:off x="868680" y="4224528"/>
-            <a:ext cx="4709160" cy="502920"/>
+            <a:off x="1005840" y="4279392"/>
+            <a:ext cx="4480560" cy="365760"/>
           </a:xfrm>
           <a:prstGeom prst="rect">
             <a:avLst/>
@@ -40069,38 +41169,38 @@
           <a:lstStyle/>
           <a:p>
             <a:pPr algn="ctr">
-              <a:defRPr sz="850">
+              <a:defRPr sz="800">
                 <a:solidFill>
-                  <a:srgbClr val="595959"/>
+                  <a:srgbClr val="5F6973"/>
                 </a:solidFill>
               </a:defRPr>
             </a:pPr>
             <a:r>
-              <a:t>Figura: Frontera no lineal en ℝ² (izq.) vs. Desdoblamiento lineal en espacio latente ℋ (der.).</a:t>
+              <a:t>Figura: Frontera no lineal en espacio de entrada ℝ² vs. Desdoblamiento lineal en espacio latente ℋ.</a:t>
             </a:r>
           </a:p>
         </p:txBody>
       </p:sp>
       <p:sp>
         <p:nvSpPr>
-          <p:cNvPr id="6" name="Rounded Rectangle 5"/>
+          <p:cNvPr id="8" name="Rounded Rectangle 7"/>
           <p:cNvSpPr/>
           <p:nvPr/>
         </p:nvSpPr>
         <p:spPr>
           <a:xfrm>
-            <a:off x="5806440" y="1188720"/>
-            <a:ext cx="2560320" cy="3611880"/>
+            <a:off x="5715000" y="1188720"/>
+            <a:ext cx="2514600" cy="3520440"/>
           </a:xfrm>
           <a:prstGeom prst="roundRect">
             <a:avLst/>
           </a:prstGeom>
           <a:solidFill>
-            <a:srgbClr val="F8F9FA"/>
+            <a:srgbClr val="F9FAFB"/>
           </a:solidFill>
           <a:ln w="12700">
             <a:solidFill>
-              <a:srgbClr val="DADEE2"/>
+              <a:srgbClr val="DEE2E6"/>
             </a:solidFill>
           </a:ln>
         </p:spPr>
@@ -40128,198 +41228,25 @@
       </p:sp>
       <p:sp>
         <p:nvSpPr>
-          <p:cNvPr id="7" name="TextBox 6"/>
-          <p:cNvSpPr txBox="1"/>
-          <p:nvPr/>
-        </p:nvSpPr>
-        <p:spPr>
-          <a:xfrm>
-            <a:off x="5925312" y="1280160"/>
-            <a:ext cx="2322576" cy="3429000"/>
-          </a:xfrm>
-          <a:prstGeom prst="rect">
-            <a:avLst/>
-          </a:prstGeom>
-          <a:noFill/>
-        </p:spPr>
-        <p:txBody>
-          <a:bodyPr wrap="square" lIns="0" rIns="0" tIns="0" bIns="0">
-            <a:spAutoFit/>
-          </a:bodyPr>
-          <a:lstStyle/>
-          <a:p>
-            <a:pPr>
-              <a:spcAft>
-                <a:spcPts val="600"/>
-              </a:spcAft>
-              <a:defRPr sz="1300" b="1">
-                <a:solidFill>
-                  <a:srgbClr val="0E2A47"/>
-                </a:solidFill>
-                <a:latin typeface="DM Serif Display"/>
-              </a:defRPr>
-            </a:pPr>
-            <a:r>
-              <a:t>El Mecanismo de Desenredo</a:t>
-            </a:r>
-          </a:p>
-          <a:p>
-            <a:pPr algn="l">
-              <a:spcAft>
-                <a:spcPts val="400"/>
-              </a:spcAft>
-            </a:pPr>
-            <a:r>
-              <a:rPr sz="850" b="1">
-                <a:solidFill>
-                  <a:srgbClr val="88664A"/>
-                </a:solidFill>
-                <a:latin typeface="Karla"/>
-              </a:rPr>
-              <a:t>▪ </a:t>
-            </a:r>
-            <a:r>
-              <a:rPr sz="950" b="1">
-                <a:solidFill>
-                  <a:srgbClr val="0E2A47"/>
-                </a:solidFill>
-                <a:latin typeface="Karla"/>
-              </a:rPr>
-              <a:t>Proyección Phi: </a:t>
-            </a:r>
-            <a:r>
-              <a:rPr sz="950">
-                <a:solidFill>
-                  <a:srgbClr val="222222"/>
-                </a:solidFill>
-                <a:latin typeface="Karla"/>
-              </a:rPr>
-              <a:t>La capa oculta [h₁, h₂] mapea los vértices {0,1}² a [0,1]².</a:t>
-            </a:r>
-          </a:p>
-          <a:p>
-            <a:pPr algn="l">
-              <a:spcAft>
-                <a:spcPts val="400"/>
-              </a:spcAft>
-            </a:pPr>
-            <a:r>
-              <a:rPr sz="850" b="1">
-                <a:solidFill>
-                  <a:srgbClr val="88664A"/>
-                </a:solidFill>
-                <a:latin typeface="Karla"/>
-              </a:rPr>
-              <a:t>▪ </a:t>
-            </a:r>
-            <a:r>
-              <a:rPr sz="950" b="1">
-                <a:solidFill>
-                  <a:srgbClr val="0E2A47"/>
-                </a:solidFill>
-                <a:latin typeface="Karla"/>
-              </a:rPr>
-              <a:t>Colapso Topológico: </a:t>
-            </a:r>
-            <a:r>
-              <a:rPr sz="950">
-                <a:solidFill>
-                  <a:srgbClr val="222222"/>
-                </a:solidFill>
-                <a:latin typeface="Karla"/>
-              </a:rPr>
-              <a:t>(0,0) y (1,1) se proyectan en regiones contiguas; (0,1) y (1,0) quedan agrupados.</a:t>
-            </a:r>
-          </a:p>
-          <a:p>
-            <a:pPr algn="l">
-              <a:spcAft>
-                <a:spcPts val="400"/>
-              </a:spcAft>
-            </a:pPr>
-            <a:r>
-              <a:rPr sz="850" b="1">
-                <a:solidFill>
-                  <a:srgbClr val="88664A"/>
-                </a:solidFill>
-                <a:latin typeface="Karla"/>
-              </a:rPr>
-              <a:t>▪ </a:t>
-            </a:r>
-            <a:r>
-              <a:rPr sz="950" b="1">
-                <a:solidFill>
-                  <a:srgbClr val="0E2A47"/>
-                </a:solidFill>
-                <a:latin typeface="Karla"/>
-              </a:rPr>
-              <a:t>Separabilidad Lineal: </a:t>
-            </a:r>
-            <a:r>
-              <a:rPr sz="950">
-                <a:solidFill>
-                  <a:srgbClr val="222222"/>
-                </a:solidFill>
-                <a:latin typeface="Karla"/>
-              </a:rPr>
-              <a:t>En ℋ, un único hiperplano lineal separa perfectamente ambas clases.</a:t>
-            </a:r>
-          </a:p>
-          <a:p>
-            <a:pPr algn="l">
-              <a:spcAft>
-                <a:spcPts val="400"/>
-              </a:spcAft>
-            </a:pPr>
-            <a:r>
-              <a:rPr sz="850" b="1">
-                <a:solidFill>
-                  <a:srgbClr val="88664A"/>
-                </a:solidFill>
-                <a:latin typeface="Karla"/>
-              </a:rPr>
-              <a:t>▪ </a:t>
-            </a:r>
-            <a:r>
-              <a:rPr sz="950" b="1">
-                <a:solidFill>
-                  <a:srgbClr val="0E2A47"/>
-                </a:solidFill>
-                <a:latin typeface="Karla"/>
-              </a:rPr>
-              <a:t>Resolución de Paradoja: </a:t>
-            </a:r>
-            <a:r>
-              <a:rPr sz="950">
-                <a:solidFill>
-                  <a:srgbClr val="222222"/>
-                </a:solidFill>
-                <a:latin typeface="Karla"/>
-              </a:rPr>
-              <a:t>Lo no lineal en ℝ² se convierte en trivialmente lineal en el espacio latente.</a:t>
-            </a:r>
-          </a:p>
-        </p:txBody>
-      </p:sp>
-      <p:sp>
-        <p:nvSpPr>
-          <p:cNvPr id="8" name="Rounded Rectangle 7"/>
+          <p:cNvPr id="9" name="Rounded Rectangle 8"/>
           <p:cNvSpPr/>
           <p:nvPr/>
         </p:nvSpPr>
         <p:spPr>
           <a:xfrm>
-            <a:off x="5925312" y="3977639"/>
-            <a:ext cx="2322576" cy="713232"/>
+            <a:off x="5833872" y="1298448"/>
+            <a:ext cx="2286000" cy="749808"/>
           </a:xfrm>
           <a:prstGeom prst="roundRect">
             <a:avLst/>
           </a:prstGeom>
           <a:solidFill>
-            <a:srgbClr val="F5F1EC"/>
+            <a:srgbClr val="F0F5FA"/>
           </a:solidFill>
-          <a:ln>
-            <a:noFill/>
+          <a:ln w="12700">
+            <a:solidFill>
+              <a:srgbClr val="CDDCEB"/>
+            </a:solidFill>
           </a:ln>
         </p:spPr>
         <p:style>
@@ -40346,14 +41273,244 @@
       </p:sp>
       <p:sp>
         <p:nvSpPr>
-          <p:cNvPr id="9" name="TextBox 8"/>
+          <p:cNvPr id="10" name="TextBox 9"/>
           <p:cNvSpPr txBox="1"/>
           <p:nvPr/>
         </p:nvSpPr>
         <p:spPr>
           <a:xfrm>
-            <a:off x="5989320" y="4023360"/>
-            <a:ext cx="2194560" cy="621792"/>
+            <a:off x="5907024" y="1353312"/>
+            <a:ext cx="2139696" cy="640080"/>
+          </a:xfrm>
+          <a:prstGeom prst="rect">
+            <a:avLst/>
+          </a:prstGeom>
+          <a:noFill/>
+        </p:spPr>
+        <p:txBody>
+          <a:bodyPr wrap="square" lIns="0" rIns="0" tIns="0" bIns="0">
+            <a:spAutoFit/>
+          </a:bodyPr>
+          <a:lstStyle/>
+          <a:p>
+            <a:pPr algn="ctr"/>
+            <a:r>
+              <a:rPr sz="2100" b="1">
+                <a:solidFill>
+                  <a:srgbClr val="144169"/>
+                </a:solidFill>
+                <a:latin typeface="DM Serif Display"/>
+              </a:rPr>
+              <a:t>Φ: ℝ² → [0, 1]²</a:t>
+            </a:r>
+          </a:p>
+          <a:p>
+            <a:pPr algn="ctr"/>
+            <a:r>
+              <a:rPr sz="830" b="1">
+                <a:solidFill>
+                  <a:srgbClr val="435D74"/>
+                </a:solidFill>
+                <a:latin typeface="Karla"/>
+              </a:rPr>
+              <a:t>PROYECCIÓN LATENTE</a:t>
+            </a:r>
+          </a:p>
+          <a:p>
+            <a:pPr algn="ctr"/>
+            <a:r>
+              <a:rPr sz="730">
+                <a:solidFill>
+                  <a:srgbClr val="5F6973"/>
+                </a:solidFill>
+                <a:latin typeface="Karla"/>
+              </a:rPr>
+              <a:t>Deformación Continua</a:t>
+            </a:r>
+          </a:p>
+        </p:txBody>
+      </p:sp>
+      <p:sp>
+        <p:nvSpPr>
+          <p:cNvPr id="11" name="TextBox 10"/>
+          <p:cNvSpPr txBox="1"/>
+          <p:nvPr/>
+        </p:nvSpPr>
+        <p:spPr>
+          <a:xfrm>
+            <a:off x="5833872" y="2139696"/>
+            <a:ext cx="2286000" cy="1691640"/>
+          </a:xfrm>
+          <a:prstGeom prst="rect">
+            <a:avLst/>
+          </a:prstGeom>
+          <a:noFill/>
+        </p:spPr>
+        <p:txBody>
+          <a:bodyPr wrap="square" lIns="0" rIns="0" tIns="0" bIns="0">
+            <a:spAutoFit/>
+          </a:bodyPr>
+          <a:lstStyle/>
+          <a:p/>
+          <a:p>
+            <a:pPr algn="l">
+              <a:spcAft>
+                <a:spcPts val="400"/>
+              </a:spcAft>
+            </a:pPr>
+            <a:r>
+              <a:rPr sz="750" b="1">
+                <a:solidFill>
+                  <a:srgbClr val="88664A"/>
+                </a:solidFill>
+                <a:latin typeface="Karla"/>
+              </a:rPr>
+              <a:t>▪ </a:t>
+            </a:r>
+            <a:r>
+              <a:rPr sz="850" b="1">
+                <a:solidFill>
+                  <a:srgbClr val="0E2A47"/>
+                </a:solidFill>
+                <a:latin typeface="Karla"/>
+              </a:rPr>
+              <a:t>Colapso Coordenado: </a:t>
+            </a:r>
+            <a:r>
+              <a:rPr sz="850">
+                <a:solidFill>
+                  <a:srgbClr val="222222"/>
+                </a:solidFill>
+                <a:latin typeface="Karla"/>
+              </a:rPr>
+              <a:t>(0,0) y (1,1) se proyectan agrupados; (0,1) y (1,0) quedan en el extremo opuesto.</a:t>
+            </a:r>
+          </a:p>
+          <a:p>
+            <a:pPr algn="l">
+              <a:spcAft>
+                <a:spcPts val="400"/>
+              </a:spcAft>
+            </a:pPr>
+            <a:r>
+              <a:rPr sz="750" b="1">
+                <a:solidFill>
+                  <a:srgbClr val="88664A"/>
+                </a:solidFill>
+                <a:latin typeface="Karla"/>
+              </a:rPr>
+              <a:t>▪ </a:t>
+            </a:r>
+            <a:r>
+              <a:rPr sz="850" b="1">
+                <a:solidFill>
+                  <a:srgbClr val="0E2A47"/>
+                </a:solidFill>
+                <a:latin typeface="Karla"/>
+              </a:rPr>
+              <a:t>Separación Trivial: </a:t>
+            </a:r>
+            <a:r>
+              <a:rPr sz="850">
+                <a:solidFill>
+                  <a:srgbClr val="222222"/>
+                </a:solidFill>
+                <a:latin typeface="Karla"/>
+              </a:rPr>
+              <a:t>En el espacio latente ℋ, una recta w_h₁ h₁ + w_h₂ h₂ + b = 0 clasifica al 100%.</a:t>
+            </a:r>
+          </a:p>
+          <a:p>
+            <a:pPr algn="l">
+              <a:spcAft>
+                <a:spcPts val="400"/>
+              </a:spcAft>
+            </a:pPr>
+            <a:r>
+              <a:rPr sz="750" b="1">
+                <a:solidFill>
+                  <a:srgbClr val="88664A"/>
+                </a:solidFill>
+                <a:latin typeface="Karla"/>
+              </a:rPr>
+              <a:t>▪ </a:t>
+            </a:r>
+            <a:r>
+              <a:rPr sz="850" b="1">
+                <a:solidFill>
+                  <a:srgbClr val="0E2A47"/>
+                </a:solidFill>
+                <a:latin typeface="Karla"/>
+              </a:rPr>
+              <a:t>Resolución Teórica: </a:t>
+            </a:r>
+            <a:r>
+              <a:rPr sz="850">
+                <a:solidFill>
+                  <a:srgbClr val="222222"/>
+                </a:solidFill>
+                <a:latin typeface="Karla"/>
+              </a:rPr>
+              <a:t>Lo no lineal en ℝ² se torna elementalmente lineal tras la transformación oculta.</a:t>
+            </a:r>
+          </a:p>
+        </p:txBody>
+      </p:sp>
+      <p:sp>
+        <p:nvSpPr>
+          <p:cNvPr id="12" name="Rounded Rectangle 11"/>
+          <p:cNvSpPr/>
+          <p:nvPr/>
+        </p:nvSpPr>
+        <p:spPr>
+          <a:xfrm>
+            <a:off x="5833872" y="3913632"/>
+            <a:ext cx="2286000" cy="685800"/>
+          </a:xfrm>
+          <a:prstGeom prst="roundRect">
+            <a:avLst/>
+          </a:prstGeom>
+          <a:solidFill>
+            <a:srgbClr val="FCF8F2"/>
+          </a:solidFill>
+          <a:ln w="12700">
+            <a:solidFill>
+              <a:srgbClr val="EDDFCD"/>
+            </a:solidFill>
+          </a:ln>
+        </p:spPr>
+        <p:style>
+          <a:lnRef idx="1">
+            <a:schemeClr val="accent1"/>
+          </a:lnRef>
+          <a:fillRef idx="3">
+            <a:schemeClr val="accent1"/>
+          </a:fillRef>
+          <a:effectRef idx="2">
+            <a:schemeClr val="accent1"/>
+          </a:effectRef>
+          <a:fontRef idx="minor">
+            <a:schemeClr val="lt1"/>
+          </a:fontRef>
+        </p:style>
+        <p:txBody>
+          <a:bodyPr rtlCol="0" anchor="ctr"/>
+          <a:lstStyle/>
+          <a:p>
+            <a:pPr algn="ctr"/>
+          </a:p>
+        </p:txBody>
+      </p:sp>
+      <p:sp>
+        <p:nvSpPr>
+          <p:cNvPr id="13" name="TextBox 12"/>
+          <p:cNvSpPr txBox="1"/>
+          <p:nvPr/>
+        </p:nvSpPr>
+        <p:spPr>
+          <a:xfrm>
+            <a:off x="5897880" y="3959352"/>
+            <a:ext cx="2148840" cy="594360"/>
           </a:xfrm>
           <a:prstGeom prst="rect">
             <a:avLst/>
@@ -40369,12 +41526,12 @@
             <a:pPr>
               <a:defRPr sz="819" b="1">
                 <a:solidFill>
-                  <a:srgbClr val="735236"/>
+                  <a:srgbClr val="7D542D"/>
                 </a:solidFill>
               </a:defRPr>
             </a:pPr>
             <a:r>
-              <a:t>★ CLAVE TEÓRICA: Las capas intermedias no clasifican; aprenden representaciones donde el problema es separable.</a:t>
+              <a:t>★ Las capas ocultas aprenden representaciones donde el problema es separable.</a:t>
             </a:r>
           </a:p>
         </p:txBody>
@@ -40409,33 +41566,23 @@
         </p:nvSpPr>
         <p:spPr>
           <a:xfrm>
-            <a:off x="868680" y="347472"/>
-            <a:ext cx="7589520" cy="777240"/>
+            <a:off x="914400" y="502920"/>
+            <a:ext cx="4937760" cy="640080"/>
           </a:xfrm>
         </p:spPr>
         <p:txBody>
-          <a:bodyPr wrap="square" lIns="0" tIns="0" rIns="0" bIns="0"/>
+          <a:bodyPr wrap="square" lIns="0" rIns="0" tIns="0" bIns="0"/>
           <a:lstStyle/>
           <a:p>
             <a:pPr algn="l"/>
             <a:r>
-              <a:rPr sz="950" b="1">
-                <a:solidFill>
-                  <a:srgbClr val="88664A"/>
-                </a:solidFill>
-                <a:latin typeface="Karla"/>
-              </a:rPr>
-              <a:t>05. GENERALIZACIÓN MULTICLASE
-</a:t>
-            </a:r>
-            <a:r>
-              <a:rPr sz="2100" b="1">
+              <a:rPr sz="1750" b="1">
                 <a:solidFill>
                   <a:srgbClr val="0E2A47"/>
                 </a:solidFill>
                 <a:latin typeface="DM Serif Display"/>
               </a:rPr>
-              <a:t>Clasificación Multiclase: Benchmark Fisher's Iris</a:t>
+              <a:t>Fisher's Iris: 93.3% de Exactitud y Desarticulación de Solapamiento</a:t>
             </a:r>
           </a:p>
         </p:txBody>
@@ -40448,18 +41595,98 @@
         </p:nvSpPr>
         <p:spPr>
           <a:xfrm>
-            <a:off x="777240" y="1188720"/>
-            <a:ext cx="4754880" cy="3611880"/>
+            <a:off x="5897880" y="420624"/>
+            <a:ext cx="2286000" cy="256032"/>
           </a:xfrm>
           <a:prstGeom prst="roundRect">
             <a:avLst/>
           </a:prstGeom>
           <a:solidFill>
-            <a:srgbClr val="F8F9FA"/>
+            <a:srgbClr val="FCF8F2"/>
           </a:solidFill>
           <a:ln w="12700">
             <a:solidFill>
-              <a:srgbClr val="DADEE2"/>
+              <a:srgbClr val="EDDFCD"/>
+            </a:solidFill>
+          </a:ln>
+        </p:spPr>
+        <p:style>
+          <a:lnRef idx="1">
+            <a:schemeClr val="accent1"/>
+          </a:lnRef>
+          <a:fillRef idx="3">
+            <a:schemeClr val="accent1"/>
+          </a:fillRef>
+          <a:effectRef idx="2">
+            <a:schemeClr val="accent1"/>
+          </a:effectRef>
+          <a:fontRef idx="minor">
+            <a:schemeClr val="lt1"/>
+          </a:fontRef>
+        </p:style>
+        <p:txBody>
+          <a:bodyPr rtlCol="0" anchor="ctr"/>
+          <a:lstStyle/>
+          <a:p>
+            <a:pPr algn="ctr"/>
+          </a:p>
+        </p:txBody>
+      </p:sp>
+      <p:sp>
+        <p:nvSpPr>
+          <p:cNvPr id="4" name="TextBox 3"/>
+          <p:cNvSpPr txBox="1"/>
+          <p:nvPr/>
+        </p:nvSpPr>
+        <p:spPr>
+          <a:xfrm>
+            <a:off x="5897880" y="438912"/>
+            <a:ext cx="2286000" cy="219456"/>
+          </a:xfrm>
+          <a:prstGeom prst="rect">
+            <a:avLst/>
+          </a:prstGeom>
+          <a:noFill/>
+        </p:spPr>
+        <p:txBody>
+          <a:bodyPr wrap="square" lIns="0" rIns="0" tIns="0" bIns="0">
+            <a:spAutoFit/>
+          </a:bodyPr>
+          <a:lstStyle/>
+          <a:p>
+            <a:pPr algn="ctr"/>
+            <a:r>
+              <a:rPr sz="780" b="1">
+                <a:solidFill>
+                  <a:srgbClr val="7D542D"/>
+                </a:solidFill>
+                <a:latin typeface="Karla"/>
+              </a:rPr>
+              <a:t>05. GENERALIZACIÓN MULTICLASE</a:t>
+            </a:r>
+          </a:p>
+        </p:txBody>
+      </p:sp>
+      <p:sp>
+        <p:nvSpPr>
+          <p:cNvPr id="5" name="Rounded Rectangle 4"/>
+          <p:cNvSpPr/>
+          <p:nvPr/>
+        </p:nvSpPr>
+        <p:spPr>
+          <a:xfrm>
+            <a:off x="914400" y="1188720"/>
+            <a:ext cx="4663440" cy="3520440"/>
+          </a:xfrm>
+          <a:prstGeom prst="roundRect">
+            <a:avLst/>
+          </a:prstGeom>
+          <a:solidFill>
+            <a:srgbClr val="F9FAFB"/>
+          </a:solidFill>
+          <a:ln w="12700">
+            <a:solidFill>
+              <a:srgbClr val="DEE2E6"/>
             </a:solidFill>
           </a:ln>
         </p:spPr>
@@ -40487,7 +41714,7 @@
       </p:sp>
       <p:pic>
         <p:nvPicPr>
-          <p:cNvPr id="4" name="Picture 3" descr="iris_matriz_confusion_mejor_modelo.png"/>
+          <p:cNvPr id="6" name="Picture 5" descr="iris_matriz_confusion_mejor_modelo.png"/>
           <p:cNvPicPr>
             <a:picLocks noChangeAspect="1"/>
           </p:cNvPicPr>
@@ -40501,8 +41728,8 @@
         </p:blipFill>
         <p:spPr>
           <a:xfrm>
-            <a:off x="868680" y="1261872"/>
-            <a:ext cx="4572000" cy="2880360"/>
+            <a:off x="1005840" y="1261872"/>
+            <a:ext cx="4480560" cy="2926080"/>
           </a:xfrm>
           <a:prstGeom prst="rect">
             <a:avLst/>
@@ -40511,14 +41738,14 @@
       </p:pic>
       <p:sp>
         <p:nvSpPr>
-          <p:cNvPr id="5" name="TextBox 4"/>
+          <p:cNvPr id="7" name="TextBox 6"/>
           <p:cNvSpPr txBox="1"/>
           <p:nvPr/>
         </p:nvSpPr>
         <p:spPr>
           <a:xfrm>
-            <a:off x="868680" y="4224528"/>
-            <a:ext cx="4572000" cy="502920"/>
+            <a:off x="1005840" y="4279392"/>
+            <a:ext cx="4480560" cy="365760"/>
           </a:xfrm>
           <a:prstGeom prst="rect">
             <a:avLst/>
@@ -40532,38 +41759,38 @@
           <a:lstStyle/>
           <a:p>
             <a:pPr algn="ctr">
-              <a:defRPr sz="850">
+              <a:defRPr sz="800">
                 <a:solidFill>
-                  <a:srgbClr val="595959"/>
+                  <a:srgbClr val="5F6973"/>
                 </a:solidFill>
               </a:defRPr>
             </a:pPr>
             <a:r>
-              <a:t>Figura: Curvas de convergencia y matriz de confusión en test para modelo CONF-08.</a:t>
+              <a:t>Figura: Matriz de confusión en conjunto de prueba independiente (N=45) para CONF-08.</a:t>
             </a:r>
           </a:p>
         </p:txBody>
       </p:sp>
       <p:sp>
         <p:nvSpPr>
-          <p:cNvPr id="6" name="Rounded Rectangle 5"/>
+          <p:cNvPr id="8" name="Rounded Rectangle 7"/>
           <p:cNvSpPr/>
           <p:nvPr/>
         </p:nvSpPr>
         <p:spPr>
           <a:xfrm>
-            <a:off x="5669280" y="1188720"/>
-            <a:ext cx="2697480" cy="3611880"/>
+            <a:off x="5715000" y="1188720"/>
+            <a:ext cx="2514600" cy="3520440"/>
           </a:xfrm>
           <a:prstGeom prst="roundRect">
             <a:avLst/>
           </a:prstGeom>
           <a:solidFill>
-            <a:srgbClr val="F8F9FA"/>
+            <a:srgbClr val="F9FAFB"/>
           </a:solidFill>
           <a:ln w="12700">
             <a:solidFill>
-              <a:srgbClr val="DADEE2"/>
+              <a:srgbClr val="DEE2E6"/>
             </a:solidFill>
           </a:ln>
         </p:spPr>
@@ -40591,232 +41818,25 @@
       </p:sp>
       <p:sp>
         <p:nvSpPr>
-          <p:cNvPr id="7" name="TextBox 6"/>
-          <p:cNvSpPr txBox="1"/>
-          <p:nvPr/>
-        </p:nvSpPr>
-        <p:spPr>
-          <a:xfrm>
-            <a:off x="5779008" y="1280160"/>
-            <a:ext cx="2478024" cy="3429000"/>
-          </a:xfrm>
-          <a:prstGeom prst="rect">
-            <a:avLst/>
-          </a:prstGeom>
-          <a:noFill/>
-        </p:spPr>
-        <p:txBody>
-          <a:bodyPr wrap="square" lIns="0" rIns="0" tIns="0" bIns="0">
-            <a:spAutoFit/>
-          </a:bodyPr>
-          <a:lstStyle/>
-          <a:p>
-            <a:pPr>
-              <a:spcAft>
-                <a:spcPts val="600"/>
-              </a:spcAft>
-              <a:defRPr sz="1300" b="1">
-                <a:solidFill>
-                  <a:srgbClr val="0E2A47"/>
-                </a:solidFill>
-                <a:latin typeface="DM Serif Display"/>
-              </a:defRPr>
-            </a:pPr>
-            <a:r>
-              <a:t>Modelo Óptimo CONF-08</a:t>
-            </a:r>
-          </a:p>
-          <a:p>
-            <a:pPr algn="l">
-              <a:spcAft>
-                <a:spcPts val="400"/>
-              </a:spcAft>
-            </a:pPr>
-            <a:r>
-              <a:rPr sz="850" b="1">
-                <a:solidFill>
-                  <a:srgbClr val="88664A"/>
-                </a:solidFill>
-                <a:latin typeface="Karla"/>
-              </a:rPr>
-              <a:t>▪ </a:t>
-            </a:r>
-            <a:r>
-              <a:rPr sz="950" b="1">
-                <a:solidFill>
-                  <a:srgbClr val="0E2A47"/>
-                </a:solidFill>
-                <a:latin typeface="Karla"/>
-              </a:rPr>
-              <a:t>Topología: </a:t>
-            </a:r>
-            <a:r>
-              <a:rPr sz="950">
-                <a:solidFill>
-                  <a:srgbClr val="222222"/>
-                </a:solidFill>
-                <a:latin typeface="Karla"/>
-              </a:rPr>
-              <a:t>Red profunda [4, 8, 4, 3] con salida One-Hot multiclase.</a:t>
-            </a:r>
-          </a:p>
-          <a:p>
-            <a:pPr algn="l">
-              <a:spcAft>
-                <a:spcPts val="400"/>
-              </a:spcAft>
-            </a:pPr>
-            <a:r>
-              <a:rPr sz="850" b="1">
-                <a:solidFill>
-                  <a:srgbClr val="88664A"/>
-                </a:solidFill>
-                <a:latin typeface="Karla"/>
-              </a:rPr>
-              <a:t>▪ </a:t>
-            </a:r>
-            <a:r>
-              <a:rPr sz="950" b="1">
-                <a:solidFill>
-                  <a:srgbClr val="0E2A47"/>
-                </a:solidFill>
-                <a:latin typeface="Karla"/>
-              </a:rPr>
-              <a:t>Exactitud en Test: </a:t>
-            </a:r>
-            <a:r>
-              <a:rPr sz="950">
-                <a:solidFill>
-                  <a:srgbClr val="222222"/>
-                </a:solidFill>
-                <a:latin typeface="Karla"/>
-              </a:rPr>
-              <a:t>93.33% de exactitud global independiente.</a:t>
-            </a:r>
-          </a:p>
-          <a:p>
-            <a:pPr algn="l">
-              <a:spcAft>
-                <a:spcPts val="400"/>
-              </a:spcAft>
-            </a:pPr>
-            <a:r>
-              <a:rPr sz="850" b="1">
-                <a:solidFill>
-                  <a:srgbClr val="88664A"/>
-                </a:solidFill>
-                <a:latin typeface="Karla"/>
-              </a:rPr>
-              <a:t>▪ </a:t>
-            </a:r>
-            <a:r>
-              <a:rPr sz="950" b="1">
-                <a:solidFill>
-                  <a:srgbClr val="0E2A47"/>
-                </a:solidFill>
-                <a:latin typeface="Karla"/>
-              </a:rPr>
-              <a:t>F₁-Score Macro: </a:t>
-            </a:r>
-            <a:r>
-              <a:rPr sz="950">
-                <a:solidFill>
-                  <a:srgbClr val="222222"/>
-                </a:solidFill>
-                <a:latin typeface="Karla"/>
-              </a:rPr>
-              <a:t>0.9327 reflejando equilibrio perfecto entre clases.</a:t>
-            </a:r>
-          </a:p>
-          <a:p>
-            <a:pPr algn="l">
-              <a:spcAft>
-                <a:spcPts val="400"/>
-              </a:spcAft>
-            </a:pPr>
-            <a:r>
-              <a:rPr sz="850" b="1">
-                <a:solidFill>
-                  <a:srgbClr val="88664A"/>
-                </a:solidFill>
-                <a:latin typeface="Karla"/>
-              </a:rPr>
-              <a:t>▪ </a:t>
-            </a:r>
-            <a:r>
-              <a:rPr sz="950" b="1">
-                <a:solidFill>
-                  <a:srgbClr val="0E2A47"/>
-                </a:solidFill>
-                <a:latin typeface="Karla"/>
-              </a:rPr>
-              <a:t>Setosa: </a:t>
-            </a:r>
-            <a:r>
-              <a:rPr sz="950">
-                <a:solidFill>
-                  <a:srgbClr val="222222"/>
-                </a:solidFill>
-                <a:latin typeface="Karla"/>
-              </a:rPr>
-              <a:t>100.0% de precisión y recall (separabilidad lineal total).</a:t>
-            </a:r>
-          </a:p>
-          <a:p>
-            <a:pPr algn="l">
-              <a:spcAft>
-                <a:spcPts val="400"/>
-              </a:spcAft>
-            </a:pPr>
-            <a:r>
-              <a:rPr sz="850" b="1">
-                <a:solidFill>
-                  <a:srgbClr val="88664A"/>
-                </a:solidFill>
-                <a:latin typeface="Karla"/>
-              </a:rPr>
-              <a:t>▪ </a:t>
-            </a:r>
-            <a:r>
-              <a:rPr sz="950" b="1">
-                <a:solidFill>
-                  <a:srgbClr val="0E2A47"/>
-                </a:solidFill>
-                <a:latin typeface="Karla"/>
-              </a:rPr>
-              <a:t>Versicolor / Virginica: </a:t>
-            </a:r>
-            <a:r>
-              <a:rPr sz="950">
-                <a:solidFill>
-                  <a:srgbClr val="222222"/>
-                </a:solidFill>
-                <a:latin typeface="Karla"/>
-              </a:rPr>
-              <a:t>Frontera curva que desarticula el solapamiento morfológico.</a:t>
-            </a:r>
-          </a:p>
-        </p:txBody>
-      </p:sp>
-      <p:sp>
-        <p:nvSpPr>
-          <p:cNvPr id="8" name="Rounded Rectangle 7"/>
+          <p:cNvPr id="9" name="Rounded Rectangle 8"/>
           <p:cNvSpPr/>
           <p:nvPr/>
         </p:nvSpPr>
         <p:spPr>
           <a:xfrm>
-            <a:off x="5779008" y="3977639"/>
-            <a:ext cx="2478024" cy="713232"/>
+            <a:off x="5833872" y="1298448"/>
+            <a:ext cx="2286000" cy="749808"/>
           </a:xfrm>
           <a:prstGeom prst="roundRect">
             <a:avLst/>
           </a:prstGeom>
           <a:solidFill>
-            <a:srgbClr val="F5F3EF"/>
+            <a:srgbClr val="EEF7F2"/>
           </a:solidFill>
-          <a:ln>
-            <a:noFill/>
+          <a:ln w="12700">
+            <a:solidFill>
+              <a:srgbClr val="C6E6D2"/>
+            </a:solidFill>
           </a:ln>
         </p:spPr>
         <p:style>
@@ -40843,14 +41863,314 @@
       </p:sp>
       <p:sp>
         <p:nvSpPr>
-          <p:cNvPr id="9" name="TextBox 8"/>
+          <p:cNvPr id="10" name="TextBox 9"/>
           <p:cNvSpPr txBox="1"/>
           <p:nvPr/>
         </p:nvSpPr>
         <p:spPr>
           <a:xfrm>
-            <a:off x="5852160" y="4023360"/>
-            <a:ext cx="2331720" cy="621792"/>
+            <a:off x="5907024" y="1353312"/>
+            <a:ext cx="2139696" cy="640080"/>
+          </a:xfrm>
+          <a:prstGeom prst="rect">
+            <a:avLst/>
+          </a:prstGeom>
+          <a:noFill/>
+        </p:spPr>
+        <p:txBody>
+          <a:bodyPr wrap="square" lIns="0" rIns="0" tIns="0" bIns="0">
+            <a:spAutoFit/>
+          </a:bodyPr>
+          <a:lstStyle/>
+          <a:p>
+            <a:pPr algn="ctr"/>
+            <a:r>
+              <a:rPr sz="2100" b="1">
+                <a:solidFill>
+                  <a:srgbClr val="186638"/>
+                </a:solidFill>
+                <a:latin typeface="DM Serif Display"/>
+              </a:rPr>
+              <a:t>93.33%</a:t>
+            </a:r>
+          </a:p>
+          <a:p>
+            <a:pPr algn="ctr"/>
+            <a:r>
+              <a:rPr sz="830" b="1">
+                <a:solidFill>
+                  <a:srgbClr val="435D74"/>
+                </a:solidFill>
+                <a:latin typeface="Karla"/>
+              </a:rPr>
+              <a:t>EXACTITUD EN TEST</a:t>
+            </a:r>
+          </a:p>
+          <a:p>
+            <a:pPr algn="ctr"/>
+            <a:r>
+              <a:rPr sz="730">
+                <a:solidFill>
+                  <a:srgbClr val="5F6973"/>
+                </a:solidFill>
+                <a:latin typeface="Karla"/>
+              </a:rPr>
+              <a:t>F₁-Score Macro: 0.9327</a:t>
+            </a:r>
+          </a:p>
+        </p:txBody>
+      </p:sp>
+      <p:sp>
+        <p:nvSpPr>
+          <p:cNvPr id="11" name="Rounded Rectangle 10"/>
+          <p:cNvSpPr/>
+          <p:nvPr/>
+        </p:nvSpPr>
+        <p:spPr>
+          <a:xfrm>
+            <a:off x="5833872" y="2139696"/>
+            <a:ext cx="2286000" cy="749808"/>
+          </a:xfrm>
+          <a:prstGeom prst="roundRect">
+            <a:avLst/>
+          </a:prstGeom>
+          <a:solidFill>
+            <a:srgbClr val="F0F5FA"/>
+          </a:solidFill>
+          <a:ln w="12700">
+            <a:solidFill>
+              <a:srgbClr val="CDDCEB"/>
+            </a:solidFill>
+          </a:ln>
+        </p:spPr>
+        <p:style>
+          <a:lnRef idx="1">
+            <a:schemeClr val="accent1"/>
+          </a:lnRef>
+          <a:fillRef idx="3">
+            <a:schemeClr val="accent1"/>
+          </a:fillRef>
+          <a:effectRef idx="2">
+            <a:schemeClr val="accent1"/>
+          </a:effectRef>
+          <a:fontRef idx="minor">
+            <a:schemeClr val="lt1"/>
+          </a:fontRef>
+        </p:style>
+        <p:txBody>
+          <a:bodyPr rtlCol="0" anchor="ctr"/>
+          <a:lstStyle/>
+          <a:p>
+            <a:pPr algn="ctr"/>
+          </a:p>
+        </p:txBody>
+      </p:sp>
+      <p:sp>
+        <p:nvSpPr>
+          <p:cNvPr id="12" name="TextBox 11"/>
+          <p:cNvSpPr txBox="1"/>
+          <p:nvPr/>
+        </p:nvSpPr>
+        <p:spPr>
+          <a:xfrm>
+            <a:off x="5907024" y="2194560"/>
+            <a:ext cx="2139696" cy="640080"/>
+          </a:xfrm>
+          <a:prstGeom prst="rect">
+            <a:avLst/>
+          </a:prstGeom>
+          <a:noFill/>
+        </p:spPr>
+        <p:txBody>
+          <a:bodyPr wrap="square" lIns="0" rIns="0" tIns="0" bIns="0">
+            <a:spAutoFit/>
+          </a:bodyPr>
+          <a:lstStyle/>
+          <a:p>
+            <a:pPr algn="ctr"/>
+            <a:r>
+              <a:rPr sz="2100" b="1">
+                <a:solidFill>
+                  <a:srgbClr val="144169"/>
+                </a:solidFill>
+                <a:latin typeface="DM Serif Display"/>
+              </a:rPr>
+              <a:t>100.0%</a:t>
+            </a:r>
+          </a:p>
+          <a:p>
+            <a:pPr algn="ctr"/>
+            <a:r>
+              <a:rPr sz="830" b="1">
+                <a:solidFill>
+                  <a:srgbClr val="435D74"/>
+                </a:solidFill>
+                <a:latin typeface="Karla"/>
+              </a:rPr>
+              <a:t>SETOSA &amp; VERSICOLOR</a:t>
+            </a:r>
+          </a:p>
+          <a:p>
+            <a:pPr algn="ctr"/>
+            <a:r>
+              <a:rPr sz="730">
+                <a:solidFill>
+                  <a:srgbClr val="5F6973"/>
+                </a:solidFill>
+                <a:latin typeface="Karla"/>
+              </a:rPr>
+              <a:t>15/15 aciertos exactos por clase</a:t>
+            </a:r>
+          </a:p>
+        </p:txBody>
+      </p:sp>
+      <p:sp>
+        <p:nvSpPr>
+          <p:cNvPr id="13" name="TextBox 12"/>
+          <p:cNvSpPr txBox="1"/>
+          <p:nvPr/>
+        </p:nvSpPr>
+        <p:spPr>
+          <a:xfrm>
+            <a:off x="5833872" y="2980944"/>
+            <a:ext cx="2286000" cy="868680"/>
+          </a:xfrm>
+          <a:prstGeom prst="rect">
+            <a:avLst/>
+          </a:prstGeom>
+          <a:noFill/>
+        </p:spPr>
+        <p:txBody>
+          <a:bodyPr wrap="square" lIns="0" rIns="0" tIns="0" bIns="0">
+            <a:spAutoFit/>
+          </a:bodyPr>
+          <a:lstStyle/>
+          <a:p/>
+          <a:p>
+            <a:pPr algn="l">
+              <a:spcAft>
+                <a:spcPts val="400"/>
+              </a:spcAft>
+            </a:pPr>
+            <a:r>
+              <a:rPr sz="750" b="1">
+                <a:solidFill>
+                  <a:srgbClr val="88664A"/>
+                </a:solidFill>
+                <a:latin typeface="Karla"/>
+              </a:rPr>
+              <a:t>▪ </a:t>
+            </a:r>
+            <a:r>
+              <a:rPr sz="850" b="1">
+                <a:solidFill>
+                  <a:srgbClr val="0E2A47"/>
+                </a:solidFill>
+                <a:latin typeface="Karla"/>
+              </a:rPr>
+              <a:t>Topología: </a:t>
+            </a:r>
+            <a:r>
+              <a:rPr sz="850">
+                <a:solidFill>
+                  <a:srgbClr val="222222"/>
+                </a:solidFill>
+                <a:latin typeface="Karla"/>
+              </a:rPr>
+              <a:t>Red profunda [4, 8, 4, 3] con One-Hot y η = 0.10.</a:t>
+            </a:r>
+          </a:p>
+          <a:p>
+            <a:pPr algn="l">
+              <a:spcAft>
+                <a:spcPts val="400"/>
+              </a:spcAft>
+            </a:pPr>
+            <a:r>
+              <a:rPr sz="750" b="1">
+                <a:solidFill>
+                  <a:srgbClr val="88664A"/>
+                </a:solidFill>
+                <a:latin typeface="Karla"/>
+              </a:rPr>
+              <a:t>▪ </a:t>
+            </a:r>
+            <a:r>
+              <a:rPr sz="850" b="1">
+                <a:solidFill>
+                  <a:srgbClr val="0E2A47"/>
+                </a:solidFill>
+                <a:latin typeface="Karla"/>
+              </a:rPr>
+              <a:t>Virginica: </a:t>
+            </a:r>
+            <a:r>
+              <a:rPr sz="850">
+                <a:solidFill>
+                  <a:srgbClr val="222222"/>
+                </a:solidFill>
+                <a:latin typeface="Karla"/>
+              </a:rPr>
+              <a:t>12/15 aciertos (80%); 3 errores explicados por traslape morfológico real.</a:t>
+            </a:r>
+          </a:p>
+        </p:txBody>
+      </p:sp>
+      <p:sp>
+        <p:nvSpPr>
+          <p:cNvPr id="14" name="Rounded Rectangle 13"/>
+          <p:cNvSpPr/>
+          <p:nvPr/>
+        </p:nvSpPr>
+        <p:spPr>
+          <a:xfrm>
+            <a:off x="5833872" y="3931920"/>
+            <a:ext cx="2286000" cy="658368"/>
+          </a:xfrm>
+          <a:prstGeom prst="roundRect">
+            <a:avLst/>
+          </a:prstGeom>
+          <a:solidFill>
+            <a:srgbClr val="F4F6F8"/>
+          </a:solidFill>
+          <a:ln w="12700">
+            <a:solidFill>
+              <a:srgbClr val="DEE2E6"/>
+            </a:solidFill>
+          </a:ln>
+        </p:spPr>
+        <p:style>
+          <a:lnRef idx="1">
+            <a:schemeClr val="accent1"/>
+          </a:lnRef>
+          <a:fillRef idx="3">
+            <a:schemeClr val="accent1"/>
+          </a:fillRef>
+          <a:effectRef idx="2">
+            <a:schemeClr val="accent1"/>
+          </a:effectRef>
+          <a:fontRef idx="minor">
+            <a:schemeClr val="lt1"/>
+          </a:fontRef>
+        </p:style>
+        <p:txBody>
+          <a:bodyPr rtlCol="0" anchor="ctr"/>
+          <a:lstStyle/>
+          <a:p>
+            <a:pPr algn="ctr"/>
+          </a:p>
+        </p:txBody>
+      </p:sp>
+      <p:sp>
+        <p:nvSpPr>
+          <p:cNvPr id="15" name="TextBox 14"/>
+          <p:cNvSpPr txBox="1"/>
+          <p:nvPr/>
+        </p:nvSpPr>
+        <p:spPr>
+          <a:xfrm>
+            <a:off x="5897880" y="3968496"/>
+            <a:ext cx="2148840" cy="585216"/>
           </a:xfrm>
           <a:prstGeom prst="rect">
             <a:avLst/>
@@ -40864,22 +42184,14 @@
           <a:lstStyle/>
           <a:p>
             <a:pPr>
-              <a:defRPr sz="800">
+              <a:defRPr sz="780">
                 <a:solidFill>
                   <a:srgbClr val="0E2A47"/>
                 </a:solidFill>
               </a:defRPr>
             </a:pPr>
             <a:r>
-              <a:t>DESGLOSE DE ACIERTO EN TEST (N=45):</a:t>
-            </a:r>
-            <a:br/>
-            <a:r>
-              <a:t>• Setosa: 15/15 (100%)  • Versicolor: 15/15 (100%)</a:t>
-            </a:r>
-            <a:br/>
-            <a:r>
-              <a:t>• Virginica: 12/15 (80%) por traslape morfológico</a:t>
+              <a:t>✓ Las fronteras curvas del MLP desarticulan el solapamiento que colapsaba a los clasificadores lineales.</a:t>
             </a:r>
           </a:p>
         </p:txBody>
@@ -40914,33 +42226,23 @@
         </p:nvSpPr>
         <p:spPr>
           <a:xfrm>
-            <a:off x="868680" y="347472"/>
-            <a:ext cx="7589520" cy="777240"/>
+            <a:off x="914400" y="502920"/>
+            <a:ext cx="4937760" cy="640080"/>
           </a:xfrm>
         </p:spPr>
         <p:txBody>
-          <a:bodyPr wrap="square" lIns="0" tIns="0" rIns="0" bIns="0"/>
+          <a:bodyPr wrap="square" lIns="0" rIns="0" tIns="0" bIns="0"/>
           <a:lstStyle/>
           <a:p>
             <a:pPr algn="l"/>
             <a:r>
-              <a:rPr sz="950" b="1">
-                <a:solidFill>
-                  <a:srgbClr val="88664A"/>
-                </a:solidFill>
-                <a:latin typeface="Karla"/>
-              </a:rPr>
-              <a:t>06. ROBUSTEZ Y BENCHMARKS REALES
-</a:t>
-            </a:r>
-            <a:r>
-              <a:rPr sz="2100" b="1">
+              <a:rPr sz="1750" b="1">
                 <a:solidFill>
                   <a:srgbClr val="0E2A47"/>
                 </a:solidFill>
                 <a:latin typeface="DM Serif Display"/>
               </a:rPr>
-              <a:t>Generalización Multivariable y Resiliencia a Particiones</a:t>
+              <a:t>Robustez Empírica: Desempeño Resiliente en 4 Datasets Reales</a:t>
             </a:r>
           </a:p>
         </p:txBody>
@@ -40953,18 +42255,98 @@
         </p:nvSpPr>
         <p:spPr>
           <a:xfrm>
-            <a:off x="777240" y="1188720"/>
-            <a:ext cx="4754880" cy="3611880"/>
+            <a:off x="5897880" y="420624"/>
+            <a:ext cx="2286000" cy="256032"/>
           </a:xfrm>
           <a:prstGeom prst="roundRect">
             <a:avLst/>
           </a:prstGeom>
           <a:solidFill>
-            <a:srgbClr val="F8F9FA"/>
+            <a:srgbClr val="FCF8F2"/>
           </a:solidFill>
           <a:ln w="12700">
             <a:solidFill>
-              <a:srgbClr val="DADEE2"/>
+              <a:srgbClr val="EDDFCD"/>
+            </a:solidFill>
+          </a:ln>
+        </p:spPr>
+        <p:style>
+          <a:lnRef idx="1">
+            <a:schemeClr val="accent1"/>
+          </a:lnRef>
+          <a:fillRef idx="3">
+            <a:schemeClr val="accent1"/>
+          </a:fillRef>
+          <a:effectRef idx="2">
+            <a:schemeClr val="accent1"/>
+          </a:effectRef>
+          <a:fontRef idx="minor">
+            <a:schemeClr val="lt1"/>
+          </a:fontRef>
+        </p:style>
+        <p:txBody>
+          <a:bodyPr rtlCol="0" anchor="ctr"/>
+          <a:lstStyle/>
+          <a:p>
+            <a:pPr algn="ctr"/>
+          </a:p>
+        </p:txBody>
+      </p:sp>
+      <p:sp>
+        <p:nvSpPr>
+          <p:cNvPr id="4" name="TextBox 3"/>
+          <p:cNvSpPr txBox="1"/>
+          <p:nvPr/>
+        </p:nvSpPr>
+        <p:spPr>
+          <a:xfrm>
+            <a:off x="5897880" y="438912"/>
+            <a:ext cx="2286000" cy="219456"/>
+          </a:xfrm>
+          <a:prstGeom prst="rect">
+            <a:avLst/>
+          </a:prstGeom>
+          <a:noFill/>
+        </p:spPr>
+        <p:txBody>
+          <a:bodyPr wrap="square" lIns="0" rIns="0" tIns="0" bIns="0">
+            <a:spAutoFit/>
+          </a:bodyPr>
+          <a:lstStyle/>
+          <a:p>
+            <a:pPr algn="ctr"/>
+            <a:r>
+              <a:rPr sz="780" b="1">
+                <a:solidFill>
+                  <a:srgbClr val="7D542D"/>
+                </a:solidFill>
+                <a:latin typeface="Karla"/>
+              </a:rPr>
+              <a:t>06. ROBUSTEZ Y BENCHMARKS REALES</a:t>
+            </a:r>
+          </a:p>
+        </p:txBody>
+      </p:sp>
+      <p:sp>
+        <p:nvSpPr>
+          <p:cNvPr id="5" name="Rounded Rectangle 4"/>
+          <p:cNvSpPr/>
+          <p:nvPr/>
+        </p:nvSpPr>
+        <p:spPr>
+          <a:xfrm>
+            <a:off x="914400" y="1188720"/>
+            <a:ext cx="4663440" cy="3520440"/>
+          </a:xfrm>
+          <a:prstGeom prst="roundRect">
+            <a:avLst/>
+          </a:prstGeom>
+          <a:solidFill>
+            <a:srgbClr val="F9FAFB"/>
+          </a:solidFill>
+          <a:ln w="12700">
+            <a:solidFill>
+              <a:srgbClr val="DEE2E6"/>
             </a:solidFill>
           </a:ln>
         </p:spPr>
@@ -40992,7 +42374,7 @@
       </p:sp>
       <p:pic>
         <p:nvPicPr>
-          <p:cNvPr id="4" name="Picture 3" descr="particiones_comparativa_global_accuracy.png"/>
+          <p:cNvPr id="6" name="Picture 5" descr="particiones_comparativa_global_accuracy.png"/>
           <p:cNvPicPr>
             <a:picLocks noChangeAspect="1"/>
           </p:cNvPicPr>
@@ -41006,8 +42388,8 @@
         </p:blipFill>
         <p:spPr>
           <a:xfrm>
-            <a:off x="868680" y="1261872"/>
-            <a:ext cx="4572000" cy="2880360"/>
+            <a:off x="1005840" y="1261872"/>
+            <a:ext cx="4480560" cy="2926080"/>
           </a:xfrm>
           <a:prstGeom prst="rect">
             <a:avLst/>
@@ -41016,14 +42398,14 @@
       </p:pic>
       <p:sp>
         <p:nvSpPr>
-          <p:cNvPr id="5" name="TextBox 4"/>
+          <p:cNvPr id="7" name="TextBox 6"/>
           <p:cNvSpPr txBox="1"/>
           <p:nvPr/>
         </p:nvSpPr>
         <p:spPr>
           <a:xfrm>
-            <a:off x="868680" y="4224528"/>
-            <a:ext cx="4572000" cy="502920"/>
+            <a:off x="1005840" y="4279392"/>
+            <a:ext cx="4480560" cy="365760"/>
           </a:xfrm>
           <a:prstGeom prst="rect">
             <a:avLst/>
@@ -41037,38 +42419,38 @@
           <a:lstStyle/>
           <a:p>
             <a:pPr algn="ctr">
-              <a:defRPr sz="850">
+              <a:defRPr sz="800">
                 <a:solidFill>
-                  <a:srgbClr val="595959"/>
+                  <a:srgbClr val="5F6973"/>
                 </a:solidFill>
               </a:defRPr>
             </a:pPr>
             <a:r>
-              <a:t>Figura: Exactitud en test a través de 4 particiones estratificadas (60-40 a 90-10).</a:t>
+              <a:t>Figura: Exactitud de generalización a través de 4 particiones estratificadas (60-40 a 90-10).</a:t>
             </a:r>
           </a:p>
         </p:txBody>
       </p:sp>
       <p:sp>
         <p:nvSpPr>
-          <p:cNvPr id="6" name="Rounded Rectangle 5"/>
+          <p:cNvPr id="8" name="Rounded Rectangle 7"/>
           <p:cNvSpPr/>
           <p:nvPr/>
         </p:nvSpPr>
         <p:spPr>
           <a:xfrm>
-            <a:off x="5669280" y="1188720"/>
-            <a:ext cx="2697480" cy="3611880"/>
+            <a:off x="5715000" y="1188720"/>
+            <a:ext cx="2514600" cy="3520440"/>
           </a:xfrm>
           <a:prstGeom prst="roundRect">
             <a:avLst/>
           </a:prstGeom>
           <a:solidFill>
-            <a:srgbClr val="F8F9FA"/>
+            <a:srgbClr val="F9FAFB"/>
           </a:solidFill>
           <a:ln w="12700">
             <a:solidFill>
-              <a:srgbClr val="DADEE2"/>
+              <a:srgbClr val="DEE2E6"/>
             </a:solidFill>
           </a:ln>
         </p:spPr>
@@ -41096,198 +42478,25 @@
       </p:sp>
       <p:sp>
         <p:nvSpPr>
-          <p:cNvPr id="7" name="TextBox 6"/>
-          <p:cNvSpPr txBox="1"/>
-          <p:nvPr/>
-        </p:nvSpPr>
-        <p:spPr>
-          <a:xfrm>
-            <a:off x="5779008" y="1280160"/>
-            <a:ext cx="2478024" cy="3429000"/>
-          </a:xfrm>
-          <a:prstGeom prst="rect">
-            <a:avLst/>
-          </a:prstGeom>
-          <a:noFill/>
-        </p:spPr>
-        <p:txBody>
-          <a:bodyPr wrap="square" lIns="0" rIns="0" tIns="0" bIns="0">
-            <a:spAutoFit/>
-          </a:bodyPr>
-          <a:lstStyle/>
-          <a:p>
-            <a:pPr>
-              <a:spcAft>
-                <a:spcPts val="600"/>
-              </a:spcAft>
-              <a:defRPr sz="1300" b="1">
-                <a:solidFill>
-                  <a:srgbClr val="0E2A47"/>
-                </a:solidFill>
-                <a:latin typeface="DM Serif Display"/>
-              </a:defRPr>
-            </a:pPr>
-            <a:r>
-              <a:t>Rendimiento por Dataset</a:t>
-            </a:r>
-          </a:p>
-          <a:p>
-            <a:pPr algn="l">
-              <a:spcAft>
-                <a:spcPts val="400"/>
-              </a:spcAft>
-            </a:pPr>
-            <a:r>
-              <a:rPr sz="850" b="1">
-                <a:solidFill>
-                  <a:srgbClr val="88664A"/>
-                </a:solidFill>
-                <a:latin typeface="Karla"/>
-              </a:rPr>
-              <a:t>▪ </a:t>
-            </a:r>
-            <a:r>
-              <a:rPr sz="950" b="1">
-                <a:solidFill>
-                  <a:srgbClr val="0E2A47"/>
-                </a:solidFill>
-                <a:latin typeface="Karla"/>
-              </a:rPr>
-              <a:t>Banknote: </a:t>
-            </a:r>
-            <a:r>
-              <a:rPr sz="950">
-                <a:solidFill>
-                  <a:srgbClr val="222222"/>
-                </a:solidFill>
-                <a:latin typeface="Karla"/>
-              </a:rPr>
-              <a:t>100.0% de exactitud (80-20). Clasificación perfecta de billetes auténticos vs. falsos.</a:t>
-            </a:r>
-          </a:p>
-          <a:p>
-            <a:pPr algn="l">
-              <a:spcAft>
-                <a:spcPts val="400"/>
-              </a:spcAft>
-            </a:pPr>
-            <a:r>
-              <a:rPr sz="850" b="1">
-                <a:solidFill>
-                  <a:srgbClr val="88664A"/>
-                </a:solidFill>
-                <a:latin typeface="Karla"/>
-              </a:rPr>
-              <a:t>▪ </a:t>
-            </a:r>
-            <a:r>
-              <a:rPr sz="950" b="1">
-                <a:solidFill>
-                  <a:srgbClr val="0E2A47"/>
-                </a:solidFill>
-                <a:latin typeface="Karla"/>
-              </a:rPr>
-              <a:t>Breast Cancer: </a:t>
-            </a:r>
-            <a:r>
-              <a:rPr sz="950">
-                <a:solidFill>
-                  <a:srgbClr val="222222"/>
-                </a:solidFill>
-                <a:latin typeface="Karla"/>
-              </a:rPr>
-              <a:t>98.25% exactitud (F₁ = 0.9859). Mínimo clínico de falsos negativos en diagnóstico.</a:t>
-            </a:r>
-          </a:p>
-          <a:p>
-            <a:pPr algn="l">
-              <a:spcAft>
-                <a:spcPts val="400"/>
-              </a:spcAft>
-            </a:pPr>
-            <a:r>
-              <a:rPr sz="850" b="1">
-                <a:solidFill>
-                  <a:srgbClr val="88664A"/>
-                </a:solidFill>
-                <a:latin typeface="Karla"/>
-              </a:rPr>
-              <a:t>▪ </a:t>
-            </a:r>
-            <a:r>
-              <a:rPr sz="950" b="1">
-                <a:solidFill>
-                  <a:srgbClr val="0E2A47"/>
-                </a:solidFill>
-                <a:latin typeface="Karla"/>
-              </a:rPr>
-              <a:t>Wine: </a:t>
-            </a:r>
-            <a:r>
-              <a:rPr sz="950">
-                <a:solidFill>
-                  <a:srgbClr val="222222"/>
-                </a:solidFill>
-                <a:latin typeface="Karla"/>
-              </a:rPr>
-              <a:t>100.0% exactitud (80-20) en clasificación de cepas químicas complejas.</a:t>
-            </a:r>
-          </a:p>
-          <a:p>
-            <a:pPr algn="l">
-              <a:spcAft>
-                <a:spcPts val="400"/>
-              </a:spcAft>
-            </a:pPr>
-            <a:r>
-              <a:rPr sz="850" b="1">
-                <a:solidFill>
-                  <a:srgbClr val="88664A"/>
-                </a:solidFill>
-                <a:latin typeface="Karla"/>
-              </a:rPr>
-              <a:t>▪ </a:t>
-            </a:r>
-            <a:r>
-              <a:rPr sz="950" b="1">
-                <a:solidFill>
-                  <a:srgbClr val="0E2A47"/>
-                </a:solidFill>
-                <a:latin typeface="Karla"/>
-              </a:rPr>
-              <a:t>Cero Fuga (Leakage): </a:t>
-            </a:r>
-            <a:r>
-              <a:rPr sz="950">
-                <a:solidFill>
-                  <a:srgbClr val="222222"/>
-                </a:solidFill>
-                <a:latin typeface="Karla"/>
-              </a:rPr>
-              <a:t>Estandarización z-score calculada únicamente sobre entrenamiento en cada split.</a:t>
-            </a:r>
-          </a:p>
-        </p:txBody>
-      </p:sp>
-      <p:sp>
-        <p:nvSpPr>
-          <p:cNvPr id="8" name="Rounded Rectangle 7"/>
+          <p:cNvPr id="9" name="Rounded Rectangle 8"/>
           <p:cNvSpPr/>
           <p:nvPr/>
         </p:nvSpPr>
         <p:spPr>
           <a:xfrm>
-            <a:off x="5779008" y="3977639"/>
-            <a:ext cx="2478024" cy="713232"/>
+            <a:off x="5833872" y="1298448"/>
+            <a:ext cx="2286000" cy="658368"/>
           </a:xfrm>
           <a:prstGeom prst="roundRect">
             <a:avLst/>
           </a:prstGeom>
           <a:solidFill>
-            <a:srgbClr val="EEF6F0"/>
+            <a:srgbClr val="EEF7F2"/>
           </a:solidFill>
-          <a:ln>
-            <a:noFill/>
+          <a:ln w="12700">
+            <a:solidFill>
+              <a:srgbClr val="C6E6D2"/>
+            </a:solidFill>
           </a:ln>
         </p:spPr>
         <p:style>
@@ -41314,14 +42523,314 @@
       </p:sp>
       <p:sp>
         <p:nvSpPr>
-          <p:cNvPr id="9" name="TextBox 8"/>
+          <p:cNvPr id="10" name="TextBox 9"/>
           <p:cNvSpPr txBox="1"/>
           <p:nvPr/>
         </p:nvSpPr>
         <p:spPr>
           <a:xfrm>
-            <a:off x="5852160" y="4023360"/>
-            <a:ext cx="2331720" cy="621792"/>
+            <a:off x="5907024" y="1353312"/>
+            <a:ext cx="2139696" cy="548640"/>
+          </a:xfrm>
+          <a:prstGeom prst="rect">
+            <a:avLst/>
+          </a:prstGeom>
+          <a:noFill/>
+        </p:spPr>
+        <p:txBody>
+          <a:bodyPr wrap="square" lIns="0" rIns="0" tIns="0" bIns="0">
+            <a:spAutoFit/>
+          </a:bodyPr>
+          <a:lstStyle/>
+          <a:p>
+            <a:pPr algn="ctr"/>
+            <a:r>
+              <a:rPr sz="2100" b="1">
+                <a:solidFill>
+                  <a:srgbClr val="186638"/>
+                </a:solidFill>
+                <a:latin typeface="DM Serif Display"/>
+              </a:rPr>
+              <a:t>100.0%</a:t>
+            </a:r>
+          </a:p>
+          <a:p>
+            <a:pPr algn="ctr"/>
+            <a:r>
+              <a:rPr sz="830" b="1">
+                <a:solidFill>
+                  <a:srgbClr val="435D74"/>
+                </a:solidFill>
+                <a:latin typeface="Karla"/>
+              </a:rPr>
+              <a:t>BANKNOTE &amp; WINE</a:t>
+            </a:r>
+          </a:p>
+          <a:p>
+            <a:pPr algn="ctr"/>
+            <a:r>
+              <a:rPr sz="730">
+                <a:solidFill>
+                  <a:srgbClr val="5F6973"/>
+                </a:solidFill>
+                <a:latin typeface="Karla"/>
+              </a:rPr>
+              <a:t>Partición canónica 80-20</a:t>
+            </a:r>
+          </a:p>
+        </p:txBody>
+      </p:sp>
+      <p:sp>
+        <p:nvSpPr>
+          <p:cNvPr id="11" name="Rounded Rectangle 10"/>
+          <p:cNvSpPr/>
+          <p:nvPr/>
+        </p:nvSpPr>
+        <p:spPr>
+          <a:xfrm>
+            <a:off x="5833872" y="2048256"/>
+            <a:ext cx="2286000" cy="658368"/>
+          </a:xfrm>
+          <a:prstGeom prst="roundRect">
+            <a:avLst/>
+          </a:prstGeom>
+          <a:solidFill>
+            <a:srgbClr val="F0F5FA"/>
+          </a:solidFill>
+          <a:ln w="12700">
+            <a:solidFill>
+              <a:srgbClr val="CDDCEB"/>
+            </a:solidFill>
+          </a:ln>
+        </p:spPr>
+        <p:style>
+          <a:lnRef idx="1">
+            <a:schemeClr val="accent1"/>
+          </a:lnRef>
+          <a:fillRef idx="3">
+            <a:schemeClr val="accent1"/>
+          </a:fillRef>
+          <a:effectRef idx="2">
+            <a:schemeClr val="accent1"/>
+          </a:effectRef>
+          <a:fontRef idx="minor">
+            <a:schemeClr val="lt1"/>
+          </a:fontRef>
+        </p:style>
+        <p:txBody>
+          <a:bodyPr rtlCol="0" anchor="ctr"/>
+          <a:lstStyle/>
+          <a:p>
+            <a:pPr algn="ctr"/>
+          </a:p>
+        </p:txBody>
+      </p:sp>
+      <p:sp>
+        <p:nvSpPr>
+          <p:cNvPr id="12" name="TextBox 11"/>
+          <p:cNvSpPr txBox="1"/>
+          <p:nvPr/>
+        </p:nvSpPr>
+        <p:spPr>
+          <a:xfrm>
+            <a:off x="5907024" y="2103120"/>
+            <a:ext cx="2139696" cy="548640"/>
+          </a:xfrm>
+          <a:prstGeom prst="rect">
+            <a:avLst/>
+          </a:prstGeom>
+          <a:noFill/>
+        </p:spPr>
+        <p:txBody>
+          <a:bodyPr wrap="square" lIns="0" rIns="0" tIns="0" bIns="0">
+            <a:spAutoFit/>
+          </a:bodyPr>
+          <a:lstStyle/>
+          <a:p>
+            <a:pPr algn="ctr"/>
+            <a:r>
+              <a:rPr sz="2100" b="1">
+                <a:solidFill>
+                  <a:srgbClr val="144169"/>
+                </a:solidFill>
+                <a:latin typeface="DM Serif Display"/>
+              </a:rPr>
+              <a:t>98.25%</a:t>
+            </a:r>
+          </a:p>
+          <a:p>
+            <a:pPr algn="ctr"/>
+            <a:r>
+              <a:rPr sz="830" b="1">
+                <a:solidFill>
+                  <a:srgbClr val="435D74"/>
+                </a:solidFill>
+                <a:latin typeface="Karla"/>
+              </a:rPr>
+              <a:t>BREAST CANCER</a:t>
+            </a:r>
+          </a:p>
+          <a:p>
+            <a:pPr algn="ctr"/>
+            <a:r>
+              <a:rPr sz="730">
+                <a:solidFill>
+                  <a:srgbClr val="5F6973"/>
+                </a:solidFill>
+                <a:latin typeface="Karla"/>
+              </a:rPr>
+              <a:t>F₁ = 0.9859 (Mínimo falso negativo)</a:t>
+            </a:r>
+          </a:p>
+        </p:txBody>
+      </p:sp>
+      <p:sp>
+        <p:nvSpPr>
+          <p:cNvPr id="13" name="TextBox 12"/>
+          <p:cNvSpPr txBox="1"/>
+          <p:nvPr/>
+        </p:nvSpPr>
+        <p:spPr>
+          <a:xfrm>
+            <a:off x="5833872" y="2816352"/>
+            <a:ext cx="2286000" cy="1005840"/>
+          </a:xfrm>
+          <a:prstGeom prst="rect">
+            <a:avLst/>
+          </a:prstGeom>
+          <a:noFill/>
+        </p:spPr>
+        <p:txBody>
+          <a:bodyPr wrap="square" lIns="0" rIns="0" tIns="0" bIns="0">
+            <a:spAutoFit/>
+          </a:bodyPr>
+          <a:lstStyle/>
+          <a:p/>
+          <a:p>
+            <a:pPr algn="l">
+              <a:spcAft>
+                <a:spcPts val="400"/>
+              </a:spcAft>
+            </a:pPr>
+            <a:r>
+              <a:rPr sz="750" b="1">
+                <a:solidFill>
+                  <a:srgbClr val="88664A"/>
+                </a:solidFill>
+                <a:latin typeface="Karla"/>
+              </a:rPr>
+              <a:t>▪ </a:t>
+            </a:r>
+            <a:r>
+              <a:rPr sz="850" b="1">
+                <a:solidFill>
+                  <a:srgbClr val="0E2A47"/>
+                </a:solidFill>
+                <a:latin typeface="Karla"/>
+              </a:rPr>
+              <a:t>Cero Data Leakage: </a:t>
+            </a:r>
+            <a:r>
+              <a:rPr sz="850">
+                <a:solidFill>
+                  <a:srgbClr val="222222"/>
+                </a:solidFill>
+                <a:latin typeface="Karla"/>
+              </a:rPr>
+              <a:t>Normalización z-score calculada únicamente sobre entrenamiento en cada split.</a:t>
+            </a:r>
+          </a:p>
+          <a:p>
+            <a:pPr algn="l">
+              <a:spcAft>
+                <a:spcPts val="400"/>
+              </a:spcAft>
+            </a:pPr>
+            <a:r>
+              <a:rPr sz="750" b="1">
+                <a:solidFill>
+                  <a:srgbClr val="88664A"/>
+                </a:solidFill>
+                <a:latin typeface="Karla"/>
+              </a:rPr>
+              <a:t>▪ </a:t>
+            </a:r>
+            <a:r>
+              <a:rPr sz="850" b="1">
+                <a:solidFill>
+                  <a:srgbClr val="0E2A47"/>
+                </a:solidFill>
+                <a:latin typeface="Karla"/>
+              </a:rPr>
+              <a:t>Invarianza de Split: </a:t>
+            </a:r>
+            <a:r>
+              <a:rPr sz="850">
+                <a:solidFill>
+                  <a:srgbClr val="222222"/>
+                </a:solidFill>
+                <a:latin typeface="Karla"/>
+              </a:rPr>
+              <a:t>Las oscilaciones entre splits 60-40 y 90-10 no superan el 1.5% de varianza.</a:t>
+            </a:r>
+          </a:p>
+        </p:txBody>
+      </p:sp>
+      <p:sp>
+        <p:nvSpPr>
+          <p:cNvPr id="14" name="Rounded Rectangle 13"/>
+          <p:cNvSpPr/>
+          <p:nvPr/>
+        </p:nvSpPr>
+        <p:spPr>
+          <a:xfrm>
+            <a:off x="5833872" y="3931920"/>
+            <a:ext cx="2286000" cy="658368"/>
+          </a:xfrm>
+          <a:prstGeom prst="roundRect">
+            <a:avLst/>
+          </a:prstGeom>
+          <a:solidFill>
+            <a:srgbClr val="FCF8F2"/>
+          </a:solidFill>
+          <a:ln w="12700">
+            <a:solidFill>
+              <a:srgbClr val="EDDFCD"/>
+            </a:solidFill>
+          </a:ln>
+        </p:spPr>
+        <p:style>
+          <a:lnRef idx="1">
+            <a:schemeClr val="accent1"/>
+          </a:lnRef>
+          <a:fillRef idx="3">
+            <a:schemeClr val="accent1"/>
+          </a:fillRef>
+          <a:effectRef idx="2">
+            <a:schemeClr val="accent1"/>
+          </a:effectRef>
+          <a:fontRef idx="minor">
+            <a:schemeClr val="lt1"/>
+          </a:fontRef>
+        </p:style>
+        <p:txBody>
+          <a:bodyPr rtlCol="0" anchor="ctr"/>
+          <a:lstStyle/>
+          <a:p>
+            <a:pPr algn="ctr"/>
+          </a:p>
+        </p:txBody>
+      </p:sp>
+      <p:sp>
+        <p:nvSpPr>
+          <p:cNvPr id="15" name="TextBox 14"/>
+          <p:cNvSpPr txBox="1"/>
+          <p:nvPr/>
+        </p:nvSpPr>
+        <p:spPr>
+          <a:xfrm>
+            <a:off x="5897880" y="3968496"/>
+            <a:ext cx="2148840" cy="585216"/>
           </a:xfrm>
           <a:prstGeom prst="rect">
             <a:avLst/>
@@ -41335,14 +42844,14 @@
           <a:lstStyle/>
           <a:p>
             <a:pPr>
-              <a:defRPr sz="819" b="1">
+              <a:defRPr sz="780" b="1">
                 <a:solidFill>
-                  <a:srgbClr val="1E6937"/>
+                  <a:srgbClr val="7D542D"/>
                 </a:solidFill>
               </a:defRPr>
             </a:pPr>
             <a:r>
-              <a:t>✓ RESILIENCIA: Desempeño invariante ante el tamaño del test set, superando en +14.2% de F₁ a los clasificadores monocapa del Taller 1.</a:t>
+              <a:t>★ El MLP supera en +14.2% de F₁-Score a los clasificadores monocapa del Taller 1.</a:t>
             </a:r>
           </a:p>
         </p:txBody>
@@ -41377,33 +42886,23 @@
         </p:nvSpPr>
         <p:spPr>
           <a:xfrm>
-            <a:off x="868680" y="347472"/>
-            <a:ext cx="7589520" cy="777240"/>
+            <a:off x="914400" y="502920"/>
+            <a:ext cx="4937760" cy="640080"/>
           </a:xfrm>
         </p:spPr>
         <p:txBody>
-          <a:bodyPr wrap="square" lIns="0" tIns="0" rIns="0" bIns="0"/>
+          <a:bodyPr wrap="square" lIns="0" rIns="0" tIns="0" bIns="0"/>
           <a:lstStyle/>
           <a:p>
             <a:pPr algn="l"/>
             <a:r>
-              <a:rPr sz="950" b="1">
-                <a:solidFill>
-                  <a:srgbClr val="88664A"/>
-                </a:solidFill>
-                <a:latin typeface="Karla"/>
-              </a:rPr>
-              <a:t>07. ANÁLISIS DE COMPLEJIDAD
-</a:t>
-            </a:r>
-            <a:r>
-              <a:rPr sz="2100" b="1">
+              <a:rPr sz="1750" b="1">
                 <a:solidFill>
                   <a:srgbClr val="0E2A47"/>
                 </a:solidFill>
                 <a:latin typeface="DM Serif Display"/>
               </a:rPr>
-              <a:t>Patología del Sobreajuste y Divergencia de Varianza</a:t>
+              <a:t>Sobreajuste: Desacople de Varianza y Memorización de Ruido</a:t>
             </a:r>
           </a:p>
         </p:txBody>
@@ -41416,18 +42915,98 @@
         </p:nvSpPr>
         <p:spPr>
           <a:xfrm>
-            <a:off x="777240" y="1188720"/>
-            <a:ext cx="4663440" cy="3611880"/>
+            <a:off x="5897880" y="420624"/>
+            <a:ext cx="2286000" cy="256032"/>
           </a:xfrm>
           <a:prstGeom prst="roundRect">
             <a:avLst/>
           </a:prstGeom>
           <a:solidFill>
-            <a:srgbClr val="F8F9FA"/>
+            <a:srgbClr val="FCF8F2"/>
           </a:solidFill>
           <a:ln w="12700">
             <a:solidFill>
-              <a:srgbClr val="DADEE2"/>
+              <a:srgbClr val="EDDFCD"/>
+            </a:solidFill>
+          </a:ln>
+        </p:spPr>
+        <p:style>
+          <a:lnRef idx="1">
+            <a:schemeClr val="accent1"/>
+          </a:lnRef>
+          <a:fillRef idx="3">
+            <a:schemeClr val="accent1"/>
+          </a:fillRef>
+          <a:effectRef idx="2">
+            <a:schemeClr val="accent1"/>
+          </a:effectRef>
+          <a:fontRef idx="minor">
+            <a:schemeClr val="lt1"/>
+          </a:fontRef>
+        </p:style>
+        <p:txBody>
+          <a:bodyPr rtlCol="0" anchor="ctr"/>
+          <a:lstStyle/>
+          <a:p>
+            <a:pPr algn="ctr"/>
+          </a:p>
+        </p:txBody>
+      </p:sp>
+      <p:sp>
+        <p:nvSpPr>
+          <p:cNvPr id="4" name="TextBox 3"/>
+          <p:cNvSpPr txBox="1"/>
+          <p:nvPr/>
+        </p:nvSpPr>
+        <p:spPr>
+          <a:xfrm>
+            <a:off x="5897880" y="438912"/>
+            <a:ext cx="2286000" cy="219456"/>
+          </a:xfrm>
+          <a:prstGeom prst="rect">
+            <a:avLst/>
+          </a:prstGeom>
+          <a:noFill/>
+        </p:spPr>
+        <p:txBody>
+          <a:bodyPr wrap="square" lIns="0" rIns="0" tIns="0" bIns="0">
+            <a:spAutoFit/>
+          </a:bodyPr>
+          <a:lstStyle/>
+          <a:p>
+            <a:pPr algn="ctr"/>
+            <a:r>
+              <a:rPr sz="780" b="1">
+                <a:solidFill>
+                  <a:srgbClr val="7D542D"/>
+                </a:solidFill>
+                <a:latin typeface="Karla"/>
+              </a:rPr>
+              <a:t>07. ANÁLISIS DE COMPLEJIDAD</a:t>
+            </a:r>
+          </a:p>
+        </p:txBody>
+      </p:sp>
+      <p:sp>
+        <p:nvSpPr>
+          <p:cNvPr id="5" name="Rounded Rectangle 4"/>
+          <p:cNvSpPr/>
+          <p:nvPr/>
+        </p:nvSpPr>
+        <p:spPr>
+          <a:xfrm>
+            <a:off x="914400" y="1188720"/>
+            <a:ext cx="4663440" cy="3520440"/>
+          </a:xfrm>
+          <a:prstGeom prst="roundRect">
+            <a:avLst/>
+          </a:prstGeom>
+          <a:solidFill>
+            <a:srgbClr val="F9FAFB"/>
+          </a:solidFill>
+          <a:ln w="12700">
+            <a:solidFill>
+              <a:srgbClr val="DEE2E6"/>
             </a:solidFill>
           </a:ln>
         </p:spPr>
@@ -41455,7 +43034,7 @@
       </p:sp>
       <p:pic>
         <p:nvPicPr>
-          <p:cNvPr id="4" name="Picture 3" descr="overfitting_curvas_aprendizaje_early_stopping.png"/>
+          <p:cNvPr id="6" name="Picture 5" descr="overfitting_curvas_aprendizaje_early_stopping.png"/>
           <p:cNvPicPr>
             <a:picLocks noChangeAspect="1"/>
           </p:cNvPicPr>
@@ -41469,8 +43048,8 @@
         </p:blipFill>
         <p:spPr>
           <a:xfrm>
-            <a:off x="868680" y="1261872"/>
-            <a:ext cx="4480560" cy="2880360"/>
+            <a:off x="1005840" y="1261872"/>
+            <a:ext cx="4480560" cy="2926080"/>
           </a:xfrm>
           <a:prstGeom prst="rect">
             <a:avLst/>
@@ -41479,14 +43058,14 @@
       </p:pic>
       <p:sp>
         <p:nvSpPr>
-          <p:cNvPr id="5" name="TextBox 4"/>
+          <p:cNvPr id="7" name="TextBox 6"/>
           <p:cNvSpPr txBox="1"/>
           <p:nvPr/>
         </p:nvSpPr>
         <p:spPr>
           <a:xfrm>
-            <a:off x="868680" y="4224528"/>
-            <a:ext cx="4480560" cy="502920"/>
+            <a:off x="1005840" y="4279392"/>
+            <a:ext cx="4480560" cy="365760"/>
           </a:xfrm>
           <a:prstGeom prst="rect">
             <a:avLst/>
@@ -41500,38 +43079,38 @@
           <a:lstStyle/>
           <a:p>
             <a:pPr algn="ctr">
-              <a:defRPr sz="850">
+              <a:defRPr sz="800">
                 <a:solidFill>
-                  <a:srgbClr val="595959"/>
+                  <a:srgbClr val="5F6973"/>
                 </a:solidFill>
               </a:defRPr>
             </a:pPr>
             <a:r>
-              <a:t>Figura: Curvas de pérdida en red sobreparametrizada (4097 parámetros libres).</a:t>
+              <a:t>Figura: Dinámica de error en red sobreparametrizada [30, 64, 32, 1] (4097 parámetros vs 284 muestras).</a:t>
             </a:r>
           </a:p>
         </p:txBody>
       </p:sp>
       <p:sp>
         <p:nvSpPr>
-          <p:cNvPr id="6" name="Rounded Rectangle 5"/>
+          <p:cNvPr id="8" name="Rounded Rectangle 7"/>
           <p:cNvSpPr/>
           <p:nvPr/>
         </p:nvSpPr>
         <p:spPr>
           <a:xfrm>
-            <a:off x="5577840" y="1188720"/>
-            <a:ext cx="2788920" cy="3611880"/>
+            <a:off x="5715000" y="1188720"/>
+            <a:ext cx="2514600" cy="3520440"/>
           </a:xfrm>
           <a:prstGeom prst="roundRect">
             <a:avLst/>
           </a:prstGeom>
           <a:solidFill>
-            <a:srgbClr val="F8F9FA"/>
+            <a:srgbClr val="F9FAFB"/>
           </a:solidFill>
           <a:ln w="12700">
             <a:solidFill>
-              <a:srgbClr val="DADEE2"/>
+              <a:srgbClr val="DEE2E6"/>
             </a:solidFill>
           </a:ln>
         </p:spPr>
@@ -41559,14 +43138,93 @@
       </p:sp>
       <p:sp>
         <p:nvSpPr>
-          <p:cNvPr id="7" name="TextBox 6"/>
+          <p:cNvPr id="9" name="TextBox 8"/>
           <p:cNvSpPr txBox="1"/>
           <p:nvPr/>
         </p:nvSpPr>
         <p:spPr>
           <a:xfrm>
-            <a:off x="5687568" y="1280160"/>
-            <a:ext cx="2569464" cy="3429000"/>
+            <a:off x="5833872" y="1261872"/>
+            <a:ext cx="2286000" cy="320040"/>
+          </a:xfrm>
+          <a:prstGeom prst="rect">
+            <a:avLst/>
+          </a:prstGeom>
+          <a:noFill/>
+        </p:spPr>
+        <p:txBody>
+          <a:bodyPr wrap="none">
+            <a:spAutoFit/>
+          </a:bodyPr>
+          <a:lstStyle/>
+          <a:p>
+            <a:pPr>
+              <a:defRPr sz="1100" b="1">
+                <a:solidFill>
+                  <a:srgbClr val="0E2A47"/>
+                </a:solidFill>
+                <a:latin typeface="DM Serif Display"/>
+              </a:defRPr>
+            </a:pPr>
+            <a:r>
+              <a:t>DINÁMICA DE 4 FASES</a:t>
+            </a:r>
+          </a:p>
+        </p:txBody>
+      </p:sp>
+      <p:sp>
+        <p:nvSpPr>
+          <p:cNvPr id="10" name="Rounded Rectangle 9"/>
+          <p:cNvSpPr/>
+          <p:nvPr/>
+        </p:nvSpPr>
+        <p:spPr>
+          <a:xfrm>
+            <a:off x="5833872" y="1572768"/>
+            <a:ext cx="2286000" cy="548640"/>
+          </a:xfrm>
+          <a:prstGeom prst="roundRect">
+            <a:avLst/>
+          </a:prstGeom>
+          <a:solidFill>
+            <a:srgbClr val="F9FAFB"/>
+          </a:solidFill>
+          <a:ln>
+            <a:noFill/>
+          </a:ln>
+        </p:spPr>
+        <p:style>
+          <a:lnRef idx="1">
+            <a:schemeClr val="accent1"/>
+          </a:lnRef>
+          <a:fillRef idx="3">
+            <a:schemeClr val="accent1"/>
+          </a:fillRef>
+          <a:effectRef idx="2">
+            <a:schemeClr val="accent1"/>
+          </a:effectRef>
+          <a:fontRef idx="minor">
+            <a:schemeClr val="lt1"/>
+          </a:fontRef>
+        </p:style>
+        <p:txBody>
+          <a:bodyPr rtlCol="0" anchor="ctr"/>
+          <a:lstStyle/>
+          <a:p>
+            <a:pPr algn="ctr"/>
+          </a:p>
+        </p:txBody>
+      </p:sp>
+      <p:sp>
+        <p:nvSpPr>
+          <p:cNvPr id="11" name="TextBox 10"/>
+          <p:cNvSpPr txBox="1"/>
+          <p:nvPr/>
+        </p:nvSpPr>
+        <p:spPr>
+          <a:xfrm>
+            <a:off x="5888736" y="1609344"/>
+            <a:ext cx="2176272" cy="475488"/>
           </a:xfrm>
           <a:prstGeom prst="rect">
             <a:avLst/>
@@ -41580,188 +43238,384 @@
           <a:lstStyle/>
           <a:p>
             <a:pPr>
-              <a:spcAft>
-                <a:spcPts val="600"/>
-              </a:spcAft>
-              <a:defRPr sz="1300" b="1">
+              <a:defRPr sz="800" b="1">
                 <a:solidFill>
-                  <a:srgbClr val="0E2A47"/>
+                  <a:srgbClr val="435D74"/>
                 </a:solidFill>
-                <a:latin typeface="DM Serif Display"/>
+                <a:latin typeface="Karla"/>
               </a:defRPr>
             </a:pPr>
             <a:r>
-              <a:t>Las 4 Fases Temporales</a:t>
+              <a:t>Fase I: Subajuste</a:t>
             </a:r>
           </a:p>
           <a:p>
-            <a:pPr algn="l">
-              <a:spcAft>
-                <a:spcPts val="400"/>
-              </a:spcAft>
-            </a:pPr>
-            <a:r>
-              <a:rPr sz="850" b="1">
-                <a:solidFill>
-                  <a:srgbClr val="88664A"/>
-                </a:solidFill>
-                <a:latin typeface="Karla"/>
-              </a:rPr>
-              <a:t>▪ </a:t>
-            </a:r>
-            <a:r>
-              <a:rPr sz="950" b="1">
-                <a:solidFill>
-                  <a:srgbClr val="0E2A47"/>
-                </a:solidFill>
-                <a:latin typeface="Karla"/>
-              </a:rPr>
-              <a:t>Fase I: Subajuste: </a:t>
-            </a:r>
-            <a:r>
-              <a:rPr sz="950">
+            <a:pPr>
+              <a:defRPr sz="720">
                 <a:solidFill>
                   <a:srgbClr val="222222"/>
                 </a:solidFill>
                 <a:latin typeface="Karla"/>
-              </a:rPr>
+              </a:defRPr>
+            </a:pPr>
+            <a:r>
               <a:t>Épocas 1–25: Alto sesgo, descenso paralelo de E_train y E_val.</a:t>
             </a:r>
           </a:p>
+        </p:txBody>
+      </p:sp>
+      <p:sp>
+        <p:nvSpPr>
+          <p:cNvPr id="12" name="Rounded Rectangle 11"/>
+          <p:cNvSpPr/>
+          <p:nvPr/>
+        </p:nvSpPr>
+        <p:spPr>
+          <a:xfrm>
+            <a:off x="5833872" y="2167128"/>
+            <a:ext cx="2286000" cy="548640"/>
+          </a:xfrm>
+          <a:prstGeom prst="roundRect">
+            <a:avLst/>
+          </a:prstGeom>
+          <a:solidFill>
+            <a:srgbClr val="EEF7F2"/>
+          </a:solidFill>
+          <a:ln>
+            <a:noFill/>
+          </a:ln>
+        </p:spPr>
+        <p:style>
+          <a:lnRef idx="1">
+            <a:schemeClr val="accent1"/>
+          </a:lnRef>
+          <a:fillRef idx="3">
+            <a:schemeClr val="accent1"/>
+          </a:fillRef>
+          <a:effectRef idx="2">
+            <a:schemeClr val="accent1"/>
+          </a:effectRef>
+          <a:fontRef idx="minor">
+            <a:schemeClr val="lt1"/>
+          </a:fontRef>
+        </p:style>
+        <p:txBody>
+          <a:bodyPr rtlCol="0" anchor="ctr"/>
+          <a:lstStyle/>
           <a:p>
-            <a:pPr algn="l">
-              <a:spcAft>
-                <a:spcPts val="400"/>
-              </a:spcAft>
+            <a:pPr algn="ctr"/>
+          </a:p>
+        </p:txBody>
+      </p:sp>
+      <p:sp>
+        <p:nvSpPr>
+          <p:cNvPr id="13" name="TextBox 12"/>
+          <p:cNvSpPr txBox="1"/>
+          <p:nvPr/>
+        </p:nvSpPr>
+        <p:spPr>
+          <a:xfrm>
+            <a:off x="5888736" y="2203704"/>
+            <a:ext cx="2176272" cy="475488"/>
+          </a:xfrm>
+          <a:prstGeom prst="rect">
+            <a:avLst/>
+          </a:prstGeom>
+          <a:noFill/>
+        </p:spPr>
+        <p:txBody>
+          <a:bodyPr wrap="square" lIns="0" rIns="0" tIns="0" bIns="0">
+            <a:spAutoFit/>
+          </a:bodyPr>
+          <a:lstStyle/>
+          <a:p>
+            <a:pPr>
+              <a:defRPr sz="800" b="1">
+                <a:solidFill>
+                  <a:srgbClr val="186638"/>
+                </a:solidFill>
+                <a:latin typeface="Karla"/>
+              </a:defRPr>
             </a:pPr>
             <a:r>
-              <a:rPr sz="850" b="1">
-                <a:solidFill>
-                  <a:srgbClr val="88664A"/>
-                </a:solidFill>
-                <a:latin typeface="Karla"/>
-              </a:rPr>
-              <a:t>▪ </a:t>
+              <a:t>Fase II: Óptimo Global</a:t>
             </a:r>
-            <a:r>
-              <a:rPr sz="950" b="1">
-                <a:solidFill>
-                  <a:srgbClr val="0E2A47"/>
-                </a:solidFill>
-                <a:latin typeface="Karla"/>
-              </a:rPr>
-              <a:t>Fase II: Óptimo: </a:t>
-            </a:r>
-            <a:r>
-              <a:rPr sz="950">
+          </a:p>
+          <a:p>
+            <a:pPr>
+              <a:defRPr sz="720">
                 <a:solidFill>
                   <a:srgbClr val="222222"/>
                 </a:solidFill>
                 <a:latin typeface="Karla"/>
-              </a:rPr>
-              <a:t>Épocas 25–45: Mínimo de validación global. Compromiso sesgo-varianza ideal.</a:t>
+              </a:defRPr>
+            </a:pPr>
+            <a:r>
+              <a:t>Épocas 25–45: Mínimo de validación (E_val* = 0.0127 en ép. 24).</a:t>
+            </a:r>
+          </a:p>
+        </p:txBody>
+      </p:sp>
+      <p:sp>
+        <p:nvSpPr>
+          <p:cNvPr id="14" name="Rounded Rectangle 13"/>
+          <p:cNvSpPr/>
+          <p:nvPr/>
+        </p:nvSpPr>
+        <p:spPr>
+          <a:xfrm>
+            <a:off x="5833872" y="2761488"/>
+            <a:ext cx="2286000" cy="548640"/>
+          </a:xfrm>
+          <a:prstGeom prst="roundRect">
+            <a:avLst/>
+          </a:prstGeom>
+          <a:solidFill>
+            <a:srgbClr val="FCF8F2"/>
+          </a:solidFill>
+          <a:ln>
+            <a:noFill/>
+          </a:ln>
+        </p:spPr>
+        <p:style>
+          <a:lnRef idx="1">
+            <a:schemeClr val="accent1"/>
+          </a:lnRef>
+          <a:fillRef idx="3">
+            <a:schemeClr val="accent1"/>
+          </a:fillRef>
+          <a:effectRef idx="2">
+            <a:schemeClr val="accent1"/>
+          </a:effectRef>
+          <a:fontRef idx="minor">
+            <a:schemeClr val="lt1"/>
+          </a:fontRef>
+        </p:style>
+        <p:txBody>
+          <a:bodyPr rtlCol="0" anchor="ctr"/>
+          <a:lstStyle/>
+          <a:p>
+            <a:pPr algn="ctr"/>
+          </a:p>
+        </p:txBody>
+      </p:sp>
+      <p:sp>
+        <p:nvSpPr>
+          <p:cNvPr id="15" name="TextBox 14"/>
+          <p:cNvSpPr txBox="1"/>
+          <p:nvPr/>
+        </p:nvSpPr>
+        <p:spPr>
+          <a:xfrm>
+            <a:off x="5888736" y="2798064"/>
+            <a:ext cx="2176272" cy="475488"/>
+          </a:xfrm>
+          <a:prstGeom prst="rect">
+            <a:avLst/>
+          </a:prstGeom>
+          <a:noFill/>
+        </p:spPr>
+        <p:txBody>
+          <a:bodyPr wrap="square" lIns="0" rIns="0" tIns="0" bIns="0">
+            <a:spAutoFit/>
+          </a:bodyPr>
+          <a:lstStyle/>
+          <a:p>
+            <a:pPr>
+              <a:defRPr sz="800" b="1">
+                <a:solidFill>
+                  <a:srgbClr val="7D542D"/>
+                </a:solidFill>
+                <a:latin typeface="Karla"/>
+              </a:defRPr>
+            </a:pPr>
+            <a:r>
+              <a:t>Fase III: Desacople</a:t>
             </a:r>
           </a:p>
           <a:p>
-            <a:pPr algn="l">
-              <a:spcAft>
-                <a:spcPts val="400"/>
-              </a:spcAft>
-            </a:pPr>
-            <a:r>
-              <a:rPr sz="850" b="1">
-                <a:solidFill>
-                  <a:srgbClr val="88664A"/>
-                </a:solidFill>
-                <a:latin typeface="Karla"/>
-              </a:rPr>
-              <a:t>▪ </a:t>
-            </a:r>
-            <a:r>
-              <a:rPr sz="950" b="1">
-                <a:solidFill>
-                  <a:srgbClr val="0E2A47"/>
-                </a:solidFill>
-                <a:latin typeface="Karla"/>
-              </a:rPr>
-              <a:t>Fase III: Desacople: </a:t>
-            </a:r>
-            <a:r>
-              <a:rPr sz="950">
+            <a:pPr>
+              <a:defRPr sz="720">
                 <a:solidFill>
                   <a:srgbClr val="222222"/>
                 </a:solidFill>
                 <a:latin typeface="Karla"/>
-              </a:rPr>
-              <a:t>Épocas 45–100: Estancamiento de E_val mientras E_train continúa decreciendo.</a:t>
+              </a:defRPr>
+            </a:pPr>
+            <a:r>
+              <a:t>Épocas 45–100: Estancamiento de E_val mientras E_train decrece.</a:t>
+            </a:r>
+          </a:p>
+        </p:txBody>
+      </p:sp>
+      <p:sp>
+        <p:nvSpPr>
+          <p:cNvPr id="16" name="Rounded Rectangle 15"/>
+          <p:cNvSpPr/>
+          <p:nvPr/>
+        </p:nvSpPr>
+        <p:spPr>
+          <a:xfrm>
+            <a:off x="5833872" y="3355848"/>
+            <a:ext cx="2286000" cy="548640"/>
+          </a:xfrm>
+          <a:prstGeom prst="roundRect">
+            <a:avLst/>
+          </a:prstGeom>
+          <a:solidFill>
+            <a:srgbClr val="FDF4F4"/>
+          </a:solidFill>
+          <a:ln>
+            <a:noFill/>
+          </a:ln>
+        </p:spPr>
+        <p:style>
+          <a:lnRef idx="1">
+            <a:schemeClr val="accent1"/>
+          </a:lnRef>
+          <a:fillRef idx="3">
+            <a:schemeClr val="accent1"/>
+          </a:fillRef>
+          <a:effectRef idx="2">
+            <a:schemeClr val="accent1"/>
+          </a:effectRef>
+          <a:fontRef idx="minor">
+            <a:schemeClr val="lt1"/>
+          </a:fontRef>
+        </p:style>
+        <p:txBody>
+          <a:bodyPr rtlCol="0" anchor="ctr"/>
+          <a:lstStyle/>
+          <a:p>
+            <a:pPr algn="ctr"/>
+          </a:p>
+        </p:txBody>
+      </p:sp>
+      <p:sp>
+        <p:nvSpPr>
+          <p:cNvPr id="17" name="TextBox 16"/>
+          <p:cNvSpPr txBox="1"/>
+          <p:nvPr/>
+        </p:nvSpPr>
+        <p:spPr>
+          <a:xfrm>
+            <a:off x="5888736" y="3392424"/>
+            <a:ext cx="2176272" cy="475488"/>
+          </a:xfrm>
+          <a:prstGeom prst="rect">
+            <a:avLst/>
+          </a:prstGeom>
+          <a:noFill/>
+        </p:spPr>
+        <p:txBody>
+          <a:bodyPr wrap="square" lIns="0" rIns="0" tIns="0" bIns="0">
+            <a:spAutoFit/>
+          </a:bodyPr>
+          <a:lstStyle/>
+          <a:p>
+            <a:pPr>
+              <a:defRPr sz="800" b="1">
+                <a:solidFill>
+                  <a:srgbClr val="9B2222"/>
+                </a:solidFill>
+                <a:latin typeface="Karla"/>
+              </a:defRPr>
+            </a:pPr>
+            <a:r>
+              <a:t>Fase IV: Memorización</a:t>
             </a:r>
           </a:p>
           <a:p>
-            <a:pPr algn="l">
-              <a:spcAft>
-                <a:spcPts val="400"/>
-              </a:spcAft>
-            </a:pPr>
-            <a:r>
-              <a:rPr sz="850" b="1">
-                <a:solidFill>
-                  <a:srgbClr val="88664A"/>
-                </a:solidFill>
-                <a:latin typeface="Karla"/>
-              </a:rPr>
-              <a:t>▪ </a:t>
-            </a:r>
-            <a:r>
-              <a:rPr sz="950" b="1">
-                <a:solidFill>
-                  <a:srgbClr val="0E2A47"/>
-                </a:solidFill>
-                <a:latin typeface="Karla"/>
-              </a:rPr>
-              <a:t>Fase IV: Memorización: </a:t>
-            </a:r>
-            <a:r>
-              <a:rPr sz="950">
+            <a:pPr>
+              <a:defRPr sz="720">
                 <a:solidFill>
                   <a:srgbClr val="222222"/>
                 </a:solidFill>
                 <a:latin typeface="Karla"/>
-              </a:rPr>
-              <a:t>Épocas 100–1000: E_train -&gt; 0 mientras E_val asciende patológicamente por varianza.</a:t>
+              </a:defRPr>
+            </a:pPr>
+            <a:r>
+              <a:t>Épocas 100–1000: E_train→0 y E_val asciende patológicamente.</a:t>
             </a:r>
           </a:p>
+        </p:txBody>
+      </p:sp>
+      <p:sp>
+        <p:nvSpPr>
+          <p:cNvPr id="18" name="Rounded Rectangle 17"/>
+          <p:cNvSpPr/>
+          <p:nvPr/>
+        </p:nvSpPr>
+        <p:spPr>
+          <a:xfrm>
+            <a:off x="5833872" y="3977639"/>
+            <a:ext cx="2286000" cy="621792"/>
+          </a:xfrm>
+          <a:prstGeom prst="roundRect">
+            <a:avLst/>
+          </a:prstGeom>
+          <a:solidFill>
+            <a:srgbClr val="FDF4F4"/>
+          </a:solidFill>
+          <a:ln w="12700">
+            <a:solidFill>
+              <a:srgbClr val="F4CCCC"/>
+            </a:solidFill>
+          </a:ln>
+        </p:spPr>
+        <p:style>
+          <a:lnRef idx="1">
+            <a:schemeClr val="accent1"/>
+          </a:lnRef>
+          <a:fillRef idx="3">
+            <a:schemeClr val="accent1"/>
+          </a:fillRef>
+          <a:effectRef idx="2">
+            <a:schemeClr val="accent1"/>
+          </a:effectRef>
+          <a:fontRef idx="minor">
+            <a:schemeClr val="lt1"/>
+          </a:fontRef>
+        </p:style>
+        <p:txBody>
+          <a:bodyPr rtlCol="0" anchor="ctr"/>
+          <a:lstStyle/>
           <a:p>
-            <a:pPr algn="l">
-              <a:spcAft>
-                <a:spcPts val="400"/>
-              </a:spcAft>
+            <a:pPr algn="ctr"/>
+          </a:p>
+        </p:txBody>
+      </p:sp>
+      <p:sp>
+        <p:nvSpPr>
+          <p:cNvPr id="19" name="TextBox 18"/>
+          <p:cNvSpPr txBox="1"/>
+          <p:nvPr/>
+        </p:nvSpPr>
+        <p:spPr>
+          <a:xfrm>
+            <a:off x="5897880" y="4005072"/>
+            <a:ext cx="2148840" cy="548640"/>
+          </a:xfrm>
+          <a:prstGeom prst="rect">
+            <a:avLst/>
+          </a:prstGeom>
+          <a:noFill/>
+        </p:spPr>
+        <p:txBody>
+          <a:bodyPr wrap="square" lIns="0" rIns="0" tIns="0" bIns="0">
+            <a:spAutoFit/>
+          </a:bodyPr>
+          <a:lstStyle/>
+          <a:p>
+            <a:pPr>
+              <a:defRPr sz="780" b="1">
+                <a:solidFill>
+                  <a:srgbClr val="9B2222"/>
+                </a:solidFill>
+              </a:defRPr>
             </a:pPr>
             <a:r>
-              <a:rPr sz="850" b="1">
-                <a:solidFill>
-                  <a:srgbClr val="88664A"/>
-                </a:solidFill>
-                <a:latin typeface="Karla"/>
-              </a:rPr>
-              <a:t>▪ </a:t>
-            </a:r>
-            <a:r>
-              <a:rPr sz="950" b="1">
-                <a:solidFill>
-                  <a:srgbClr val="0E2A47"/>
-                </a:solidFill>
-                <a:latin typeface="Karla"/>
-              </a:rPr>
-              <a:t>Ratio Parámetros: </a:t>
-            </a:r>
-            <a:r>
-              <a:rPr sz="950">
-                <a:solidFill>
-                  <a:srgbClr val="222222"/>
-                </a:solidFill>
-                <a:latin typeface="Karla"/>
-              </a:rPr>
-              <a:t>14.43 parámetros por muestra: memorización pura de ruido estocástico.</a:t>
+              <a:t>Ratio: 14.4 parámetros por muestra → memorización espuria de ruido estocástico.</a:t>
             </a:r>
           </a:p>
         </p:txBody>
@@ -41796,33 +43650,23 @@
         </p:nvSpPr>
         <p:spPr>
           <a:xfrm>
-            <a:off x="868680" y="347472"/>
-            <a:ext cx="7589520" cy="777240"/>
+            <a:off x="914400" y="502920"/>
+            <a:ext cx="4937760" cy="640080"/>
           </a:xfrm>
         </p:spPr>
         <p:txBody>
-          <a:bodyPr wrap="square" lIns="0" tIns="0" rIns="0" bIns="0"/>
+          <a:bodyPr wrap="square" lIns="0" rIns="0" tIns="0" bIns="0"/>
           <a:lstStyle/>
           <a:p>
             <a:pPr algn="l"/>
             <a:r>
-              <a:rPr sz="950" b="1">
-                <a:solidFill>
-                  <a:srgbClr val="88664A"/>
-                </a:solidFill>
-                <a:latin typeface="Karla"/>
-              </a:rPr>
-              <a:t>08. MECANISMO DE CONTROL
-</a:t>
-            </a:r>
-            <a:r>
-              <a:rPr sz="2100" b="1">
+              <a:rPr sz="1750" b="1">
                 <a:solidFill>
                   <a:srgbClr val="0E2A47"/>
                 </a:solidFill>
                 <a:latin typeface="DM Serif Display"/>
               </a:rPr>
-              <a:t>Regularización Espectral Mediante Early Stopping</a:t>
+              <a:t>Early Stopping: -16.7% en Error de Prueba y 95.7% de Ahorro</a:t>
             </a:r>
           </a:p>
         </p:txBody>
@@ -41835,18 +43679,98 @@
         </p:nvSpPr>
         <p:spPr>
           <a:xfrm>
-            <a:off x="777240" y="1188720"/>
-            <a:ext cx="4663440" cy="3611880"/>
+            <a:off x="5897880" y="420624"/>
+            <a:ext cx="2286000" cy="256032"/>
           </a:xfrm>
           <a:prstGeom prst="roundRect">
             <a:avLst/>
           </a:prstGeom>
           <a:solidFill>
-            <a:srgbClr val="F8F9FA"/>
+            <a:srgbClr val="FCF8F2"/>
           </a:solidFill>
           <a:ln w="12700">
             <a:solidFill>
-              <a:srgbClr val="DADEE2"/>
+              <a:srgbClr val="EDDFCD"/>
+            </a:solidFill>
+          </a:ln>
+        </p:spPr>
+        <p:style>
+          <a:lnRef idx="1">
+            <a:schemeClr val="accent1"/>
+          </a:lnRef>
+          <a:fillRef idx="3">
+            <a:schemeClr val="accent1"/>
+          </a:fillRef>
+          <a:effectRef idx="2">
+            <a:schemeClr val="accent1"/>
+          </a:effectRef>
+          <a:fontRef idx="minor">
+            <a:schemeClr val="lt1"/>
+          </a:fontRef>
+        </p:style>
+        <p:txBody>
+          <a:bodyPr rtlCol="0" anchor="ctr"/>
+          <a:lstStyle/>
+          <a:p>
+            <a:pPr algn="ctr"/>
+          </a:p>
+        </p:txBody>
+      </p:sp>
+      <p:sp>
+        <p:nvSpPr>
+          <p:cNvPr id="4" name="TextBox 3"/>
+          <p:cNvSpPr txBox="1"/>
+          <p:nvPr/>
+        </p:nvSpPr>
+        <p:spPr>
+          <a:xfrm>
+            <a:off x="5897880" y="438912"/>
+            <a:ext cx="2286000" cy="219456"/>
+          </a:xfrm>
+          <a:prstGeom prst="rect">
+            <a:avLst/>
+          </a:prstGeom>
+          <a:noFill/>
+        </p:spPr>
+        <p:txBody>
+          <a:bodyPr wrap="square" lIns="0" rIns="0" tIns="0" bIns="0">
+            <a:spAutoFit/>
+          </a:bodyPr>
+          <a:lstStyle/>
+          <a:p>
+            <a:pPr algn="ctr"/>
+            <a:r>
+              <a:rPr sz="780" b="1">
+                <a:solidFill>
+                  <a:srgbClr val="7D542D"/>
+                </a:solidFill>
+                <a:latin typeface="Karla"/>
+              </a:rPr>
+              <a:t>08. MECANISMO DE CONTROL</a:t>
+            </a:r>
+          </a:p>
+        </p:txBody>
+      </p:sp>
+      <p:sp>
+        <p:nvSpPr>
+          <p:cNvPr id="5" name="Rounded Rectangle 4"/>
+          <p:cNvSpPr/>
+          <p:nvPr/>
+        </p:nvSpPr>
+        <p:spPr>
+          <a:xfrm>
+            <a:off x="914400" y="1188720"/>
+            <a:ext cx="4663440" cy="3520440"/>
+          </a:xfrm>
+          <a:prstGeom prst="roundRect">
+            <a:avLst/>
+          </a:prstGeom>
+          <a:solidFill>
+            <a:srgbClr val="F9FAFB"/>
+          </a:solidFill>
+          <a:ln w="12700">
+            <a:solidFill>
+              <a:srgbClr val="DEE2E6"/>
             </a:solidFill>
           </a:ln>
         </p:spPr>
@@ -41874,7 +43798,7 @@
       </p:sp>
       <p:pic>
         <p:nvPicPr>
-          <p:cNvPr id="4" name="Picture 3" descr="overfitting_comparativa_generalizacion.png"/>
+          <p:cNvPr id="6" name="Picture 5" descr="overfitting_comparativa_generalizacion.png"/>
           <p:cNvPicPr>
             <a:picLocks noChangeAspect="1"/>
           </p:cNvPicPr>
@@ -41888,8 +43812,8 @@
         </p:blipFill>
         <p:spPr>
           <a:xfrm>
-            <a:off x="868680" y="1261872"/>
-            <a:ext cx="4480560" cy="2880360"/>
+            <a:off x="1005840" y="1261872"/>
+            <a:ext cx="4480560" cy="2926080"/>
           </a:xfrm>
           <a:prstGeom prst="rect">
             <a:avLst/>
@@ -41898,14 +43822,14 @@
       </p:pic>
       <p:sp>
         <p:nvSpPr>
-          <p:cNvPr id="5" name="TextBox 4"/>
+          <p:cNvPr id="7" name="TextBox 6"/>
           <p:cNvSpPr txBox="1"/>
           <p:nvPr/>
         </p:nvSpPr>
         <p:spPr>
           <a:xfrm>
-            <a:off x="868680" y="4224528"/>
-            <a:ext cx="4480560" cy="502920"/>
+            <a:off x="1005840" y="4279392"/>
+            <a:ext cx="4480560" cy="365760"/>
           </a:xfrm>
           <a:prstGeom prst="rect">
             <a:avLst/>
@@ -41919,38 +43843,38 @@
           <a:lstStyle/>
           <a:p>
             <a:pPr algn="ctr">
-              <a:defRPr sz="850">
+              <a:defRPr sz="800">
                 <a:solidFill>
-                  <a:srgbClr val="595959"/>
+                  <a:srgbClr val="5F6973"/>
                 </a:solidFill>
               </a:defRPr>
             </a:pPr>
             <a:r>
-              <a:t>Figura: Comparativa de errores y brecha de generalización: Sin Regularizar vs. Early Stopping.</a:t>
+              <a:t>Figura: Comparativa de error de test y brecha de generalización: Sin Regularizar vs. Con Early Stopping.</a:t>
             </a:r>
           </a:p>
         </p:txBody>
       </p:sp>
       <p:sp>
         <p:nvSpPr>
-          <p:cNvPr id="6" name="Rounded Rectangle 5"/>
+          <p:cNvPr id="8" name="Rounded Rectangle 7"/>
           <p:cNvSpPr/>
           <p:nvPr/>
         </p:nvSpPr>
         <p:spPr>
           <a:xfrm>
-            <a:off x="5577840" y="1188720"/>
-            <a:ext cx="2788920" cy="3611880"/>
+            <a:off x="5715000" y="1188720"/>
+            <a:ext cx="2514600" cy="3520440"/>
           </a:xfrm>
           <a:prstGeom prst="roundRect">
             <a:avLst/>
           </a:prstGeom>
           <a:solidFill>
-            <a:srgbClr val="F8F9FA"/>
+            <a:srgbClr val="F9FAFB"/>
           </a:solidFill>
           <a:ln w="12700">
             <a:solidFill>
-              <a:srgbClr val="DADEE2"/>
+              <a:srgbClr val="DEE2E6"/>
             </a:solidFill>
           </a:ln>
         </p:spPr>
@@ -41978,14 +43902,371 @@
       </p:sp>
       <p:sp>
         <p:nvSpPr>
-          <p:cNvPr id="7" name="TextBox 6"/>
+          <p:cNvPr id="9" name="Rounded Rectangle 8"/>
+          <p:cNvSpPr/>
+          <p:nvPr/>
+        </p:nvSpPr>
+        <p:spPr>
+          <a:xfrm>
+            <a:off x="5833872" y="1298448"/>
+            <a:ext cx="2286000" cy="640080"/>
+          </a:xfrm>
+          <a:prstGeom prst="roundRect">
+            <a:avLst/>
+          </a:prstGeom>
+          <a:solidFill>
+            <a:srgbClr val="EEF7F2"/>
+          </a:solidFill>
+          <a:ln w="12700">
+            <a:solidFill>
+              <a:srgbClr val="C6E6D2"/>
+            </a:solidFill>
+          </a:ln>
+        </p:spPr>
+        <p:style>
+          <a:lnRef idx="1">
+            <a:schemeClr val="accent1"/>
+          </a:lnRef>
+          <a:fillRef idx="3">
+            <a:schemeClr val="accent1"/>
+          </a:fillRef>
+          <a:effectRef idx="2">
+            <a:schemeClr val="accent1"/>
+          </a:effectRef>
+          <a:fontRef idx="minor">
+            <a:schemeClr val="lt1"/>
+          </a:fontRef>
+        </p:style>
+        <p:txBody>
+          <a:bodyPr rtlCol="0" anchor="ctr"/>
+          <a:lstStyle/>
+          <a:p>
+            <a:pPr algn="ctr"/>
+          </a:p>
+        </p:txBody>
+      </p:sp>
+      <p:sp>
+        <p:nvSpPr>
+          <p:cNvPr id="10" name="TextBox 9"/>
           <p:cNvSpPr txBox="1"/>
           <p:nvPr/>
         </p:nvSpPr>
         <p:spPr>
           <a:xfrm>
-            <a:off x="5687568" y="1280160"/>
-            <a:ext cx="2569464" cy="3429000"/>
+            <a:off x="5907024" y="1353312"/>
+            <a:ext cx="2139696" cy="530352"/>
+          </a:xfrm>
+          <a:prstGeom prst="rect">
+            <a:avLst/>
+          </a:prstGeom>
+          <a:noFill/>
+        </p:spPr>
+        <p:txBody>
+          <a:bodyPr wrap="square" lIns="0" rIns="0" tIns="0" bIns="0">
+            <a:spAutoFit/>
+          </a:bodyPr>
+          <a:lstStyle/>
+          <a:p>
+            <a:pPr algn="ctr"/>
+            <a:r>
+              <a:rPr sz="2100" b="1">
+                <a:solidFill>
+                  <a:srgbClr val="186638"/>
+                </a:solidFill>
+                <a:latin typeface="DM Serif Display"/>
+              </a:rPr>
+              <a:t>-16.65%</a:t>
+            </a:r>
+          </a:p>
+          <a:p>
+            <a:pPr algn="ctr"/>
+            <a:r>
+              <a:rPr sz="830" b="1">
+                <a:solidFill>
+                  <a:srgbClr val="435D74"/>
+                </a:solidFill>
+                <a:latin typeface="Karla"/>
+              </a:rPr>
+              <a:t>REDUCCIÓN DE ERROR EN TEST</a:t>
+            </a:r>
+          </a:p>
+          <a:p>
+            <a:pPr algn="ctr"/>
+            <a:r>
+              <a:rPr sz="730">
+                <a:solidFill>
+                  <a:srgbClr val="5F6973"/>
+                </a:solidFill>
+                <a:latin typeface="Karla"/>
+              </a:rPr>
+              <a:t>0.0435 → 0.0362 (checkpoint óptimo)</a:t>
+            </a:r>
+          </a:p>
+        </p:txBody>
+      </p:sp>
+      <p:sp>
+        <p:nvSpPr>
+          <p:cNvPr id="11" name="Rounded Rectangle 10"/>
+          <p:cNvSpPr/>
+          <p:nvPr/>
+        </p:nvSpPr>
+        <p:spPr>
+          <a:xfrm>
+            <a:off x="5833872" y="2029968"/>
+            <a:ext cx="2286000" cy="640080"/>
+          </a:xfrm>
+          <a:prstGeom prst="roundRect">
+            <a:avLst/>
+          </a:prstGeom>
+          <a:solidFill>
+            <a:srgbClr val="F0F5FA"/>
+          </a:solidFill>
+          <a:ln w="12700">
+            <a:solidFill>
+              <a:srgbClr val="CDDCEB"/>
+            </a:solidFill>
+          </a:ln>
+        </p:spPr>
+        <p:style>
+          <a:lnRef idx="1">
+            <a:schemeClr val="accent1"/>
+          </a:lnRef>
+          <a:fillRef idx="3">
+            <a:schemeClr val="accent1"/>
+          </a:fillRef>
+          <a:effectRef idx="2">
+            <a:schemeClr val="accent1"/>
+          </a:effectRef>
+          <a:fontRef idx="minor">
+            <a:schemeClr val="lt1"/>
+          </a:fontRef>
+        </p:style>
+        <p:txBody>
+          <a:bodyPr rtlCol="0" anchor="ctr"/>
+          <a:lstStyle/>
+          <a:p>
+            <a:pPr algn="ctr"/>
+          </a:p>
+        </p:txBody>
+      </p:sp>
+      <p:sp>
+        <p:nvSpPr>
+          <p:cNvPr id="12" name="TextBox 11"/>
+          <p:cNvSpPr txBox="1"/>
+          <p:nvPr/>
+        </p:nvSpPr>
+        <p:spPr>
+          <a:xfrm>
+            <a:off x="5907024" y="2084832"/>
+            <a:ext cx="2139696" cy="530352"/>
+          </a:xfrm>
+          <a:prstGeom prst="rect">
+            <a:avLst/>
+          </a:prstGeom>
+          <a:noFill/>
+        </p:spPr>
+        <p:txBody>
+          <a:bodyPr wrap="square" lIns="0" rIns="0" tIns="0" bIns="0">
+            <a:spAutoFit/>
+          </a:bodyPr>
+          <a:lstStyle/>
+          <a:p>
+            <a:pPr algn="ctr"/>
+            <a:r>
+              <a:rPr sz="2100" b="1">
+                <a:solidFill>
+                  <a:srgbClr val="144169"/>
+                </a:solidFill>
+                <a:latin typeface="DM Serif Display"/>
+              </a:rPr>
+              <a:t>-37.23%</a:t>
+            </a:r>
+          </a:p>
+          <a:p>
+            <a:pPr algn="ctr"/>
+            <a:r>
+              <a:rPr sz="830" b="1">
+                <a:solidFill>
+                  <a:srgbClr val="435D74"/>
+                </a:solidFill>
+                <a:latin typeface="Karla"/>
+              </a:rPr>
+              <a:t>COMPRESIÓN DE BRECHA</a:t>
+            </a:r>
+          </a:p>
+          <a:p>
+            <a:pPr algn="ctr"/>
+            <a:r>
+              <a:rPr sz="730">
+                <a:solidFill>
+                  <a:srgbClr val="5F6973"/>
+                </a:solidFill>
+                <a:latin typeface="Karla"/>
+              </a:rPr>
+              <a:t>|E_val - E_train|: 0.0401 → 0.0252</a:t>
+            </a:r>
+          </a:p>
+        </p:txBody>
+      </p:sp>
+      <p:sp>
+        <p:nvSpPr>
+          <p:cNvPr id="13" name="Rounded Rectangle 12"/>
+          <p:cNvSpPr/>
+          <p:nvPr/>
+        </p:nvSpPr>
+        <p:spPr>
+          <a:xfrm>
+            <a:off x="5833872" y="2761488"/>
+            <a:ext cx="2286000" cy="640080"/>
+          </a:xfrm>
+          <a:prstGeom prst="roundRect">
+            <a:avLst/>
+          </a:prstGeom>
+          <a:solidFill>
+            <a:srgbClr val="FCF8F2"/>
+          </a:solidFill>
+          <a:ln w="12700">
+            <a:solidFill>
+              <a:srgbClr val="EDDFCD"/>
+            </a:solidFill>
+          </a:ln>
+        </p:spPr>
+        <p:style>
+          <a:lnRef idx="1">
+            <a:schemeClr val="accent1"/>
+          </a:lnRef>
+          <a:fillRef idx="3">
+            <a:schemeClr val="accent1"/>
+          </a:fillRef>
+          <a:effectRef idx="2">
+            <a:schemeClr val="accent1"/>
+          </a:effectRef>
+          <a:fontRef idx="minor">
+            <a:schemeClr val="lt1"/>
+          </a:fontRef>
+        </p:style>
+        <p:txBody>
+          <a:bodyPr rtlCol="0" anchor="ctr"/>
+          <a:lstStyle/>
+          <a:p>
+            <a:pPr algn="ctr"/>
+          </a:p>
+        </p:txBody>
+      </p:sp>
+      <p:sp>
+        <p:nvSpPr>
+          <p:cNvPr id="14" name="TextBox 13"/>
+          <p:cNvSpPr txBox="1"/>
+          <p:nvPr/>
+        </p:nvSpPr>
+        <p:spPr>
+          <a:xfrm>
+            <a:off x="5907024" y="2816352"/>
+            <a:ext cx="2139696" cy="530352"/>
+          </a:xfrm>
+          <a:prstGeom prst="rect">
+            <a:avLst/>
+          </a:prstGeom>
+          <a:noFill/>
+        </p:spPr>
+        <p:txBody>
+          <a:bodyPr wrap="square" lIns="0" rIns="0" tIns="0" bIns="0">
+            <a:spAutoFit/>
+          </a:bodyPr>
+          <a:lstStyle/>
+          <a:p>
+            <a:pPr algn="ctr"/>
+            <a:r>
+              <a:rPr sz="2100" b="1">
+                <a:solidFill>
+                  <a:srgbClr val="7D542D"/>
+                </a:solidFill>
+                <a:latin typeface="DM Serif Display"/>
+              </a:rPr>
+              <a:t>95.73%</a:t>
+            </a:r>
+          </a:p>
+          <a:p>
+            <a:pPr algn="ctr"/>
+            <a:r>
+              <a:rPr sz="830" b="1">
+                <a:solidFill>
+                  <a:srgbClr val="435D74"/>
+                </a:solidFill>
+                <a:latin typeface="Karla"/>
+              </a:rPr>
+              <a:t>AHORRO COMPUTACIONAL</a:t>
+            </a:r>
+          </a:p>
+          <a:p>
+            <a:pPr algn="ctr"/>
+            <a:r>
+              <a:rPr sz="730">
+                <a:solidFill>
+                  <a:srgbClr val="5F6973"/>
+                </a:solidFill>
+                <a:latin typeface="Karla"/>
+              </a:rPr>
+              <a:t>Parada en época 43 en vez de 1000</a:t>
+            </a:r>
+          </a:p>
+        </p:txBody>
+      </p:sp>
+      <p:sp>
+        <p:nvSpPr>
+          <p:cNvPr id="15" name="Rounded Rectangle 14"/>
+          <p:cNvSpPr/>
+          <p:nvPr/>
+        </p:nvSpPr>
+        <p:spPr>
+          <a:xfrm>
+            <a:off x="5833872" y="3520440"/>
+            <a:ext cx="2286000" cy="1051560"/>
+          </a:xfrm>
+          <a:prstGeom prst="roundRect">
+            <a:avLst/>
+          </a:prstGeom>
+          <a:solidFill>
+            <a:srgbClr val="F4F6F8"/>
+          </a:solidFill>
+          <a:ln w="12700">
+            <a:solidFill>
+              <a:srgbClr val="DEE2E6"/>
+            </a:solidFill>
+          </a:ln>
+        </p:spPr>
+        <p:style>
+          <a:lnRef idx="1">
+            <a:schemeClr val="accent1"/>
+          </a:lnRef>
+          <a:fillRef idx="3">
+            <a:schemeClr val="accent1"/>
+          </a:fillRef>
+          <a:effectRef idx="2">
+            <a:schemeClr val="accent1"/>
+          </a:effectRef>
+          <a:fontRef idx="minor">
+            <a:schemeClr val="lt1"/>
+          </a:fontRef>
+        </p:style>
+        <p:txBody>
+          <a:bodyPr rtlCol="0" anchor="ctr"/>
+          <a:lstStyle/>
+          <a:p>
+            <a:pPr algn="ctr"/>
+          </a:p>
+        </p:txBody>
+      </p:sp>
+      <p:sp>
+        <p:nvSpPr>
+          <p:cNvPr id="16" name="TextBox 15"/>
+          <p:cNvSpPr txBox="1"/>
+          <p:nvPr/>
+        </p:nvSpPr>
+        <p:spPr>
+          <a:xfrm>
+            <a:off x="5897880" y="3566160"/>
+            <a:ext cx="2148840" cy="960120"/>
           </a:xfrm>
           <a:prstGeom prst="rect">
             <a:avLst/>
@@ -42000,153 +44281,28 @@
           <a:p>
             <a:pPr>
               <a:spcAft>
-                <a:spcPts val="600"/>
-              </a:spcAft>
-              <a:defRPr sz="1300" b="1">
+                <a:spcPts val="200"/>
+              </a:spcAft>
+              <a:defRPr sz="780" b="1">
                 <a:solidFill>
-                  <a:srgbClr val="88664A"/>
+                  <a:srgbClr val="0E2A47"/>
                 </a:solidFill>
-                <a:latin typeface="DM Serif Display"/>
               </a:defRPr>
             </a:pPr>
             <a:r>
-              <a:t>Impacto Cuantitativo Medido</a:t>
+              <a:t>★ EQUIVALENCIA L₂ (WEIGHT DECAY)</a:t>
             </a:r>
           </a:p>
           <a:p>
-            <a:pPr algn="l">
-              <a:spcAft>
-                <a:spcPts val="500"/>
-              </a:spcAft>
-            </a:pPr>
-            <a:r>
-              <a:rPr sz="850" b="1">
-                <a:solidFill>
-                  <a:srgbClr val="88664A"/>
-                </a:solidFill>
-                <a:latin typeface="Karla"/>
-              </a:rPr>
-              <a:t>▪ </a:t>
-            </a:r>
-            <a:r>
-              <a:rPr sz="950" b="1">
-                <a:solidFill>
-                  <a:srgbClr val="88664A"/>
-                </a:solidFill>
-                <a:latin typeface="Karla"/>
-              </a:rPr>
-              <a:t>-16.65% en E_test: </a:t>
-            </a:r>
-            <a:r>
-              <a:rPr sz="950">
+            <a:pPr>
+              <a:defRPr sz="720">
                 <a:solidFill>
                   <a:srgbClr val="222222"/>
                 </a:solidFill>
-                <a:latin typeface="Karla"/>
-              </a:rPr>
-              <a:t>El error cuadrático en prueba desciende de 0.0435 a 0.0362 al restaurar el checkpoint óptimo.</a:t>
-            </a:r>
-          </a:p>
-          <a:p>
-            <a:pPr algn="l">
-              <a:spcAft>
-                <a:spcPts val="500"/>
-              </a:spcAft>
+              </a:defRPr>
             </a:pPr>
             <a:r>
-              <a:rPr sz="850" b="1">
-                <a:solidFill>
-                  <a:srgbClr val="88664A"/>
-                </a:solidFill>
-                <a:latin typeface="Karla"/>
-              </a:rPr>
-              <a:t>▪ </a:t>
-            </a:r>
-            <a:r>
-              <a:rPr sz="950" b="1">
-                <a:solidFill>
-                  <a:srgbClr val="88664A"/>
-                </a:solidFill>
-                <a:latin typeface="Karla"/>
-              </a:rPr>
-              <a:t>-37.23% en Brecha: </a:t>
-            </a:r>
-            <a:r>
-              <a:rPr sz="950">
-                <a:solidFill>
-                  <a:srgbClr val="222222"/>
-                </a:solidFill>
-                <a:latin typeface="Karla"/>
-              </a:rPr>
-              <a:t>La discrepancia de generalización |E_val - E_train| se comprime de 0.0401 a 0.0252.</a:t>
-            </a:r>
-          </a:p>
-          <a:p>
-            <a:pPr algn="l">
-              <a:spcAft>
-                <a:spcPts val="500"/>
-              </a:spcAft>
-            </a:pPr>
-            <a:r>
-              <a:rPr sz="850" b="1">
-                <a:solidFill>
-                  <a:srgbClr val="88664A"/>
-                </a:solidFill>
-                <a:latin typeface="Karla"/>
-              </a:rPr>
-              <a:t>▪ </a:t>
-            </a:r>
-            <a:r>
-              <a:rPr sz="950" b="1">
-                <a:solidFill>
-                  <a:srgbClr val="88664A"/>
-                </a:solidFill>
-                <a:latin typeface="Karla"/>
-              </a:rPr>
-              <a:t>95.73% de Ahorro: </a:t>
-            </a:r>
-            <a:r>
-              <a:rPr sz="950">
-                <a:solidFill>
-                  <a:srgbClr val="222222"/>
-                </a:solidFill>
-                <a:latin typeface="Karla"/>
-              </a:rPr>
-              <a:t>Entrenamiento detenido en época 43 en lugar de 1000: economía computacional y energética radical.</a:t>
-            </a:r>
-          </a:p>
-          <a:p>
-            <a:pPr algn="l">
-              <a:spcAft>
-                <a:spcPts val="400"/>
-              </a:spcAft>
-            </a:pPr>
-            <a:r>
-              <a:rPr sz="850" b="1">
-                <a:solidFill>
-                  <a:srgbClr val="88664A"/>
-                </a:solidFill>
-                <a:latin typeface="Karla"/>
-              </a:rPr>
-              <a:t>▪ </a:t>
-            </a:r>
-            <a:r>
-              <a:rPr sz="950" b="1">
-                <a:solidFill>
-                  <a:srgbClr val="88664A"/>
-                </a:solidFill>
-                <a:latin typeface="Karla"/>
-              </a:rPr>
-              <a:t>Equivalencia L₂: </a:t>
-            </a:r>
-            <a:r>
-              <a:rPr sz="950">
-                <a:solidFill>
-                  <a:srgbClr val="222222"/>
-                </a:solidFill>
-                <a:latin typeface="Karla"/>
-              </a:rPr>
-              <a:t>Actúa como decaimiento de peso implícito (weight decay), acotando la norma ||W||₂ sin costo adicional.</a:t>
+              <a:t>La parada temprana actúa matemáticamente como una penalización espectral de norma ||W||₂, restringiendo el espacio de hipótesis sin costo computacional adicional.</a:t>
             </a:r>
           </a:p>
         </p:txBody>
